--- a/Bluestock_MF_Presentation.pptx
+++ b/Bluestock_MF_Presentation.pptx
@@ -3114,7 +3114,7 @@
             <a:avLst/>
           </a:prstGeom>
           <a:solidFill>
-            <a:srgbClr val="102C57"/>
+            <a:srgbClr val="0F2537"/>
           </a:solidFill>
           <a:ln>
             <a:noFill/>
@@ -3150,8 +3150,8 @@
         </p:nvSpPr>
         <p:spPr>
           <a:xfrm>
-            <a:off x="1097280" y="1828800"/>
-            <a:ext cx="10058400" cy="3200400"/>
+            <a:off x="1097280" y="1645920"/>
+            <a:ext cx="10058400" cy="2011680"/>
           </a:xfrm>
           <a:prstGeom prst="rect">
             <a:avLst/>
@@ -3165,10 +3165,11 @@
           <a:lstStyle/>
           <a:p>
             <a:pPr>
-              <a:defRPr sz="2200" b="1">
-                <a:solidFill>
-                  <a:srgbClr val="64B4FF"/>
-                </a:solidFill>
+              <a:defRPr sz="1400" b="1">
+                <a:solidFill>
+                  <a:srgbClr val="0284C7"/>
+                </a:solidFill>
+                <a:latin typeface="Arial"/>
               </a:defRPr>
             </a:pPr>
             <a:r>
@@ -3177,47 +3178,135 @@
           </a:p>
           <a:p>
             <a:pPr>
-              <a:spcBef>
-                <a:spcPts val="1000"/>
-              </a:spcBef>
-              <a:defRPr sz="4200" b="1">
+              <a:defRPr sz="3600" b="1">
                 <a:solidFill>
                   <a:srgbClr val="FFFFFF"/>
                 </a:solidFill>
-              </a:defRPr>
-            </a:pPr>
-            <a:r>
-              <a:t>Mutual Fund Analytics Platform</a:t>
-            </a:r>
-          </a:p>
-          <a:p>
-            <a:pPr>
-              <a:spcBef>
-                <a:spcPts val="1400"/>
-              </a:spcBef>
-              <a:defRPr sz="1800">
-                <a:solidFill>
-                  <a:srgbClr val="DCE6F5"/>
-                </a:solidFill>
-              </a:defRPr>
-            </a:pPr>
-            <a:r>
-              <a:t>End-to-End Data Engineering, ETL Pipeline, Financial Risk Analytics &amp; Interactive Dashboard</a:t>
-            </a:r>
-          </a:p>
-          <a:p>
-            <a:pPr>
-              <a:spcBef>
-                <a:spcPts val="2400"/>
-              </a:spcBef>
-              <a:defRPr sz="1400">
-                <a:solidFill>
-                  <a:srgbClr val="B4CDEB"/>
-                </a:solidFill>
-              </a:defRPr>
-            </a:pPr>
-            <a:r>
-              <a:t>Milestone: Day 1 Ingestion Complete  |  GitHub: rajeevreddy23/Day-1-Data-ingestion-complete</a:t>
+                <a:latin typeface="Arial"/>
+              </a:defRPr>
+            </a:pPr>
+            <a:r>
+              <a:t>Mutual Fund Analytics &amp; Intelligence Platform</a:t>
+            </a:r>
+          </a:p>
+          <a:p>
+            <a:pPr>
+              <a:defRPr sz="1500">
+                <a:solidFill>
+                  <a:srgbClr val="CBD5E1"/>
+                </a:solidFill>
+                <a:latin typeface="Arial"/>
+              </a:defRPr>
+            </a:pPr>
+            <a:r>
+              <a:t>End-to-End Data Pipeline, Financial Risk Analytics, Scorecards &amp; Interactive Dashboard</a:t>
+            </a:r>
+          </a:p>
+        </p:txBody>
+      </p:sp>
+      <p:sp>
+        <p:nvSpPr>
+          <p:cNvPr id="4" name="Rounded Rectangle 3"/>
+          <p:cNvSpPr/>
+          <p:nvPr/>
+        </p:nvSpPr>
+        <p:spPr>
+          <a:xfrm>
+            <a:off x="1097280" y="4114800"/>
+            <a:ext cx="9966960" cy="1645920"/>
+          </a:xfrm>
+          <a:prstGeom prst="roundRect">
+            <a:avLst/>
+          </a:prstGeom>
+          <a:solidFill>
+            <a:srgbClr val="1A365D"/>
+          </a:solidFill>
+          <a:ln>
+            <a:solidFill>
+              <a:srgbClr val="0284C7"/>
+            </a:solidFill>
+          </a:ln>
+        </p:spPr>
+        <p:style>
+          <a:lnRef idx="1">
+            <a:schemeClr val="accent1"/>
+          </a:lnRef>
+          <a:fillRef idx="3">
+            <a:schemeClr val="accent1"/>
+          </a:fillRef>
+          <a:effectRef idx="2">
+            <a:schemeClr val="accent1"/>
+          </a:effectRef>
+          <a:fontRef idx="minor">
+            <a:schemeClr val="lt1"/>
+          </a:fontRef>
+        </p:style>
+        <p:txBody>
+          <a:bodyPr rtlCol="0" anchor="ctr"/>
+          <a:lstStyle/>
+          <a:p>
+            <a:pPr algn="ctr"/>
+          </a:p>
+        </p:txBody>
+      </p:sp>
+      <p:sp>
+        <p:nvSpPr>
+          <p:cNvPr id="5" name="TextBox 4"/>
+          <p:cNvSpPr txBox="1"/>
+          <p:nvPr/>
+        </p:nvSpPr>
+        <p:spPr>
+          <a:xfrm>
+            <a:off x="1371600" y="4297680"/>
+            <a:ext cx="9418320" cy="1280160"/>
+          </a:xfrm>
+          <a:prstGeom prst="rect">
+            <a:avLst/>
+          </a:prstGeom>
+          <a:noFill/>
+        </p:spPr>
+        <p:txBody>
+          <a:bodyPr wrap="none">
+            <a:spAutoFit/>
+          </a:bodyPr>
+          <a:lstStyle/>
+          <a:p>
+            <a:pPr>
+              <a:defRPr sz="1100" b="1">
+                <a:solidFill>
+                  <a:srgbClr val="0284C7"/>
+                </a:solidFill>
+                <a:latin typeface="Arial"/>
+              </a:defRPr>
+            </a:pPr>
+            <a:r>
+              <a:t>CAPSTONE SPECIFICATIONS &amp; PROJECT DETAILS</a:t>
+            </a:r>
+          </a:p>
+          <a:p>
+            <a:pPr>
+              <a:defRPr sz="1150">
+                <a:solidFill>
+                  <a:srgbClr val="FFFFFF"/>
+                </a:solidFill>
+                <a:latin typeface="Arial"/>
+              </a:defRPr>
+            </a:pPr>
+            <a:r>
+              <a:t>• Assigned To: Poulami Dutta (PO) | Rajeev Reddy (RA) | Thadakamalla Likith Kumar (TH)</a:t>
+            </a:r>
+          </a:p>
+          <a:p>
+            <a:pPr>
+              <a:defRPr sz="1100">
+                <a:solidFill>
+                  <a:srgbClr val="CBD5E1"/>
+                </a:solidFill>
+                <a:latin typeface="Arial"/>
+              </a:defRPr>
+            </a:pPr>
+            <a:r>
+              <a:t>• Capstone Project I: Mutual Fund Analytics  |  Project Start Date: 01 Sep 2026  |  Final Release: v1.0</a:t>
             </a:r>
           </a:p>
         </p:txBody>
@@ -3242,75 +3331,23 @@
       <p:grpSpPr/>
       <p:sp>
         <p:nvSpPr>
-          <p:cNvPr id="2" name="TextBox 1"/>
-          <p:cNvSpPr txBox="1"/>
-          <p:nvPr/>
-        </p:nvSpPr>
-        <p:spPr>
-          <a:xfrm>
-            <a:off x="731520" y="457200"/>
-            <a:ext cx="10698480" cy="1097280"/>
-          </a:xfrm>
-          <a:prstGeom prst="rect">
-            <a:avLst/>
-          </a:prstGeom>
-          <a:noFill/>
-        </p:spPr>
-        <p:txBody>
-          <a:bodyPr wrap="square" lIns="0" tIns="0" rIns="0" bIns="0">
-            <a:spAutoFit/>
-          </a:bodyPr>
-          <a:lstStyle/>
-          <a:p>
-            <a:pPr>
-              <a:defRPr sz="2800" b="1">
-                <a:solidFill>
-                  <a:srgbClr val="102C57"/>
-                </a:solidFill>
-              </a:defRPr>
-            </a:pPr>
-            <a:r>
-              <a:t>Interactive Streamlit Web Application</a:t>
-            </a:r>
-          </a:p>
-          <a:p>
-            <a:pPr>
-              <a:spcBef>
-                <a:spcPts val="400"/>
-              </a:spcBef>
-              <a:defRPr sz="1400">
-                <a:solidFill>
-                  <a:srgbClr val="6C757D"/>
-                </a:solidFill>
-              </a:defRPr>
-            </a:pPr>
-            <a:r>
-              <a:t>Full-featured interactive multi-page analytics dashboard</a:t>
-            </a:r>
-          </a:p>
-        </p:txBody>
-      </p:sp>
-      <p:sp>
-        <p:nvSpPr>
-          <p:cNvPr id="3" name="Rectangle 2"/>
+          <p:cNvPr id="2" name="Rectangle 1"/>
           <p:cNvSpPr/>
           <p:nvPr/>
         </p:nvSpPr>
         <p:spPr>
           <a:xfrm>
-            <a:off x="731520" y="1645920"/>
-            <a:ext cx="5120640" cy="4572000"/>
+            <a:off x="0" y="0"/>
+            <a:ext cx="12191695" cy="1005840"/>
           </a:xfrm>
           <a:prstGeom prst="rect">
             <a:avLst/>
           </a:prstGeom>
           <a:solidFill>
-            <a:srgbClr val="F5F7FA"/>
+            <a:srgbClr val="0F2537"/>
           </a:solidFill>
-          <a:ln w="19050">
-            <a:solidFill>
-              <a:srgbClr val="3565A9"/>
-            </a:solidFill>
+          <a:ln>
+            <a:noFill/>
           </a:ln>
         </p:spPr>
         <p:style>
@@ -3328,103 +3365,32 @@
           </a:fontRef>
         </p:style>
         <p:txBody>
-          <a:bodyPr rtlCol="0" anchor="ctr" wrap="square" lIns="274320" rIns="274320" tIns="228600" bIns="228600"/>
-          <a:lstStyle/>
-          <a:p>
-            <a:pPr algn="ctr">
-              <a:defRPr sz="1800" b="1">
-                <a:solidFill>
-                  <a:srgbClr val="102C57"/>
-                </a:solidFill>
-              </a:defRPr>
-            </a:pPr>
-            <a:r>
-              <a:t>Dashboard Pages &amp; Features</a:t>
-            </a:r>
-          </a:p>
-          <a:p>
-            <a:pPr>
-              <a:spcBef>
-                <a:spcPts val="600"/>
-              </a:spcBef>
-              <a:defRPr sz="1300">
-                <a:solidFill>
-                  <a:srgbClr val="212529"/>
-                </a:solidFill>
-              </a:defRPr>
-            </a:pPr>
-            <a:r>
-              <a:t>• Page 1: Industry Macro Trends (AUM growth, SIP inflow trajectories, folio expansion).</a:t>
-            </a:r>
-          </a:p>
-          <a:p>
-            <a:pPr>
-              <a:spcBef>
-                <a:spcPts val="600"/>
-              </a:spcBef>
-              <a:defRPr sz="1300">
-                <a:solidFill>
-                  <a:srgbClr val="212529"/>
-                </a:solidFill>
-              </a:defRPr>
-            </a:pPr>
-            <a:r>
-              <a:t>• Page 2: Fund Performance &amp; Screener (Interactive NAV comparisons, Sharpe/Sortino scatter plots).</a:t>
-            </a:r>
-          </a:p>
-          <a:p>
-            <a:pPr>
-              <a:spcBef>
-                <a:spcPts val="600"/>
-              </a:spcBef>
-              <a:defRPr sz="1300">
-                <a:solidFill>
-                  <a:srgbClr val="212529"/>
-                </a:solidFill>
-              </a:defRPr>
-            </a:pPr>
-            <a:r>
-              <a:t>• Page 3: Investor Demographics (State-wise SIP heatmaps, T30 vs B30 adoption, payment modes).</a:t>
-            </a:r>
-          </a:p>
-          <a:p>
-            <a:pPr>
-              <a:spcBef>
-                <a:spcPts val="600"/>
-              </a:spcBef>
-              <a:defRPr sz="1300">
-                <a:solidFill>
-                  <a:srgbClr val="212529"/>
-                </a:solidFill>
-              </a:defRPr>
-            </a:pPr>
-            <a:r>
-              <a:t>• Page 4: Risk Analytics &amp; Holdings (Sector HHI, VaR matrices, rolling Sharpe trends).</a:t>
-            </a:r>
-          </a:p>
-        </p:txBody>
-      </p:sp>
-      <p:sp>
-        <p:nvSpPr>
-          <p:cNvPr id="4" name="Rectangle 3"/>
+          <a:bodyPr rtlCol="0" anchor="ctr"/>
+          <a:lstStyle/>
+          <a:p>
+            <a:pPr algn="ctr"/>
+          </a:p>
+        </p:txBody>
+      </p:sp>
+      <p:sp>
+        <p:nvSpPr>
+          <p:cNvPr id="3" name="Rectangle 2"/>
           <p:cNvSpPr/>
           <p:nvPr/>
         </p:nvSpPr>
         <p:spPr>
           <a:xfrm>
-            <a:off x="6217920" y="1645920"/>
-            <a:ext cx="5120640" cy="4572000"/>
+            <a:off x="0" y="1005840"/>
+            <a:ext cx="12191695" cy="54864"/>
           </a:xfrm>
           <a:prstGeom prst="rect">
             <a:avLst/>
           </a:prstGeom>
           <a:solidFill>
-            <a:srgbClr val="F5F7FA"/>
+            <a:srgbClr val="0284C7"/>
           </a:solidFill>
-          <a:ln w="19050">
-            <a:solidFill>
-              <a:srgbClr val="3565A9"/>
-            </a:solidFill>
+          <a:ln>
+            <a:noFill/>
           </a:ln>
         </p:spPr>
         <p:style>
@@ -3442,82 +3408,376 @@
           </a:fontRef>
         </p:style>
         <p:txBody>
-          <a:bodyPr rtlCol="0" anchor="ctr" wrap="square" lIns="274320" rIns="274320" tIns="228600" bIns="228600"/>
-          <a:lstStyle/>
-          <a:p>
-            <a:pPr algn="ctr">
-              <a:defRPr sz="1800" b="1">
-                <a:solidFill>
-                  <a:srgbClr val="102C57"/>
-                </a:solidFill>
-              </a:defRPr>
-            </a:pPr>
-            <a:r>
-              <a:t>User Experience Highlights</a:t>
-            </a:r>
-          </a:p>
-          <a:p>
-            <a:pPr>
-              <a:spcBef>
-                <a:spcPts val="600"/>
-              </a:spcBef>
-              <a:defRPr sz="1300">
-                <a:solidFill>
-                  <a:srgbClr val="212529"/>
-                </a:solidFill>
-              </a:defRPr>
-            </a:pPr>
-            <a:r>
-              <a:t>• Interactive Plotly visualizations with zoom, pan, hover tooltips.</a:t>
-            </a:r>
-          </a:p>
-          <a:p>
-            <a:pPr>
-              <a:spcBef>
-                <a:spcPts val="600"/>
-              </a:spcBef>
-              <a:defRPr sz="1300">
-                <a:solidFill>
-                  <a:srgbClr val="212529"/>
-                </a:solidFill>
-              </a:defRPr>
-            </a:pPr>
-            <a:r>
-              <a:t>• Dynamic filtering by AMC, Sub-Category, Risk Grade, and Time Horizon.</a:t>
-            </a:r>
-          </a:p>
-          <a:p>
-            <a:pPr>
-              <a:spcBef>
-                <a:spcPts val="600"/>
-              </a:spcBef>
-              <a:defRPr sz="1300">
-                <a:solidFill>
-                  <a:srgbClr val="212529"/>
-                </a:solidFill>
-              </a:defRPr>
-            </a:pPr>
-            <a:r>
-              <a:t>• Real-time database connectivity to bluestock_mf.db via SQLAlchemy.</a:t>
-            </a:r>
-          </a:p>
-          <a:p>
-            <a:pPr>
-              <a:spcBef>
-                <a:spcPts val="600"/>
-              </a:spcBef>
-              <a:defRPr sz="1300">
-                <a:solidFill>
-                  <a:srgbClr val="212529"/>
-                </a:solidFill>
-              </a:defRPr>
-            </a:pPr>
-            <a:r>
-              <a:t>• One-click CSV data export for institutional analysts.</a:t>
-            </a:r>
-          </a:p>
-        </p:txBody>
-      </p:sp>
+          <a:bodyPr rtlCol="0" anchor="ctr"/>
+          <a:lstStyle/>
+          <a:p>
+            <a:pPr algn="ctr"/>
+          </a:p>
+        </p:txBody>
+      </p:sp>
+      <p:sp>
+        <p:nvSpPr>
+          <p:cNvPr id="4" name="TextBox 3"/>
+          <p:cNvSpPr txBox="1"/>
+          <p:nvPr/>
+        </p:nvSpPr>
+        <p:spPr>
+          <a:xfrm>
+            <a:off x="731520" y="109728"/>
+            <a:ext cx="10515600" cy="274320"/>
+          </a:xfrm>
+          <a:prstGeom prst="rect">
+            <a:avLst/>
+          </a:prstGeom>
+          <a:noFill/>
+        </p:spPr>
+        <p:txBody>
+          <a:bodyPr wrap="square">
+            <a:spAutoFit/>
+          </a:bodyPr>
+          <a:lstStyle/>
+          <a:p>
+            <a:pPr>
+              <a:defRPr sz="900" b="1">
+                <a:solidFill>
+                  <a:srgbClr val="0284C7"/>
+                </a:solidFill>
+                <a:latin typeface="Arial"/>
+              </a:defRPr>
+            </a:pPr>
+            <a:r>
+              <a:t>BLUESTOCK FINTECH • MUTUAL FUND ANALYTICS CAPSTONE</a:t>
+            </a:r>
+          </a:p>
+        </p:txBody>
+      </p:sp>
+      <p:sp>
+        <p:nvSpPr>
+          <p:cNvPr id="5" name="TextBox 4"/>
+          <p:cNvSpPr txBox="1"/>
+          <p:nvPr/>
+        </p:nvSpPr>
+        <p:spPr>
+          <a:xfrm>
+            <a:off x="731520" y="347472"/>
+            <a:ext cx="10515600" cy="548640"/>
+          </a:xfrm>
+          <a:prstGeom prst="rect">
+            <a:avLst/>
+          </a:prstGeom>
+          <a:noFill/>
+        </p:spPr>
+        <p:txBody>
+          <a:bodyPr wrap="square">
+            <a:spAutoFit/>
+          </a:bodyPr>
+          <a:lstStyle/>
+          <a:p>
+            <a:pPr>
+              <a:defRPr sz="2000" b="1">
+                <a:solidFill>
+                  <a:srgbClr val="FFFFFF"/>
+                </a:solidFill>
+                <a:latin typeface="Arial"/>
+              </a:defRPr>
+            </a:pPr>
+            <a:r>
+              <a:t>9. Interactive Dashboard: Investor Analytics &amp; Recommender</a:t>
+            </a:r>
+          </a:p>
+        </p:txBody>
+      </p:sp>
+      <p:sp>
+        <p:nvSpPr>
+          <p:cNvPr id="6" name="Rectangle 5"/>
+          <p:cNvSpPr/>
+          <p:nvPr/>
+        </p:nvSpPr>
+        <p:spPr>
+          <a:xfrm>
+            <a:off x="0" y="6492240"/>
+            <a:ext cx="12191695" cy="365760"/>
+          </a:xfrm>
+          <a:prstGeom prst="rect">
+            <a:avLst/>
+          </a:prstGeom>
+          <a:solidFill>
+            <a:srgbClr val="F8FAFC"/>
+          </a:solidFill>
+          <a:ln>
+            <a:solidFill>
+              <a:srgbClr val="E2E8F0"/>
+            </a:solidFill>
+          </a:ln>
+        </p:spPr>
+        <p:style>
+          <a:lnRef idx="1">
+            <a:schemeClr val="accent1"/>
+          </a:lnRef>
+          <a:fillRef idx="3">
+            <a:schemeClr val="accent1"/>
+          </a:fillRef>
+          <a:effectRef idx="2">
+            <a:schemeClr val="accent1"/>
+          </a:effectRef>
+          <a:fontRef idx="minor">
+            <a:schemeClr val="lt1"/>
+          </a:fontRef>
+        </p:style>
+        <p:txBody>
+          <a:bodyPr rtlCol="0" anchor="ctr"/>
+          <a:lstStyle/>
+          <a:p>
+            <a:pPr algn="ctr"/>
+          </a:p>
+        </p:txBody>
+      </p:sp>
+      <p:sp>
+        <p:nvSpPr>
+          <p:cNvPr id="7" name="TextBox 6"/>
+          <p:cNvSpPr txBox="1"/>
+          <p:nvPr/>
+        </p:nvSpPr>
+        <p:spPr>
+          <a:xfrm>
+            <a:off x="731520" y="6537960"/>
+            <a:ext cx="10515600" cy="274320"/>
+          </a:xfrm>
+          <a:prstGeom prst="rect">
+            <a:avLst/>
+          </a:prstGeom>
+          <a:noFill/>
+        </p:spPr>
+        <p:txBody>
+          <a:bodyPr wrap="none">
+            <a:spAutoFit/>
+          </a:bodyPr>
+          <a:lstStyle/>
+          <a:p>
+            <a:pPr>
+              <a:defRPr sz="850">
+                <a:solidFill>
+                  <a:srgbClr val="64748B"/>
+                </a:solidFill>
+                <a:latin typeface="Arial"/>
+              </a:defRPr>
+            </a:pPr>
+            <a:r>
+              <a:t>Confidential • Bluestock Fintech Analytics • Group: 62FMBF • Author: Rajeev Reddy</a:t>
+            </a:r>
+          </a:p>
+        </p:txBody>
+      </p:sp>
+      <p:sp>
+        <p:nvSpPr>
+          <p:cNvPr id="8" name="Rounded Rectangle 7"/>
+          <p:cNvSpPr/>
+          <p:nvPr/>
+        </p:nvSpPr>
+        <p:spPr>
+          <a:xfrm>
+            <a:off x="731520" y="1280160"/>
+            <a:ext cx="5212080" cy="4937760"/>
+          </a:xfrm>
+          <a:prstGeom prst="roundRect">
+            <a:avLst/>
+          </a:prstGeom>
+          <a:solidFill>
+            <a:srgbClr val="FFFFFF"/>
+          </a:solidFill>
+          <a:ln w="12700">
+            <a:solidFill>
+              <a:srgbClr val="E2E8F0"/>
+            </a:solidFill>
+          </a:ln>
+        </p:spPr>
+        <p:style>
+          <a:lnRef idx="1">
+            <a:schemeClr val="accent1"/>
+          </a:lnRef>
+          <a:fillRef idx="3">
+            <a:schemeClr val="accent1"/>
+          </a:fillRef>
+          <a:effectRef idx="2">
+            <a:schemeClr val="accent1"/>
+          </a:effectRef>
+          <a:fontRef idx="minor">
+            <a:schemeClr val="lt1"/>
+          </a:fontRef>
+        </p:style>
+        <p:txBody>
+          <a:bodyPr rtlCol="0" anchor="ctr"/>
+          <a:lstStyle/>
+          <a:p>
+            <a:pPr algn="ctr"/>
+          </a:p>
+        </p:txBody>
+      </p:sp>
+      <p:sp>
+        <p:nvSpPr>
+          <p:cNvPr id="9" name="TextBox 8"/>
+          <p:cNvSpPr txBox="1"/>
+          <p:nvPr/>
+        </p:nvSpPr>
+        <p:spPr>
+          <a:xfrm>
+            <a:off x="914400" y="1417319"/>
+            <a:ext cx="4846320" cy="411480"/>
+          </a:xfrm>
+          <a:prstGeom prst="rect">
+            <a:avLst/>
+          </a:prstGeom>
+          <a:noFill/>
+        </p:spPr>
+        <p:txBody>
+          <a:bodyPr wrap="square">
+            <a:spAutoFit/>
+          </a:bodyPr>
+          <a:lstStyle/>
+          <a:p>
+            <a:pPr>
+              <a:defRPr sz="1300" b="1">
+                <a:solidFill>
+                  <a:srgbClr val="1A365D"/>
+                </a:solidFill>
+                <a:latin typeface="Arial"/>
+              </a:defRPr>
+            </a:pPr>
+            <a:r>
+              <a:t>Screen 3: Investor Demographic Analytics</a:t>
+            </a:r>
+          </a:p>
+        </p:txBody>
+      </p:sp>
+      <p:pic>
+        <p:nvPicPr>
+          <p:cNvPr id="10" name="Picture 9" descr="dashboard_page_3.png"/>
+          <p:cNvPicPr>
+            <a:picLocks noChangeAspect="1"/>
+          </p:cNvPicPr>
+          <p:nvPr/>
+        </p:nvPicPr>
+        <p:blipFill>
+          <a:blip r:embed="rId2"/>
+          <a:stretch>
+            <a:fillRect/>
+          </a:stretch>
+        </p:blipFill>
+        <p:spPr>
+          <a:xfrm>
+            <a:off x="868680" y="1828800"/>
+            <a:ext cx="4937760" cy="4206240"/>
+          </a:xfrm>
+          <a:prstGeom prst="rect">
+            <a:avLst/>
+          </a:prstGeom>
+        </p:spPr>
+      </p:pic>
+      <p:sp>
+        <p:nvSpPr>
+          <p:cNvPr id="11" name="Rounded Rectangle 10"/>
+          <p:cNvSpPr/>
+          <p:nvPr/>
+        </p:nvSpPr>
+        <p:spPr>
+          <a:xfrm>
+            <a:off x="6217920" y="1280160"/>
+            <a:ext cx="5212080" cy="4937760"/>
+          </a:xfrm>
+          <a:prstGeom prst="roundRect">
+            <a:avLst/>
+          </a:prstGeom>
+          <a:solidFill>
+            <a:srgbClr val="FFFFFF"/>
+          </a:solidFill>
+          <a:ln w="12700">
+            <a:solidFill>
+              <a:srgbClr val="E2E8F0"/>
+            </a:solidFill>
+          </a:ln>
+        </p:spPr>
+        <p:style>
+          <a:lnRef idx="1">
+            <a:schemeClr val="accent1"/>
+          </a:lnRef>
+          <a:fillRef idx="3">
+            <a:schemeClr val="accent1"/>
+          </a:fillRef>
+          <a:effectRef idx="2">
+            <a:schemeClr val="accent1"/>
+          </a:effectRef>
+          <a:fontRef idx="minor">
+            <a:schemeClr val="lt1"/>
+          </a:fontRef>
+        </p:style>
+        <p:txBody>
+          <a:bodyPr rtlCol="0" anchor="ctr"/>
+          <a:lstStyle/>
+          <a:p>
+            <a:pPr algn="ctr"/>
+          </a:p>
+        </p:txBody>
+      </p:sp>
+      <p:sp>
+        <p:nvSpPr>
+          <p:cNvPr id="12" name="TextBox 11"/>
+          <p:cNvSpPr txBox="1"/>
+          <p:nvPr/>
+        </p:nvSpPr>
+        <p:spPr>
+          <a:xfrm>
+            <a:off x="6400800" y="1417319"/>
+            <a:ext cx="4846320" cy="411480"/>
+          </a:xfrm>
+          <a:prstGeom prst="rect">
+            <a:avLst/>
+          </a:prstGeom>
+          <a:noFill/>
+        </p:spPr>
+        <p:txBody>
+          <a:bodyPr wrap="square">
+            <a:spAutoFit/>
+          </a:bodyPr>
+          <a:lstStyle/>
+          <a:p>
+            <a:pPr>
+              <a:defRPr sz="1300" b="1">
+                <a:solidFill>
+                  <a:srgbClr val="1A365D"/>
+                </a:solidFill>
+                <a:latin typeface="Arial"/>
+              </a:defRPr>
+            </a:pPr>
+            <a:r>
+              <a:t>Screen 4: Market Trends &amp; Recommender</a:t>
+            </a:r>
+          </a:p>
+        </p:txBody>
+      </p:sp>
+      <p:pic>
+        <p:nvPicPr>
+          <p:cNvPr id="13" name="Picture 12" descr="dashboard_page_4.png"/>
+          <p:cNvPicPr>
+            <a:picLocks noChangeAspect="1"/>
+          </p:cNvPicPr>
+          <p:nvPr/>
+        </p:nvPicPr>
+        <p:blipFill>
+          <a:blip r:embed="rId3"/>
+          <a:stretch>
+            <a:fillRect/>
+          </a:stretch>
+        </p:blipFill>
+        <p:spPr>
+          <a:xfrm>
+            <a:off x="6355080" y="1828800"/>
+            <a:ext cx="4937760" cy="4206240"/>
+          </a:xfrm>
+          <a:prstGeom prst="rect">
+            <a:avLst/>
+          </a:prstGeom>
+        </p:spPr>
+      </p:pic>
     </p:spTree>
   </p:cSld>
   <p:clrMapOvr>
@@ -3538,75 +3798,23 @@
       <p:grpSpPr/>
       <p:sp>
         <p:nvSpPr>
-          <p:cNvPr id="2" name="TextBox 1"/>
-          <p:cNvSpPr txBox="1"/>
-          <p:nvPr/>
-        </p:nvSpPr>
-        <p:spPr>
-          <a:xfrm>
-            <a:off x="731520" y="457200"/>
-            <a:ext cx="10698480" cy="1097280"/>
-          </a:xfrm>
-          <a:prstGeom prst="rect">
-            <a:avLst/>
-          </a:prstGeom>
-          <a:noFill/>
-        </p:spPr>
-        <p:txBody>
-          <a:bodyPr wrap="square" lIns="0" tIns="0" rIns="0" bIns="0">
-            <a:spAutoFit/>
-          </a:bodyPr>
-          <a:lstStyle/>
-          <a:p>
-            <a:pPr>
-              <a:defRPr sz="2800" b="1">
-                <a:solidFill>
-                  <a:srgbClr val="102C57"/>
-                </a:solidFill>
-              </a:defRPr>
-            </a:pPr>
-            <a:r>
-              <a:t>Strategic Business Recommendations for Bluestock</a:t>
-            </a:r>
-          </a:p>
-          <a:p>
-            <a:pPr>
-              <a:spcBef>
-                <a:spcPts val="400"/>
-              </a:spcBef>
-              <a:defRPr sz="1400">
-                <a:solidFill>
-                  <a:srgbClr val="6C757D"/>
-                </a:solidFill>
-              </a:defRPr>
-            </a:pPr>
-            <a:r>
-              <a:t>Actionable fintech growth opportunities derived from data insights</a:t>
-            </a:r>
-          </a:p>
-        </p:txBody>
-      </p:sp>
-      <p:sp>
-        <p:nvSpPr>
-          <p:cNvPr id="3" name="Rectangle 2"/>
+          <p:cNvPr id="2" name="Rectangle 1"/>
           <p:cNvSpPr/>
           <p:nvPr/>
         </p:nvSpPr>
         <p:spPr>
           <a:xfrm>
-            <a:off x="731520" y="1645920"/>
-            <a:ext cx="5120640" cy="4572000"/>
+            <a:off x="0" y="0"/>
+            <a:ext cx="12191695" cy="1005840"/>
           </a:xfrm>
           <a:prstGeom prst="rect">
             <a:avLst/>
           </a:prstGeom>
           <a:solidFill>
-            <a:srgbClr val="F5F7FA"/>
+            <a:srgbClr val="0F2537"/>
           </a:solidFill>
-          <a:ln w="19050">
-            <a:solidFill>
-              <a:srgbClr val="3565A9"/>
-            </a:solidFill>
+          <a:ln>
+            <a:noFill/>
           </a:ln>
         </p:spPr>
         <p:style>
@@ -3624,103 +3832,32 @@
           </a:fontRef>
         </p:style>
         <p:txBody>
-          <a:bodyPr rtlCol="0" anchor="ctr" wrap="square" lIns="274320" rIns="274320" tIns="228600" bIns="228600"/>
-          <a:lstStyle/>
-          <a:p>
-            <a:pPr algn="ctr">
-              <a:defRPr sz="1800" b="1">
-                <a:solidFill>
-                  <a:srgbClr val="102C57"/>
-                </a:solidFill>
-              </a:defRPr>
-            </a:pPr>
-            <a:r>
-              <a:t>Product Strategy</a:t>
-            </a:r>
-          </a:p>
-          <a:p>
-            <a:pPr>
-              <a:spcBef>
-                <a:spcPts val="600"/>
-              </a:spcBef>
-              <a:defRPr sz="1300">
-                <a:solidFill>
-                  <a:srgbClr val="212529"/>
-                </a:solidFill>
-              </a:defRPr>
-            </a:pPr>
-            <a:r>
-              <a:t>• Promote Direct Plans: Highlight 80-100 bps expense savings to attract savvy investors.</a:t>
-            </a:r>
-          </a:p>
-          <a:p>
-            <a:pPr>
-              <a:spcBef>
-                <a:spcPts val="600"/>
-              </a:spcBef>
-              <a:defRPr sz="1300">
-                <a:solidFill>
-                  <a:srgbClr val="212529"/>
-                </a:solidFill>
-              </a:defRPr>
-            </a:pPr>
-            <a:r>
-              <a:t>• Risk-First Fund Discovery: Screen schemes by Sortino ratio and Downside Risk, not just 1Y returns.</a:t>
-            </a:r>
-          </a:p>
-          <a:p>
-            <a:pPr>
-              <a:spcBef>
-                <a:spcPts val="600"/>
-              </a:spcBef>
-              <a:defRPr sz="1300">
-                <a:solidFill>
-                  <a:srgbClr val="212529"/>
-                </a:solidFill>
-              </a:defRPr>
-            </a:pPr>
-            <a:r>
-              <a:t>• SIP Continuity Gamification: Reward investors for unbroken 12+ month SIP discipline.</a:t>
-            </a:r>
-          </a:p>
-          <a:p>
-            <a:pPr>
-              <a:spcBef>
-                <a:spcPts val="600"/>
-              </a:spcBef>
-              <a:defRPr sz="1300">
-                <a:solidFill>
-                  <a:srgbClr val="212529"/>
-                </a:solidFill>
-              </a:defRPr>
-            </a:pPr>
-            <a:r>
-              <a:t>• Automated Rebalancing: Flag portfolio sector concentration when HHI exceeds safe thresholds.</a:t>
-            </a:r>
-          </a:p>
-        </p:txBody>
-      </p:sp>
-      <p:sp>
-        <p:nvSpPr>
-          <p:cNvPr id="4" name="Rectangle 3"/>
+          <a:bodyPr rtlCol="0" anchor="ctr"/>
+          <a:lstStyle/>
+          <a:p>
+            <a:pPr algn="ctr"/>
+          </a:p>
+        </p:txBody>
+      </p:sp>
+      <p:sp>
+        <p:nvSpPr>
+          <p:cNvPr id="3" name="Rectangle 2"/>
           <p:cNvSpPr/>
           <p:nvPr/>
         </p:nvSpPr>
         <p:spPr>
           <a:xfrm>
-            <a:off x="6217920" y="1645920"/>
-            <a:ext cx="5120640" cy="4572000"/>
+            <a:off x="0" y="1005840"/>
+            <a:ext cx="12191695" cy="54864"/>
           </a:xfrm>
           <a:prstGeom prst="rect">
             <a:avLst/>
           </a:prstGeom>
           <a:solidFill>
-            <a:srgbClr val="F5F7FA"/>
+            <a:srgbClr val="0284C7"/>
           </a:solidFill>
-          <a:ln w="19050">
-            <a:solidFill>
-              <a:srgbClr val="3565A9"/>
-            </a:solidFill>
+          <a:ln>
+            <a:noFill/>
           </a:ln>
         </p:spPr>
         <p:style>
@@ -3738,78 +3875,538 @@
           </a:fontRef>
         </p:style>
         <p:txBody>
-          <a:bodyPr rtlCol="0" anchor="ctr" wrap="square" lIns="274320" rIns="274320" tIns="228600" bIns="228600"/>
-          <a:lstStyle/>
-          <a:p>
-            <a:pPr algn="ctr">
-              <a:defRPr sz="1800" b="1">
-                <a:solidFill>
-                  <a:srgbClr val="102C57"/>
-                </a:solidFill>
-              </a:defRPr>
-            </a:pPr>
-            <a:r>
-              <a:t>Market Expansion</a:t>
-            </a:r>
-          </a:p>
-          <a:p>
-            <a:pPr>
-              <a:spcBef>
-                <a:spcPts val="600"/>
-              </a:spcBef>
-              <a:defRPr sz="1300">
-                <a:solidFill>
-                  <a:srgbClr val="212529"/>
-                </a:solidFill>
-              </a:defRPr>
-            </a:pPr>
-            <a:r>
-              <a:t>• Target B30 Growth Corridors: UPI-first micro-SIP onboarding for tier 2/3 cities.</a:t>
-            </a:r>
-          </a:p>
-          <a:p>
-            <a:pPr>
-              <a:spcBef>
-                <a:spcPts val="600"/>
-              </a:spcBef>
-              <a:defRPr sz="1300">
-                <a:solidFill>
-                  <a:srgbClr val="212529"/>
-                </a:solidFill>
-              </a:defRPr>
-            </a:pPr>
-            <a:r>
-              <a:t>• Tax-Saving ELSS Campaigns: Peak transaction volumes occur in Q4 (Jan-March).</a:t>
-            </a:r>
-          </a:p>
-          <a:p>
-            <a:pPr>
-              <a:spcBef>
-                <a:spcPts val="600"/>
-              </a:spcBef>
-              <a:defRPr sz="1300">
-                <a:solidFill>
-                  <a:srgbClr val="212529"/>
-                </a:solidFill>
-              </a:defRPr>
-            </a:pPr>
-            <a:r>
-              <a:t>• B2B Advisor Suite: White-label analytics dashboard for Independent Financial Advisors (IFAs).</a:t>
-            </a:r>
-          </a:p>
-          <a:p>
-            <a:pPr>
-              <a:spcBef>
-                <a:spcPts val="600"/>
-              </a:spcBef>
-              <a:defRPr sz="1300">
-                <a:solidFill>
-                  <a:srgbClr val="212529"/>
-                </a:solidFill>
-              </a:defRPr>
-            </a:pPr>
-            <a:r>
-              <a:t>• Institutional Data API: Monetize cleaned, normalized AMFI feeds via developer APIs.</a:t>
+          <a:bodyPr rtlCol="0" anchor="ctr"/>
+          <a:lstStyle/>
+          <a:p>
+            <a:pPr algn="ctr"/>
+          </a:p>
+        </p:txBody>
+      </p:sp>
+      <p:sp>
+        <p:nvSpPr>
+          <p:cNvPr id="4" name="TextBox 3"/>
+          <p:cNvSpPr txBox="1"/>
+          <p:nvPr/>
+        </p:nvSpPr>
+        <p:spPr>
+          <a:xfrm>
+            <a:off x="731520" y="109728"/>
+            <a:ext cx="10515600" cy="274320"/>
+          </a:xfrm>
+          <a:prstGeom prst="rect">
+            <a:avLst/>
+          </a:prstGeom>
+          <a:noFill/>
+        </p:spPr>
+        <p:txBody>
+          <a:bodyPr wrap="square">
+            <a:spAutoFit/>
+          </a:bodyPr>
+          <a:lstStyle/>
+          <a:p>
+            <a:pPr>
+              <a:defRPr sz="900" b="1">
+                <a:solidFill>
+                  <a:srgbClr val="0284C7"/>
+                </a:solidFill>
+                <a:latin typeface="Arial"/>
+              </a:defRPr>
+            </a:pPr>
+            <a:r>
+              <a:t>BLUESTOCK FINTECH • MUTUAL FUND ANALYTICS CAPSTONE</a:t>
+            </a:r>
+          </a:p>
+        </p:txBody>
+      </p:sp>
+      <p:sp>
+        <p:nvSpPr>
+          <p:cNvPr id="5" name="TextBox 4"/>
+          <p:cNvSpPr txBox="1"/>
+          <p:nvPr/>
+        </p:nvSpPr>
+        <p:spPr>
+          <a:xfrm>
+            <a:off x="731520" y="347472"/>
+            <a:ext cx="10515600" cy="548640"/>
+          </a:xfrm>
+          <a:prstGeom prst="rect">
+            <a:avLst/>
+          </a:prstGeom>
+          <a:noFill/>
+        </p:spPr>
+        <p:txBody>
+          <a:bodyPr wrap="square">
+            <a:spAutoFit/>
+          </a:bodyPr>
+          <a:lstStyle/>
+          <a:p>
+            <a:pPr>
+              <a:defRPr sz="2000" b="1">
+                <a:solidFill>
+                  <a:srgbClr val="FFFFFF"/>
+                </a:solidFill>
+                <a:latin typeface="Arial"/>
+              </a:defRPr>
+            </a:pPr>
+            <a:r>
+              <a:t>10. Strategic Business Recommendations for Bluestock</a:t>
+            </a:r>
+          </a:p>
+        </p:txBody>
+      </p:sp>
+      <p:sp>
+        <p:nvSpPr>
+          <p:cNvPr id="6" name="Rectangle 5"/>
+          <p:cNvSpPr/>
+          <p:nvPr/>
+        </p:nvSpPr>
+        <p:spPr>
+          <a:xfrm>
+            <a:off x="0" y="6492240"/>
+            <a:ext cx="12191695" cy="365760"/>
+          </a:xfrm>
+          <a:prstGeom prst="rect">
+            <a:avLst/>
+          </a:prstGeom>
+          <a:solidFill>
+            <a:srgbClr val="F8FAFC"/>
+          </a:solidFill>
+          <a:ln>
+            <a:solidFill>
+              <a:srgbClr val="E2E8F0"/>
+            </a:solidFill>
+          </a:ln>
+        </p:spPr>
+        <p:style>
+          <a:lnRef idx="1">
+            <a:schemeClr val="accent1"/>
+          </a:lnRef>
+          <a:fillRef idx="3">
+            <a:schemeClr val="accent1"/>
+          </a:fillRef>
+          <a:effectRef idx="2">
+            <a:schemeClr val="accent1"/>
+          </a:effectRef>
+          <a:fontRef idx="minor">
+            <a:schemeClr val="lt1"/>
+          </a:fontRef>
+        </p:style>
+        <p:txBody>
+          <a:bodyPr rtlCol="0" anchor="ctr"/>
+          <a:lstStyle/>
+          <a:p>
+            <a:pPr algn="ctr"/>
+          </a:p>
+        </p:txBody>
+      </p:sp>
+      <p:sp>
+        <p:nvSpPr>
+          <p:cNvPr id="7" name="TextBox 6"/>
+          <p:cNvSpPr txBox="1"/>
+          <p:nvPr/>
+        </p:nvSpPr>
+        <p:spPr>
+          <a:xfrm>
+            <a:off x="731520" y="6537960"/>
+            <a:ext cx="10515600" cy="274320"/>
+          </a:xfrm>
+          <a:prstGeom prst="rect">
+            <a:avLst/>
+          </a:prstGeom>
+          <a:noFill/>
+        </p:spPr>
+        <p:txBody>
+          <a:bodyPr wrap="none">
+            <a:spAutoFit/>
+          </a:bodyPr>
+          <a:lstStyle/>
+          <a:p>
+            <a:pPr>
+              <a:defRPr sz="850">
+                <a:solidFill>
+                  <a:srgbClr val="64748B"/>
+                </a:solidFill>
+                <a:latin typeface="Arial"/>
+              </a:defRPr>
+            </a:pPr>
+            <a:r>
+              <a:t>Confidential • Bluestock Fintech Analytics • Group: 62FMBF • Author: Rajeev Reddy</a:t>
+            </a:r>
+          </a:p>
+        </p:txBody>
+      </p:sp>
+      <p:sp>
+        <p:nvSpPr>
+          <p:cNvPr id="8" name="Rounded Rectangle 7"/>
+          <p:cNvSpPr/>
+          <p:nvPr/>
+        </p:nvSpPr>
+        <p:spPr>
+          <a:xfrm>
+            <a:off x="731520" y="1280160"/>
+            <a:ext cx="10698480" cy="1143000"/>
+          </a:xfrm>
+          <a:prstGeom prst="roundRect">
+            <a:avLst/>
+          </a:prstGeom>
+          <a:solidFill>
+            <a:srgbClr val="FFFFFF"/>
+          </a:solidFill>
+          <a:ln w="12700">
+            <a:solidFill>
+              <a:srgbClr val="E2E8F0"/>
+            </a:solidFill>
+          </a:ln>
+        </p:spPr>
+        <p:style>
+          <a:lnRef idx="1">
+            <a:schemeClr val="accent1"/>
+          </a:lnRef>
+          <a:fillRef idx="3">
+            <a:schemeClr val="accent1"/>
+          </a:fillRef>
+          <a:effectRef idx="2">
+            <a:schemeClr val="accent1"/>
+          </a:effectRef>
+          <a:fontRef idx="minor">
+            <a:schemeClr val="lt1"/>
+          </a:fontRef>
+        </p:style>
+        <p:txBody>
+          <a:bodyPr rtlCol="0" anchor="ctr"/>
+          <a:lstStyle/>
+          <a:p>
+            <a:pPr algn="ctr"/>
+          </a:p>
+        </p:txBody>
+      </p:sp>
+      <p:sp>
+        <p:nvSpPr>
+          <p:cNvPr id="9" name="TextBox 8"/>
+          <p:cNvSpPr txBox="1"/>
+          <p:nvPr/>
+        </p:nvSpPr>
+        <p:spPr>
+          <a:xfrm>
+            <a:off x="914400" y="1371600"/>
+            <a:ext cx="10332720" cy="960120"/>
+          </a:xfrm>
+          <a:prstGeom prst="rect">
+            <a:avLst/>
+          </a:prstGeom>
+          <a:noFill/>
+        </p:spPr>
+        <p:txBody>
+          <a:bodyPr wrap="square">
+            <a:spAutoFit/>
+          </a:bodyPr>
+          <a:lstStyle/>
+          <a:p>
+            <a:pPr>
+              <a:defRPr sz="1200" b="1">
+                <a:solidFill>
+                  <a:srgbClr val="0284C7"/>
+                </a:solidFill>
+                <a:latin typeface="Arial"/>
+              </a:defRPr>
+            </a:pPr>
+            <a:r>
+              <a:t>1. Direct Plan Migration Tool — Impact: High Acquisition &amp; AUM Growth</a:t>
+            </a:r>
+          </a:p>
+          <a:p>
+            <a:pPr>
+              <a:defRPr sz="1100">
+                <a:solidFill>
+                  <a:srgbClr val="1E293B"/>
+                </a:solidFill>
+                <a:latin typeface="Arial"/>
+              </a:defRPr>
+            </a:pPr>
+            <a:r>
+              <a:t>Develop an automated calculator demonstrating the 15-year compounding differential of saving 80–100 bps TER.</a:t>
+            </a:r>
+          </a:p>
+        </p:txBody>
+      </p:sp>
+      <p:sp>
+        <p:nvSpPr>
+          <p:cNvPr id="10" name="Rounded Rectangle 9"/>
+          <p:cNvSpPr/>
+          <p:nvPr/>
+        </p:nvSpPr>
+        <p:spPr>
+          <a:xfrm>
+            <a:off x="731520" y="2514600"/>
+            <a:ext cx="10698480" cy="1143000"/>
+          </a:xfrm>
+          <a:prstGeom prst="roundRect">
+            <a:avLst/>
+          </a:prstGeom>
+          <a:solidFill>
+            <a:srgbClr val="FFFFFF"/>
+          </a:solidFill>
+          <a:ln w="12700">
+            <a:solidFill>
+              <a:srgbClr val="E2E8F0"/>
+            </a:solidFill>
+          </a:ln>
+        </p:spPr>
+        <p:style>
+          <a:lnRef idx="1">
+            <a:schemeClr val="accent1"/>
+          </a:lnRef>
+          <a:fillRef idx="3">
+            <a:schemeClr val="accent1"/>
+          </a:fillRef>
+          <a:effectRef idx="2">
+            <a:schemeClr val="accent1"/>
+          </a:effectRef>
+          <a:fontRef idx="minor">
+            <a:schemeClr val="lt1"/>
+          </a:fontRef>
+        </p:style>
+        <p:txBody>
+          <a:bodyPr rtlCol="0" anchor="ctr"/>
+          <a:lstStyle/>
+          <a:p>
+            <a:pPr algn="ctr"/>
+          </a:p>
+        </p:txBody>
+      </p:sp>
+      <p:sp>
+        <p:nvSpPr>
+          <p:cNvPr id="11" name="TextBox 10"/>
+          <p:cNvSpPr txBox="1"/>
+          <p:nvPr/>
+        </p:nvSpPr>
+        <p:spPr>
+          <a:xfrm>
+            <a:off x="914400" y="2606040"/>
+            <a:ext cx="10332720" cy="960120"/>
+          </a:xfrm>
+          <a:prstGeom prst="rect">
+            <a:avLst/>
+          </a:prstGeom>
+          <a:noFill/>
+        </p:spPr>
+        <p:txBody>
+          <a:bodyPr wrap="square">
+            <a:spAutoFit/>
+          </a:bodyPr>
+          <a:lstStyle/>
+          <a:p>
+            <a:pPr>
+              <a:defRPr sz="1200" b="1">
+                <a:solidFill>
+                  <a:srgbClr val="0284C7"/>
+                </a:solidFill>
+                <a:latin typeface="Arial"/>
+              </a:defRPr>
+            </a:pPr>
+            <a:r>
+              <a:t>2. Predictive SIP Retention Alerts — Impact: Reduces Investor Churn by ~35%</a:t>
+            </a:r>
+          </a:p>
+          <a:p>
+            <a:pPr>
+              <a:defRPr sz="1100">
+                <a:solidFill>
+                  <a:srgbClr val="1E293B"/>
+                </a:solidFill>
+                <a:latin typeface="Arial"/>
+              </a:defRPr>
+            </a:pPr>
+            <a:r>
+              <a:t>Deploy automated WhatsApp and in-app nudges when a user's SIP gap exceeds 25 days to curb the 2,949 at-risk lapses.</a:t>
+            </a:r>
+          </a:p>
+        </p:txBody>
+      </p:sp>
+      <p:sp>
+        <p:nvSpPr>
+          <p:cNvPr id="12" name="Rounded Rectangle 11"/>
+          <p:cNvSpPr/>
+          <p:nvPr/>
+        </p:nvSpPr>
+        <p:spPr>
+          <a:xfrm>
+            <a:off x="731520" y="3749039"/>
+            <a:ext cx="10698480" cy="1143000"/>
+          </a:xfrm>
+          <a:prstGeom prst="roundRect">
+            <a:avLst/>
+          </a:prstGeom>
+          <a:solidFill>
+            <a:srgbClr val="FFFFFF"/>
+          </a:solidFill>
+          <a:ln w="12700">
+            <a:solidFill>
+              <a:srgbClr val="E2E8F0"/>
+            </a:solidFill>
+          </a:ln>
+        </p:spPr>
+        <p:style>
+          <a:lnRef idx="1">
+            <a:schemeClr val="accent1"/>
+          </a:lnRef>
+          <a:fillRef idx="3">
+            <a:schemeClr val="accent1"/>
+          </a:fillRef>
+          <a:effectRef idx="2">
+            <a:schemeClr val="accent1"/>
+          </a:effectRef>
+          <a:fontRef idx="minor">
+            <a:schemeClr val="lt1"/>
+          </a:fontRef>
+        </p:style>
+        <p:txBody>
+          <a:bodyPr rtlCol="0" anchor="ctr"/>
+          <a:lstStyle/>
+          <a:p>
+            <a:pPr algn="ctr"/>
+          </a:p>
+        </p:txBody>
+      </p:sp>
+      <p:sp>
+        <p:nvSpPr>
+          <p:cNvPr id="13" name="TextBox 12"/>
+          <p:cNvSpPr txBox="1"/>
+          <p:nvPr/>
+        </p:nvSpPr>
+        <p:spPr>
+          <a:xfrm>
+            <a:off x="914400" y="3840479"/>
+            <a:ext cx="10332720" cy="960120"/>
+          </a:xfrm>
+          <a:prstGeom prst="rect">
+            <a:avLst/>
+          </a:prstGeom>
+          <a:noFill/>
+        </p:spPr>
+        <p:txBody>
+          <a:bodyPr wrap="square">
+            <a:spAutoFit/>
+          </a:bodyPr>
+          <a:lstStyle/>
+          <a:p>
+            <a:pPr>
+              <a:defRPr sz="1200" b="1">
+                <a:solidFill>
+                  <a:srgbClr val="0284C7"/>
+                </a:solidFill>
+                <a:latin typeface="Arial"/>
+              </a:defRPr>
+            </a:pPr>
+            <a:r>
+              <a:t>3. Regional B30 Expansion — Impact: Captures Untapped Demographic</a:t>
+            </a:r>
+          </a:p>
+          <a:p>
+            <a:pPr>
+              <a:defRPr sz="1100">
+                <a:solidFill>
+                  <a:srgbClr val="1E293B"/>
+                </a:solidFill>
+                <a:latin typeface="Arial"/>
+              </a:defRPr>
+            </a:pPr>
+            <a:r>
+              <a:t>Launch vernacular educational modules and micro-SIPs (Rs. 250/mo) tailored to emerging tier-2/3 cities.</a:t>
+            </a:r>
+          </a:p>
+        </p:txBody>
+      </p:sp>
+      <p:sp>
+        <p:nvSpPr>
+          <p:cNvPr id="14" name="Rounded Rectangle 13"/>
+          <p:cNvSpPr/>
+          <p:nvPr/>
+        </p:nvSpPr>
+        <p:spPr>
+          <a:xfrm>
+            <a:off x="731520" y="4983480"/>
+            <a:ext cx="10698480" cy="1143000"/>
+          </a:xfrm>
+          <a:prstGeom prst="roundRect">
+            <a:avLst/>
+          </a:prstGeom>
+          <a:solidFill>
+            <a:srgbClr val="FFFFFF"/>
+          </a:solidFill>
+          <a:ln w="12700">
+            <a:solidFill>
+              <a:srgbClr val="E2E8F0"/>
+            </a:solidFill>
+          </a:ln>
+        </p:spPr>
+        <p:style>
+          <a:lnRef idx="1">
+            <a:schemeClr val="accent1"/>
+          </a:lnRef>
+          <a:fillRef idx="3">
+            <a:schemeClr val="accent1"/>
+          </a:fillRef>
+          <a:effectRef idx="2">
+            <a:schemeClr val="accent1"/>
+          </a:effectRef>
+          <a:fontRef idx="minor">
+            <a:schemeClr val="lt1"/>
+          </a:fontRef>
+        </p:style>
+        <p:txBody>
+          <a:bodyPr rtlCol="0" anchor="ctr"/>
+          <a:lstStyle/>
+          <a:p>
+            <a:pPr algn="ctr"/>
+          </a:p>
+        </p:txBody>
+      </p:sp>
+      <p:sp>
+        <p:nvSpPr>
+          <p:cNvPr id="15" name="TextBox 14"/>
+          <p:cNvSpPr txBox="1"/>
+          <p:nvPr/>
+        </p:nvSpPr>
+        <p:spPr>
+          <a:xfrm>
+            <a:off x="914400" y="5074920"/>
+            <a:ext cx="10332720" cy="960120"/>
+          </a:xfrm>
+          <a:prstGeom prst="rect">
+            <a:avLst/>
+          </a:prstGeom>
+          <a:noFill/>
+        </p:spPr>
+        <p:txBody>
+          <a:bodyPr wrap="square">
+            <a:spAutoFit/>
+          </a:bodyPr>
+          <a:lstStyle/>
+          <a:p>
+            <a:pPr>
+              <a:defRPr sz="1200" b="1">
+                <a:solidFill>
+                  <a:srgbClr val="0284C7"/>
+                </a:solidFill>
+                <a:latin typeface="Arial"/>
+              </a:defRPr>
+            </a:pPr>
+            <a:r>
+              <a:t>4. Automated Portfolio Rebalancing — Impact: Institutional-Grade Safety</a:t>
+            </a:r>
+          </a:p>
+          <a:p>
+            <a:pPr>
+              <a:defRPr sz="1100">
+                <a:solidFill>
+                  <a:srgbClr val="1E293B"/>
+                </a:solidFill>
+                <a:latin typeface="Arial"/>
+              </a:defRPr>
+            </a:pPr>
+            <a:r>
+              <a:t>Incorporate real-time Sector HHI alerts and VaR thresholds to prevent retail portfolios exceeding 30% single-sector risk.</a:t>
             </a:r>
           </a:p>
         </p:txBody>
@@ -3834,75 +4431,23 @@
       <p:grpSpPr/>
       <p:sp>
         <p:nvSpPr>
-          <p:cNvPr id="2" name="TextBox 1"/>
-          <p:cNvSpPr txBox="1"/>
-          <p:nvPr/>
-        </p:nvSpPr>
-        <p:spPr>
-          <a:xfrm>
-            <a:off x="731520" y="457200"/>
-            <a:ext cx="10698480" cy="1097280"/>
-          </a:xfrm>
-          <a:prstGeom prst="rect">
-            <a:avLst/>
-          </a:prstGeom>
-          <a:noFill/>
-        </p:spPr>
-        <p:txBody>
-          <a:bodyPr wrap="square" lIns="0" tIns="0" rIns="0" bIns="0">
-            <a:spAutoFit/>
-          </a:bodyPr>
-          <a:lstStyle/>
-          <a:p>
-            <a:pPr>
-              <a:defRPr sz="2800" b="1">
-                <a:solidFill>
-                  <a:srgbClr val="102C57"/>
-                </a:solidFill>
-              </a:defRPr>
-            </a:pPr>
-            <a:r>
-              <a:t>Project Deliverables &amp; Repository Summary</a:t>
-            </a:r>
-          </a:p>
-          <a:p>
-            <a:pPr>
-              <a:spcBef>
-                <a:spcPts val="400"/>
-              </a:spcBef>
-              <a:defRPr sz="1400">
-                <a:solidFill>
-                  <a:srgbClr val="6C757D"/>
-                </a:solidFill>
-              </a:defRPr>
-            </a:pPr>
-            <a:r>
-              <a:t>Complete capstone submission checklist &amp; verification</a:t>
-            </a:r>
-          </a:p>
-        </p:txBody>
-      </p:sp>
-      <p:sp>
-        <p:nvSpPr>
-          <p:cNvPr id="3" name="Rectangle 2"/>
+          <p:cNvPr id="2" name="Rectangle 1"/>
           <p:cNvSpPr/>
           <p:nvPr/>
         </p:nvSpPr>
         <p:spPr>
           <a:xfrm>
-            <a:off x="731520" y="1645920"/>
-            <a:ext cx="5120640" cy="4572000"/>
+            <a:off x="0" y="0"/>
+            <a:ext cx="12191695" cy="6858000"/>
           </a:xfrm>
           <a:prstGeom prst="rect">
             <a:avLst/>
           </a:prstGeom>
           <a:solidFill>
-            <a:srgbClr val="F5F7FA"/>
+            <a:srgbClr val="0F2537"/>
           </a:solidFill>
-          <a:ln w="19050">
-            <a:solidFill>
-              <a:srgbClr val="3565A9"/>
-            </a:solidFill>
+          <a:ln>
+            <a:noFill/>
           </a:ln>
         </p:spPr>
         <p:style>
@@ -3920,132 +4465,95 @@
           </a:fontRef>
         </p:style>
         <p:txBody>
-          <a:bodyPr rtlCol="0" anchor="ctr" wrap="square" lIns="274320" rIns="274320" tIns="228600" bIns="228600"/>
-          <a:lstStyle/>
-          <a:p>
-            <a:pPr algn="ctr">
-              <a:defRPr sz="1800" b="1">
-                <a:solidFill>
-                  <a:srgbClr val="102C57"/>
-                </a:solidFill>
-              </a:defRPr>
-            </a:pPr>
-            <a:r>
-              <a:t>Verified Submission Deliverables</a:t>
-            </a:r>
-          </a:p>
-          <a:p>
-            <a:pPr>
-              <a:spcBef>
-                <a:spcPts val="600"/>
-              </a:spcBef>
-              <a:defRPr sz="1300">
-                <a:solidFill>
-                  <a:srgbClr val="212529"/>
-                </a:solidFill>
-              </a:defRPr>
-            </a:pPr>
-            <a:r>
-              <a:t>• data_ingestion.py: Automated ingestion, profiling, anomaly checks &amp; validation.</a:t>
-            </a:r>
-          </a:p>
-          <a:p>
-            <a:pPr>
-              <a:spcBef>
-                <a:spcPts val="600"/>
-              </a:spcBef>
-              <a:defRPr sz="1300">
-                <a:solidFill>
-                  <a:srgbClr val="212529"/>
-                </a:solidFill>
-              </a:defRPr>
-            </a:pPr>
-            <a:r>
-              <a:t>• live_nav_fetch.py: Live REST API ingestion for 6 target schemes from mfapi.in.</a:t>
-            </a:r>
-          </a:p>
-          <a:p>
-            <a:pPr>
-              <a:spcBef>
-                <a:spcPts val="600"/>
-              </a:spcBef>
-              <a:defRPr sz="1300">
-                <a:solidFill>
-                  <a:srgbClr val="212529"/>
-                </a:solidFill>
-              </a:defRPr>
-            </a:pPr>
-            <a:r>
-              <a:t>• requirements.txt: Full library dependency specification.</a:t>
-            </a:r>
-          </a:p>
-          <a:p>
-            <a:pPr>
-              <a:spcBef>
-                <a:spcPts val="600"/>
-              </a:spcBef>
-              <a:defRPr sz="1300">
-                <a:solidFill>
-                  <a:srgbClr val="212529"/>
-                </a:solidFill>
-              </a:defRPr>
-            </a:pPr>
-            <a:r>
-              <a:t>• bluestock_mf.db: SQLite 8-table star schema database.</a:t>
-            </a:r>
-          </a:p>
-          <a:p>
-            <a:pPr>
-              <a:spcBef>
-                <a:spcPts val="600"/>
-              </a:spcBef>
-              <a:defRPr sz="1300">
-                <a:solidFill>
-                  <a:srgbClr val="212529"/>
-                </a:solidFill>
-              </a:defRPr>
-            </a:pPr>
-            <a:r>
-              <a:t>• reports/data_quality_summary.md: Comprehensive data verification report.</a:t>
-            </a:r>
-          </a:p>
-          <a:p>
-            <a:pPr>
-              <a:spcBef>
-                <a:spcPts val="600"/>
-              </a:spcBef>
-              <a:defRPr sz="1300">
-                <a:solidFill>
-                  <a:srgbClr val="212529"/>
-                </a:solidFill>
-              </a:defRPr>
-            </a:pPr>
-            <a:r>
-              <a:t>• FINAL_REPORT.md &amp; README.md: Full project documentation.</a:t>
-            </a:r>
-          </a:p>
-        </p:txBody>
-      </p:sp>
-      <p:sp>
-        <p:nvSpPr>
-          <p:cNvPr id="4" name="Rectangle 3"/>
+          <a:bodyPr rtlCol="0" anchor="ctr"/>
+          <a:lstStyle/>
+          <a:p>
+            <a:pPr algn="ctr"/>
+          </a:p>
+        </p:txBody>
+      </p:sp>
+      <p:sp>
+        <p:nvSpPr>
+          <p:cNvPr id="3" name="TextBox 2"/>
+          <p:cNvSpPr txBox="1"/>
+          <p:nvPr/>
+        </p:nvSpPr>
+        <p:spPr>
+          <a:xfrm>
+            <a:off x="1371600" y="1645920"/>
+            <a:ext cx="9418320" cy="2011680"/>
+          </a:xfrm>
+          <a:prstGeom prst="rect">
+            <a:avLst/>
+          </a:prstGeom>
+          <a:noFill/>
+        </p:spPr>
+        <p:txBody>
+          <a:bodyPr wrap="square">
+            <a:spAutoFit/>
+          </a:bodyPr>
+          <a:lstStyle/>
+          <a:p>
+            <a:pPr>
+              <a:defRPr sz="1400" b="1">
+                <a:solidFill>
+                  <a:srgbClr val="0284C7"/>
+                </a:solidFill>
+                <a:latin typeface="Arial"/>
+              </a:defRPr>
+            </a:pPr>
+            <a:r>
+              <a:t>BLUESTOCK FINTECH • MUTUAL FUND ANALYTICS</a:t>
+            </a:r>
+          </a:p>
+          <a:p>
+            <a:pPr>
+              <a:defRPr sz="4400" b="1">
+                <a:solidFill>
+                  <a:srgbClr val="FFFFFF"/>
+                </a:solidFill>
+                <a:latin typeface="Arial"/>
+              </a:defRPr>
+            </a:pPr>
+            <a:r>
+              <a:t>Thank You!</a:t>
+            </a:r>
+          </a:p>
+          <a:p>
+            <a:pPr>
+              <a:defRPr sz="1800">
+                <a:solidFill>
+                  <a:srgbClr val="CBD5E1"/>
+                </a:solidFill>
+                <a:latin typeface="Arial"/>
+              </a:defRPr>
+            </a:pPr>
+            <a:r>
+              <a:t>Questions &amp; Discussions Welcome</a:t>
+            </a:r>
+          </a:p>
+        </p:txBody>
+      </p:sp>
+      <p:sp>
+        <p:nvSpPr>
+          <p:cNvPr id="4" name="Rounded Rectangle 3"/>
           <p:cNvSpPr/>
           <p:nvPr/>
         </p:nvSpPr>
         <p:spPr>
           <a:xfrm>
-            <a:off x="6217920" y="1645920"/>
-            <a:ext cx="5120640" cy="4572000"/>
-          </a:xfrm>
-          <a:prstGeom prst="rect">
+            <a:off x="1371600" y="3931920"/>
+            <a:ext cx="9418320" cy="2011680"/>
+          </a:xfrm>
+          <a:prstGeom prst="roundRect">
             <a:avLst/>
           </a:prstGeom>
           <a:solidFill>
-            <a:srgbClr val="F5F7FA"/>
+            <a:srgbClr val="1A365D"/>
           </a:solidFill>
-          <a:ln w="19050">
+          <a:ln>
             <a:solidFill>
-              <a:srgbClr val="3565A9"/>
+              <a:srgbClr val="0284C7"/>
             </a:solidFill>
           </a:ln>
         </p:spPr>
@@ -4064,93 +4572,96 @@
           </a:fontRef>
         </p:style>
         <p:txBody>
-          <a:bodyPr rtlCol="0" anchor="ctr" wrap="square" lIns="274320" rIns="274320" tIns="228600" bIns="228600"/>
-          <a:lstStyle/>
-          <a:p>
-            <a:pPr algn="ctr">
-              <a:defRPr sz="1800" b="1">
-                <a:solidFill>
-                  <a:srgbClr val="102C57"/>
-                </a:solidFill>
-              </a:defRPr>
-            </a:pPr>
-            <a:r>
-              <a:t>Repository &amp; Verification</a:t>
-            </a:r>
-          </a:p>
-          <a:p>
-            <a:pPr>
-              <a:spcBef>
+          <a:bodyPr rtlCol="0" anchor="ctr"/>
+          <a:lstStyle/>
+          <a:p>
+            <a:pPr algn="ctr"/>
+          </a:p>
+        </p:txBody>
+      </p:sp>
+      <p:sp>
+        <p:nvSpPr>
+          <p:cNvPr id="5" name="TextBox 4"/>
+          <p:cNvSpPr txBox="1"/>
+          <p:nvPr/>
+        </p:nvSpPr>
+        <p:spPr>
+          <a:xfrm>
+            <a:off x="1645920" y="4114800"/>
+            <a:ext cx="8869680" cy="1645920"/>
+          </a:xfrm>
+          <a:prstGeom prst="rect">
+            <a:avLst/>
+          </a:prstGeom>
+          <a:noFill/>
+        </p:spPr>
+        <p:txBody>
+          <a:bodyPr wrap="none">
+            <a:spAutoFit/>
+          </a:bodyPr>
+          <a:lstStyle/>
+          <a:p>
+            <a:pPr>
+              <a:spcAft>
                 <a:spcPts val="600"/>
-              </a:spcBef>
-              <a:defRPr sz="1300">
-                <a:solidFill>
-                  <a:srgbClr val="212529"/>
-                </a:solidFill>
-              </a:defRPr>
-            </a:pPr>
-            <a:r>
-              <a:t>• GitHub Repository: https://github.com/rajeevreddy23/Day-1-Data-ingestion-complete</a:t>
-            </a:r>
-          </a:p>
-          <a:p>
-            <a:pPr>
-              <a:spcBef>
+              </a:spcAft>
+              <a:defRPr sz="1100">
+                <a:solidFill>
+                  <a:srgbClr val="FFFFFF"/>
+                </a:solidFill>
+                <a:latin typeface="Arial"/>
+              </a:defRPr>
+            </a:pPr>
+            <a:r>
+              <a:t>&lt;b&gt;Repository &amp; Deliverables:&lt;/b&gt; GitHub: rajeevreddy23/Day-1-Data-ingestion-complete (Tag: v1.0)</a:t>
+            </a:r>
+          </a:p>
+          <a:p>
+            <a:pPr>
+              <a:spcAft>
                 <a:spcPts val="600"/>
-              </a:spcBef>
-              <a:defRPr sz="1300">
-                <a:solidFill>
-                  <a:srgbClr val="212529"/>
-                </a:solidFill>
-              </a:defRPr>
-            </a:pPr>
-            <a:r>
-              <a:t>• Git Commit: 'Day 1: Data ingestion complete'</a:t>
-            </a:r>
-          </a:p>
-          <a:p>
-            <a:pPr>
-              <a:spcBef>
+              </a:spcAft>
+              <a:defRPr sz="1100">
+                <a:solidFill>
+                  <a:srgbClr val="FFFFFF"/>
+                </a:solidFill>
+                <a:latin typeface="Arial"/>
+              </a:defRPr>
+            </a:pPr>
+            <a:r>
+              <a:t>&lt;b&gt;Pipeline Execution:&lt;/b&gt; python run_pipeline.py (Automated ingestion, cleaning, analytics &amp; audit)</a:t>
+            </a:r>
+          </a:p>
+          <a:p>
+            <a:pPr>
+              <a:spcAft>
                 <a:spcPts val="600"/>
-              </a:spcBef>
-              <a:defRPr sz="1300">
-                <a:solidFill>
-                  <a:srgbClr val="212529"/>
-                </a:solidFill>
-              </a:defRPr>
-            </a:pPr>
-            <a:r>
-              <a:t>• Code Quality: Clean PEP 8 compliance, robust error handling, fully modularized.</a:t>
-            </a:r>
-          </a:p>
-          <a:p>
-            <a:pPr>
-              <a:spcBef>
+              </a:spcAft>
+              <a:defRPr sz="1100">
+                <a:solidFill>
+                  <a:srgbClr val="FFFFFF"/>
+                </a:solidFill>
+                <a:latin typeface="Arial"/>
+              </a:defRPr>
+            </a:pPr>
+            <a:r>
+              <a:t>&lt;b&gt;Interactive Dashboard:&lt;/b&gt; streamlit run dashboard/capstone_dashboard.py</a:t>
+            </a:r>
+          </a:p>
+          <a:p>
+            <a:pPr>
+              <a:spcAft>
                 <a:spcPts val="600"/>
-              </a:spcBef>
-              <a:defRPr sz="1300">
-                <a:solidFill>
-                  <a:srgbClr val="212529"/>
-                </a:solidFill>
-              </a:defRPr>
-            </a:pPr>
-            <a:r>
-              <a:t>• Submission Package: Master folder with 5 required sub-folders ready for Google Drive.</a:t>
-            </a:r>
-          </a:p>
-          <a:p>
-            <a:pPr>
-              <a:spcBef>
-                <a:spcPts val="600"/>
-              </a:spcBef>
-              <a:defRPr sz="1300">
-                <a:solidFill>
-                  <a:srgbClr val="212529"/>
-                </a:solidFill>
-              </a:defRPr>
-            </a:pPr>
-            <a:r>
-              <a:t>• Status: 100% Tested, Verified &amp; Ready for Evaluation.</a:t>
+              </a:spcAft>
+              <a:defRPr sz="1100">
+                <a:solidFill>
+                  <a:srgbClr val="FFFFFF"/>
+                </a:solidFill>
+                <a:latin typeface="Arial"/>
+              </a:defRPr>
+            </a:pPr>
+            <a:r>
+              <a:t>&lt;b&gt;Capstone Team:&lt;/b&gt; Poulami Dutta (PO) • Rajeev Reddy (RA) • Thadakamalla Likith Kumar (TH)</a:t>
             </a:r>
           </a:p>
         </p:txBody>
@@ -4175,75 +4686,23 @@
       <p:grpSpPr/>
       <p:sp>
         <p:nvSpPr>
-          <p:cNvPr id="2" name="TextBox 1"/>
-          <p:cNvSpPr txBox="1"/>
-          <p:nvPr/>
-        </p:nvSpPr>
-        <p:spPr>
-          <a:xfrm>
-            <a:off x="731520" y="457200"/>
-            <a:ext cx="10698480" cy="1097280"/>
-          </a:xfrm>
-          <a:prstGeom prst="rect">
-            <a:avLst/>
-          </a:prstGeom>
-          <a:noFill/>
-        </p:spPr>
-        <p:txBody>
-          <a:bodyPr wrap="square" lIns="0" tIns="0" rIns="0" bIns="0">
-            <a:spAutoFit/>
-          </a:bodyPr>
-          <a:lstStyle/>
-          <a:p>
-            <a:pPr>
-              <a:defRPr sz="2800" b="1">
-                <a:solidFill>
-                  <a:srgbClr val="102C57"/>
-                </a:solidFill>
-              </a:defRPr>
-            </a:pPr>
-            <a:r>
-              <a:t>Executive Summary &amp; Business Context</a:t>
-            </a:r>
-          </a:p>
-          <a:p>
-            <a:pPr>
-              <a:spcBef>
-                <a:spcPts val="400"/>
-              </a:spcBef>
-              <a:defRPr sz="1400">
-                <a:solidFill>
-                  <a:srgbClr val="6C757D"/>
-                </a:solidFill>
-              </a:defRPr>
-            </a:pPr>
-            <a:r>
-              <a:t>Empowering retail and institutional investors with unified, institutional-grade analytics</a:t>
-            </a:r>
-          </a:p>
-        </p:txBody>
-      </p:sp>
-      <p:sp>
-        <p:nvSpPr>
-          <p:cNvPr id="3" name="Rectangle 2"/>
+          <p:cNvPr id="2" name="Rectangle 1"/>
           <p:cNvSpPr/>
           <p:nvPr/>
         </p:nvSpPr>
         <p:spPr>
           <a:xfrm>
-            <a:off x="731520" y="1645920"/>
-            <a:ext cx="5120640" cy="4572000"/>
+            <a:off x="0" y="0"/>
+            <a:ext cx="12191695" cy="1005840"/>
           </a:xfrm>
           <a:prstGeom prst="rect">
             <a:avLst/>
           </a:prstGeom>
           <a:solidFill>
-            <a:srgbClr val="F5F7FA"/>
+            <a:srgbClr val="0F2537"/>
           </a:solidFill>
-          <a:ln w="19050">
-            <a:solidFill>
-              <a:srgbClr val="3565A9"/>
-            </a:solidFill>
+          <a:ln>
+            <a:noFill/>
           </a:ln>
         </p:spPr>
         <p:style>
@@ -4261,103 +4720,32 @@
           </a:fontRef>
         </p:style>
         <p:txBody>
-          <a:bodyPr rtlCol="0" anchor="ctr" wrap="square" lIns="274320" rIns="274320" tIns="228600" bIns="228600"/>
-          <a:lstStyle/>
-          <a:p>
-            <a:pPr algn="ctr">
-              <a:defRPr sz="1800" b="1">
-                <a:solidFill>
-                  <a:srgbClr val="102C57"/>
-                </a:solidFill>
-              </a:defRPr>
-            </a:pPr>
-            <a:r>
-              <a:t>Industry Growth Drivers</a:t>
-            </a:r>
-          </a:p>
-          <a:p>
-            <a:pPr>
-              <a:spcBef>
-                <a:spcPts val="600"/>
-              </a:spcBef>
-              <a:defRPr sz="1300">
-                <a:solidFill>
-                  <a:srgbClr val="212529"/>
-                </a:solidFill>
-              </a:defRPr>
-            </a:pPr>
-            <a:r>
-              <a:t>• Indian Mutual Fund AUM crossed Rs. 81 Lakh Crore in 2025 across 1,908 schemes.</a:t>
-            </a:r>
-          </a:p>
-          <a:p>
-            <a:pPr>
-              <a:spcBef>
-                <a:spcPts val="600"/>
-              </a:spcBef>
-              <a:defRPr sz="1300">
-                <a:solidFill>
-                  <a:srgbClr val="212529"/>
-                </a:solidFill>
-              </a:defRPr>
-            </a:pPr>
-            <a:r>
-              <a:t>• Monthly SIP inflows breached all-time high of Rs. 31,000+ Crore.</a:t>
-            </a:r>
-          </a:p>
-          <a:p>
-            <a:pPr>
-              <a:spcBef>
-                <a:spcPts val="600"/>
-              </a:spcBef>
-              <a:defRPr sz="1300">
-                <a:solidFill>
-                  <a:srgbClr val="212529"/>
-                </a:solidFill>
-              </a:defRPr>
-            </a:pPr>
-            <a:r>
-              <a:t>• Total mutual fund investor folios exceed 26.1 Crore, reflecting deep equity adoption.</a:t>
-            </a:r>
-          </a:p>
-          <a:p>
-            <a:pPr>
-              <a:spcBef>
-                <a:spcPts val="600"/>
-              </a:spcBef>
-              <a:defRPr sz="1300">
-                <a:solidFill>
-                  <a:srgbClr val="212529"/>
-                </a:solidFill>
-              </a:defRPr>
-            </a:pPr>
-            <a:r>
-              <a:t>• Retail investors demand objective risk-adjusted analytics beyond simple past returns.</a:t>
-            </a:r>
-          </a:p>
-        </p:txBody>
-      </p:sp>
-      <p:sp>
-        <p:nvSpPr>
-          <p:cNvPr id="4" name="Rectangle 3"/>
+          <a:bodyPr rtlCol="0" anchor="ctr"/>
+          <a:lstStyle/>
+          <a:p>
+            <a:pPr algn="ctr"/>
+          </a:p>
+        </p:txBody>
+      </p:sp>
+      <p:sp>
+        <p:nvSpPr>
+          <p:cNvPr id="3" name="Rectangle 2"/>
           <p:cNvSpPr/>
           <p:nvPr/>
         </p:nvSpPr>
         <p:spPr>
           <a:xfrm>
-            <a:off x="6217920" y="1645920"/>
-            <a:ext cx="5120640" cy="4572000"/>
+            <a:off x="0" y="1005840"/>
+            <a:ext cx="12191695" cy="54864"/>
           </a:xfrm>
           <a:prstGeom prst="rect">
             <a:avLst/>
           </a:prstGeom>
           <a:solidFill>
-            <a:srgbClr val="F5F7FA"/>
+            <a:srgbClr val="0284C7"/>
           </a:solidFill>
-          <a:ln w="19050">
-            <a:solidFill>
-              <a:srgbClr val="3565A9"/>
-            </a:solidFill>
+          <a:ln>
+            <a:noFill/>
           </a:ln>
         </p:spPr>
         <p:style>
@@ -4375,78 +4763,498 @@
           </a:fontRef>
         </p:style>
         <p:txBody>
-          <a:bodyPr rtlCol="0" anchor="ctr" wrap="square" lIns="274320" rIns="274320" tIns="228600" bIns="228600"/>
-          <a:lstStyle/>
-          <a:p>
-            <a:pPr algn="ctr">
-              <a:defRPr sz="1800" b="1">
-                <a:solidFill>
-                  <a:srgbClr val="102C57"/>
-                </a:solidFill>
-              </a:defRPr>
-            </a:pPr>
-            <a:r>
-              <a:t>Platform Deliverables</a:t>
-            </a:r>
-          </a:p>
-          <a:p>
-            <a:pPr>
-              <a:spcBef>
-                <a:spcPts val="600"/>
-              </a:spcBef>
-              <a:defRPr sz="1300">
-                <a:solidFill>
-                  <a:srgbClr val="212529"/>
-                </a:solidFill>
-              </a:defRPr>
-            </a:pPr>
-            <a:r>
-              <a:t>• Full-Stack ETL: Ingests 10 AMFI datasets + automated live REST API from mfapi.in.</a:t>
-            </a:r>
-          </a:p>
-          <a:p>
-            <a:pPr>
-              <a:spcBef>
-                <a:spcPts val="600"/>
-              </a:spcBef>
-              <a:defRPr sz="1300">
-                <a:solidFill>
-                  <a:srgbClr val="212529"/>
-                </a:solidFill>
-              </a:defRPr>
-            </a:pPr>
-            <a:r>
-              <a:t>• High-Performance Database: Relational 8-table star schema SQLite database.</a:t>
-            </a:r>
-          </a:p>
-          <a:p>
-            <a:pPr>
-              <a:spcBef>
-                <a:spcPts val="600"/>
-              </a:spcBef>
-              <a:defRPr sz="1300">
-                <a:solidFill>
-                  <a:srgbClr val="212529"/>
-                </a:solidFill>
-              </a:defRPr>
-            </a:pPr>
-            <a:r>
-              <a:t>• Institutional Risk Metrics: Sharpe, Sortino, Alpha, Beta, Max Drawdown, and VaR/CVaR.</a:t>
-            </a:r>
-          </a:p>
-          <a:p>
-            <a:pPr>
-              <a:spcBef>
-                <a:spcPts val="600"/>
-              </a:spcBef>
-              <a:defRPr sz="1300">
-                <a:solidFill>
-                  <a:srgbClr val="212529"/>
-                </a:solidFill>
-              </a:defRPr>
-            </a:pPr>
-            <a:r>
-              <a:t>• Interactive UI: 4-page Streamlit web dashboard for multi-fund screening and portfolio insights.</a:t>
+          <a:bodyPr rtlCol="0" anchor="ctr"/>
+          <a:lstStyle/>
+          <a:p>
+            <a:pPr algn="ctr"/>
+          </a:p>
+        </p:txBody>
+      </p:sp>
+      <p:sp>
+        <p:nvSpPr>
+          <p:cNvPr id="4" name="TextBox 3"/>
+          <p:cNvSpPr txBox="1"/>
+          <p:nvPr/>
+        </p:nvSpPr>
+        <p:spPr>
+          <a:xfrm>
+            <a:off x="731520" y="109728"/>
+            <a:ext cx="10515600" cy="274320"/>
+          </a:xfrm>
+          <a:prstGeom prst="rect">
+            <a:avLst/>
+          </a:prstGeom>
+          <a:noFill/>
+        </p:spPr>
+        <p:txBody>
+          <a:bodyPr wrap="square">
+            <a:spAutoFit/>
+          </a:bodyPr>
+          <a:lstStyle/>
+          <a:p>
+            <a:pPr>
+              <a:defRPr sz="900" b="1">
+                <a:solidFill>
+                  <a:srgbClr val="0284C7"/>
+                </a:solidFill>
+                <a:latin typeface="Arial"/>
+              </a:defRPr>
+            </a:pPr>
+            <a:r>
+              <a:t>BLUESTOCK FINTECH • MUTUAL FUND ANALYTICS CAPSTONE</a:t>
+            </a:r>
+          </a:p>
+        </p:txBody>
+      </p:sp>
+      <p:sp>
+        <p:nvSpPr>
+          <p:cNvPr id="5" name="TextBox 4"/>
+          <p:cNvSpPr txBox="1"/>
+          <p:nvPr/>
+        </p:nvSpPr>
+        <p:spPr>
+          <a:xfrm>
+            <a:off x="731520" y="347472"/>
+            <a:ext cx="10515600" cy="548640"/>
+          </a:xfrm>
+          <a:prstGeom prst="rect">
+            <a:avLst/>
+          </a:prstGeom>
+          <a:noFill/>
+        </p:spPr>
+        <p:txBody>
+          <a:bodyPr wrap="square">
+            <a:spAutoFit/>
+          </a:bodyPr>
+          <a:lstStyle/>
+          <a:p>
+            <a:pPr>
+              <a:defRPr sz="2000" b="1">
+                <a:solidFill>
+                  <a:srgbClr val="FFFFFF"/>
+                </a:solidFill>
+                <a:latin typeface="Arial"/>
+              </a:defRPr>
+            </a:pPr>
+            <a:r>
+              <a:t>1. Executive Summary: Problem Statement &amp; Objectives</a:t>
+            </a:r>
+          </a:p>
+        </p:txBody>
+      </p:sp>
+      <p:sp>
+        <p:nvSpPr>
+          <p:cNvPr id="6" name="Rectangle 5"/>
+          <p:cNvSpPr/>
+          <p:nvPr/>
+        </p:nvSpPr>
+        <p:spPr>
+          <a:xfrm>
+            <a:off x="0" y="6492240"/>
+            <a:ext cx="12191695" cy="365760"/>
+          </a:xfrm>
+          <a:prstGeom prst="rect">
+            <a:avLst/>
+          </a:prstGeom>
+          <a:solidFill>
+            <a:srgbClr val="F8FAFC"/>
+          </a:solidFill>
+          <a:ln>
+            <a:solidFill>
+              <a:srgbClr val="E2E8F0"/>
+            </a:solidFill>
+          </a:ln>
+        </p:spPr>
+        <p:style>
+          <a:lnRef idx="1">
+            <a:schemeClr val="accent1"/>
+          </a:lnRef>
+          <a:fillRef idx="3">
+            <a:schemeClr val="accent1"/>
+          </a:fillRef>
+          <a:effectRef idx="2">
+            <a:schemeClr val="accent1"/>
+          </a:effectRef>
+          <a:fontRef idx="minor">
+            <a:schemeClr val="lt1"/>
+          </a:fontRef>
+        </p:style>
+        <p:txBody>
+          <a:bodyPr rtlCol="0" anchor="ctr"/>
+          <a:lstStyle/>
+          <a:p>
+            <a:pPr algn="ctr"/>
+          </a:p>
+        </p:txBody>
+      </p:sp>
+      <p:sp>
+        <p:nvSpPr>
+          <p:cNvPr id="7" name="TextBox 6"/>
+          <p:cNvSpPr txBox="1"/>
+          <p:nvPr/>
+        </p:nvSpPr>
+        <p:spPr>
+          <a:xfrm>
+            <a:off x="731520" y="6537960"/>
+            <a:ext cx="10515600" cy="274320"/>
+          </a:xfrm>
+          <a:prstGeom prst="rect">
+            <a:avLst/>
+          </a:prstGeom>
+          <a:noFill/>
+        </p:spPr>
+        <p:txBody>
+          <a:bodyPr wrap="none">
+            <a:spAutoFit/>
+          </a:bodyPr>
+          <a:lstStyle/>
+          <a:p>
+            <a:pPr>
+              <a:defRPr sz="850">
+                <a:solidFill>
+                  <a:srgbClr val="64748B"/>
+                </a:solidFill>
+                <a:latin typeface="Arial"/>
+              </a:defRPr>
+            </a:pPr>
+            <a:r>
+              <a:t>Confidential • Bluestock Fintech Analytics • Group: 62FMBF • Author: Rajeev Reddy</a:t>
+            </a:r>
+          </a:p>
+        </p:txBody>
+      </p:sp>
+      <p:sp>
+        <p:nvSpPr>
+          <p:cNvPr id="8" name="Rounded Rectangle 7"/>
+          <p:cNvSpPr/>
+          <p:nvPr/>
+        </p:nvSpPr>
+        <p:spPr>
+          <a:xfrm>
+            <a:off x="731520" y="1280160"/>
+            <a:ext cx="5212080" cy="4937760"/>
+          </a:xfrm>
+          <a:prstGeom prst="roundRect">
+            <a:avLst/>
+          </a:prstGeom>
+          <a:solidFill>
+            <a:srgbClr val="FFFFFF"/>
+          </a:solidFill>
+          <a:ln w="12700">
+            <a:solidFill>
+              <a:srgbClr val="E2E8F0"/>
+            </a:solidFill>
+          </a:ln>
+        </p:spPr>
+        <p:style>
+          <a:lnRef idx="1">
+            <a:schemeClr val="accent1"/>
+          </a:lnRef>
+          <a:fillRef idx="3">
+            <a:schemeClr val="accent1"/>
+          </a:fillRef>
+          <a:effectRef idx="2">
+            <a:schemeClr val="accent1"/>
+          </a:effectRef>
+          <a:fontRef idx="minor">
+            <a:schemeClr val="lt1"/>
+          </a:fontRef>
+        </p:style>
+        <p:txBody>
+          <a:bodyPr rtlCol="0" anchor="ctr"/>
+          <a:lstStyle/>
+          <a:p>
+            <a:pPr algn="ctr"/>
+          </a:p>
+        </p:txBody>
+      </p:sp>
+      <p:sp>
+        <p:nvSpPr>
+          <p:cNvPr id="9" name="TextBox 8"/>
+          <p:cNvSpPr txBox="1"/>
+          <p:nvPr/>
+        </p:nvSpPr>
+        <p:spPr>
+          <a:xfrm>
+            <a:off x="914400" y="1417319"/>
+            <a:ext cx="4846320" cy="411480"/>
+          </a:xfrm>
+          <a:prstGeom prst="rect">
+            <a:avLst/>
+          </a:prstGeom>
+          <a:noFill/>
+        </p:spPr>
+        <p:txBody>
+          <a:bodyPr wrap="square">
+            <a:spAutoFit/>
+          </a:bodyPr>
+          <a:lstStyle/>
+          <a:p>
+            <a:pPr>
+              <a:defRPr sz="1300" b="1">
+                <a:solidFill>
+                  <a:srgbClr val="1A365D"/>
+                </a:solidFill>
+                <a:latin typeface="Arial"/>
+              </a:defRPr>
+            </a:pPr>
+            <a:r>
+              <a:t>The Core Problem Statement</a:t>
+            </a:r>
+          </a:p>
+        </p:txBody>
+      </p:sp>
+      <p:sp>
+        <p:nvSpPr>
+          <p:cNvPr id="10" name="TextBox 9"/>
+          <p:cNvSpPr txBox="1"/>
+          <p:nvPr/>
+        </p:nvSpPr>
+        <p:spPr>
+          <a:xfrm>
+            <a:off x="914400" y="1920240"/>
+            <a:ext cx="4846320" cy="4114800"/>
+          </a:xfrm>
+          <a:prstGeom prst="rect">
+            <a:avLst/>
+          </a:prstGeom>
+          <a:noFill/>
+        </p:spPr>
+        <p:txBody>
+          <a:bodyPr wrap="square">
+            <a:spAutoFit/>
+          </a:bodyPr>
+          <a:lstStyle/>
+          <a:p>
+            <a:pPr>
+              <a:spcAft>
+                <a:spcPts val="1400"/>
+              </a:spcAft>
+              <a:defRPr sz="1150">
+                <a:solidFill>
+                  <a:srgbClr val="1E293B"/>
+                </a:solidFill>
+                <a:latin typeface="Arial"/>
+              </a:defRPr>
+            </a:pPr>
+            <a:r>
+              <a:t>&lt;b&gt;Data Fragmentation:&lt;/b&gt; NAV, AUM, portfolio holdings, and transaction records reside across disparate AMFI portals, static CSVs, and legacy formats.</a:t>
+            </a:r>
+          </a:p>
+          <a:p>
+            <a:pPr>
+              <a:spcAft>
+                <a:spcPts val="1400"/>
+              </a:spcAft>
+              <a:defRPr sz="1150">
+                <a:solidFill>
+                  <a:srgbClr val="1E293B"/>
+                </a:solidFill>
+                <a:latin typeface="Arial"/>
+              </a:defRPr>
+            </a:pPr>
+            <a:r>
+              <a:t>&lt;b&gt;High Expense Ratio Traps:&lt;/b&gt; Retail investors unknowingly forfeit 80–120 bps annually in Regular plan distributor commissions versus Direct growth plans.</a:t>
+            </a:r>
+          </a:p>
+          <a:p>
+            <a:pPr>
+              <a:spcAft>
+                <a:spcPts val="1400"/>
+              </a:spcAft>
+              <a:defRPr sz="1150">
+                <a:solidFill>
+                  <a:srgbClr val="1E293B"/>
+                </a:solidFill>
+                <a:latin typeface="Arial"/>
+              </a:defRPr>
+            </a:pPr>
+            <a:r>
+              <a:t>&lt;b&gt;Lagging Volatility &amp; Drawdown Assessment:&lt;/b&gt; Standard metric reporting focuses solely on trailing returns, ignoring peak-to-trough drawdowns and tail risk.</a:t>
+            </a:r>
+          </a:p>
+          <a:p>
+            <a:pPr>
+              <a:spcAft>
+                <a:spcPts val="1400"/>
+              </a:spcAft>
+              <a:defRPr sz="1150">
+                <a:solidFill>
+                  <a:srgbClr val="1E293B"/>
+                </a:solidFill>
+                <a:latin typeface="Arial"/>
+              </a:defRPr>
+            </a:pPr>
+            <a:r>
+              <a:t>&lt;b&gt;Sub-Optimal Asset Allocation:&lt;/b&gt; Lack of algorithmic scoring leaves retail investors vulnerable to heavy sector concentration (e.g., Financials &gt;35%).</a:t>
+            </a:r>
+          </a:p>
+        </p:txBody>
+      </p:sp>
+      <p:sp>
+        <p:nvSpPr>
+          <p:cNvPr id="11" name="Rounded Rectangle 10"/>
+          <p:cNvSpPr/>
+          <p:nvPr/>
+        </p:nvSpPr>
+        <p:spPr>
+          <a:xfrm>
+            <a:off x="6217920" y="1280160"/>
+            <a:ext cx="5212080" cy="4937760"/>
+          </a:xfrm>
+          <a:prstGeom prst="roundRect">
+            <a:avLst/>
+          </a:prstGeom>
+          <a:solidFill>
+            <a:srgbClr val="FFFFFF"/>
+          </a:solidFill>
+          <a:ln w="12700">
+            <a:solidFill>
+              <a:srgbClr val="E2E8F0"/>
+            </a:solidFill>
+          </a:ln>
+        </p:spPr>
+        <p:style>
+          <a:lnRef idx="1">
+            <a:schemeClr val="accent1"/>
+          </a:lnRef>
+          <a:fillRef idx="3">
+            <a:schemeClr val="accent1"/>
+          </a:fillRef>
+          <a:effectRef idx="2">
+            <a:schemeClr val="accent1"/>
+          </a:effectRef>
+          <a:fontRef idx="minor">
+            <a:schemeClr val="lt1"/>
+          </a:fontRef>
+        </p:style>
+        <p:txBody>
+          <a:bodyPr rtlCol="0" anchor="ctr"/>
+          <a:lstStyle/>
+          <a:p>
+            <a:pPr algn="ctr"/>
+          </a:p>
+        </p:txBody>
+      </p:sp>
+      <p:sp>
+        <p:nvSpPr>
+          <p:cNvPr id="12" name="TextBox 11"/>
+          <p:cNvSpPr txBox="1"/>
+          <p:nvPr/>
+        </p:nvSpPr>
+        <p:spPr>
+          <a:xfrm>
+            <a:off x="6400800" y="1417319"/>
+            <a:ext cx="4846320" cy="411480"/>
+          </a:xfrm>
+          <a:prstGeom prst="rect">
+            <a:avLst/>
+          </a:prstGeom>
+          <a:noFill/>
+        </p:spPr>
+        <p:txBody>
+          <a:bodyPr wrap="square">
+            <a:spAutoFit/>
+          </a:bodyPr>
+          <a:lstStyle/>
+          <a:p>
+            <a:pPr>
+              <a:defRPr sz="1300" b="1">
+                <a:solidFill>
+                  <a:srgbClr val="1A365D"/>
+                </a:solidFill>
+                <a:latin typeface="Arial"/>
+              </a:defRPr>
+            </a:pPr>
+            <a:r>
+              <a:t>Strategic Objectives &amp; Platform Solution</a:t>
+            </a:r>
+          </a:p>
+        </p:txBody>
+      </p:sp>
+      <p:sp>
+        <p:nvSpPr>
+          <p:cNvPr id="13" name="TextBox 12"/>
+          <p:cNvSpPr txBox="1"/>
+          <p:nvPr/>
+        </p:nvSpPr>
+        <p:spPr>
+          <a:xfrm>
+            <a:off x="6400800" y="1920240"/>
+            <a:ext cx="4846320" cy="4114800"/>
+          </a:xfrm>
+          <a:prstGeom prst="rect">
+            <a:avLst/>
+          </a:prstGeom>
+          <a:noFill/>
+        </p:spPr>
+        <p:txBody>
+          <a:bodyPr wrap="square">
+            <a:spAutoFit/>
+          </a:bodyPr>
+          <a:lstStyle/>
+          <a:p>
+            <a:pPr>
+              <a:spcAft>
+                <a:spcPts val="1400"/>
+              </a:spcAft>
+              <a:defRPr sz="1150">
+                <a:solidFill>
+                  <a:srgbClr val="1E293B"/>
+                </a:solidFill>
+                <a:latin typeface="Arial"/>
+              </a:defRPr>
+            </a:pPr>
+            <a:r>
+              <a:t>&lt;b&gt;Automated Ingestion Pipeline:&lt;/b&gt; Consolidate 10 heterogeneous AMFI datasets with live REST API extraction from mfapi.in.</a:t>
+            </a:r>
+          </a:p>
+          <a:p>
+            <a:pPr>
+              <a:spcAft>
+                <a:spcPts val="1400"/>
+              </a:spcAft>
+              <a:defRPr sz="1150">
+                <a:solidFill>
+                  <a:srgbClr val="1E293B"/>
+                </a:solidFill>
+                <a:latin typeface="Arial"/>
+              </a:defRPr>
+            </a:pPr>
+            <a:r>
+              <a:t>&lt;b&gt;Star Schema SQLite Warehouse:&lt;/b&gt; Architect a high-speed relational store (bluestock_mf.db) with 10 analytical SQL views and zero FK violations.</a:t>
+            </a:r>
+          </a:p>
+          <a:p>
+            <a:pPr>
+              <a:spcAft>
+                <a:spcPts val="1400"/>
+              </a:spcAft>
+              <a:defRPr sz="1150">
+                <a:solidFill>
+                  <a:srgbClr val="1E293B"/>
+                </a:solidFill>
+                <a:latin typeface="Arial"/>
+              </a:defRPr>
+            </a:pPr>
+            <a:r>
+              <a:t>&lt;b&gt;Institutional Risk Engine:&lt;/b&gt; Compute 1Y/3Y/5Y CAGR, Alpha, Beta vs Nifty 100, Sharpe, Sortino, Max Drawdown, VaR (95%), CVaR, and Sector HHI.</a:t>
+            </a:r>
+          </a:p>
+          <a:p>
+            <a:pPr>
+              <a:spcAft>
+                <a:spcPts val="1400"/>
+              </a:spcAft>
+              <a:defRPr sz="1150">
+                <a:solidFill>
+                  <a:srgbClr val="1E293B"/>
+                </a:solidFill>
+                <a:latin typeface="Arial"/>
+              </a:defRPr>
+            </a:pPr>
+            <a:r>
+              <a:t>&lt;b&gt;Actionable Composite Scorecard:&lt;/b&gt; Rank all 40 schemes (0–100) and deploy an interactive multi-page Streamlit analytical dashboard.</a:t>
             </a:r>
           </a:p>
         </p:txBody>
@@ -4471,75 +5279,23 @@
       <p:grpSpPr/>
       <p:sp>
         <p:nvSpPr>
-          <p:cNvPr id="2" name="TextBox 1"/>
-          <p:cNvSpPr txBox="1"/>
-          <p:nvPr/>
-        </p:nvSpPr>
-        <p:spPr>
-          <a:xfrm>
-            <a:off x="731520" y="457200"/>
-            <a:ext cx="10698480" cy="1097280"/>
-          </a:xfrm>
-          <a:prstGeom prst="rect">
-            <a:avLst/>
-          </a:prstGeom>
-          <a:noFill/>
-        </p:spPr>
-        <p:txBody>
-          <a:bodyPr wrap="square" lIns="0" tIns="0" rIns="0" bIns="0">
-            <a:spAutoFit/>
-          </a:bodyPr>
-          <a:lstStyle/>
-          <a:p>
-            <a:pPr>
-              <a:defRPr sz="2800" b="1">
-                <a:solidFill>
-                  <a:srgbClr val="102C57"/>
-                </a:solidFill>
-              </a:defRPr>
-            </a:pPr>
-            <a:r>
-              <a:t>The Core Problem Statement</a:t>
-            </a:r>
-          </a:p>
-          <a:p>
-            <a:pPr>
-              <a:spcBef>
-                <a:spcPts val="400"/>
-              </a:spcBef>
-              <a:defRPr sz="1400">
-                <a:solidFill>
-                  <a:srgbClr val="6C757D"/>
-                </a:solidFill>
-              </a:defRPr>
-            </a:pPr>
-            <a:r>
-              <a:t>Resolving data fragmentation and comparison gaps in the Indian MF ecosystem</a:t>
-            </a:r>
-          </a:p>
-        </p:txBody>
-      </p:sp>
-      <p:sp>
-        <p:nvSpPr>
-          <p:cNvPr id="3" name="Rectangle 2"/>
+          <p:cNvPr id="2" name="Rectangle 1"/>
           <p:cNvSpPr/>
           <p:nvPr/>
         </p:nvSpPr>
         <p:spPr>
           <a:xfrm>
-            <a:off x="731520" y="1645920"/>
-            <a:ext cx="3383280" cy="4572000"/>
+            <a:off x="0" y="0"/>
+            <a:ext cx="12191695" cy="1005840"/>
           </a:xfrm>
           <a:prstGeom prst="rect">
             <a:avLst/>
           </a:prstGeom>
           <a:solidFill>
-            <a:srgbClr val="F5F7FA"/>
+            <a:srgbClr val="0F2537"/>
           </a:solidFill>
-          <a:ln w="19050">
-            <a:solidFill>
-              <a:srgbClr val="3565A9"/>
-            </a:solidFill>
+          <a:ln>
+            <a:noFill/>
           </a:ln>
         </p:spPr>
         <p:style>
@@ -4557,88 +5313,32 @@
           </a:fontRef>
         </p:style>
         <p:txBody>
-          <a:bodyPr rtlCol="0" anchor="ctr" wrap="square" lIns="274320" rIns="274320" tIns="228600" bIns="228600"/>
-          <a:lstStyle/>
-          <a:p>
-            <a:pPr algn="ctr">
-              <a:defRPr sz="1800" b="1">
-                <a:solidFill>
-                  <a:srgbClr val="102C57"/>
-                </a:solidFill>
-              </a:defRPr>
-            </a:pPr>
-            <a:r>
-              <a:t>P1: Data Fragmentation</a:t>
-            </a:r>
-          </a:p>
-          <a:p>
-            <a:pPr>
-              <a:spcBef>
-                <a:spcPts val="600"/>
-              </a:spcBef>
-              <a:defRPr sz="1300">
-                <a:solidFill>
-                  <a:srgbClr val="212529"/>
-                </a:solidFill>
-              </a:defRPr>
-            </a:pPr>
-            <a:r>
-              <a:t>• NAV, AUM, portfolio holdings, and SIP flow statistics reside in disparate AMFI formats (TXT, HTML, PDF).</a:t>
-            </a:r>
-          </a:p>
-          <a:p>
-            <a:pPr>
-              <a:spcBef>
-                <a:spcPts val="600"/>
-              </a:spcBef>
-              <a:defRPr sz="1300">
-                <a:solidFill>
-                  <a:srgbClr val="212529"/>
-                </a:solidFill>
-              </a:defRPr>
-            </a:pPr>
-            <a:r>
-              <a:t>• No single unified analytical database existed for direct cross-AMC querying.</a:t>
-            </a:r>
-          </a:p>
-          <a:p>
-            <a:pPr>
-              <a:spcBef>
-                <a:spcPts val="600"/>
-              </a:spcBef>
-              <a:defRPr sz="1300">
-                <a:solidFill>
-                  <a:srgbClr val="212529"/>
-                </a:solidFill>
-              </a:defRPr>
-            </a:pPr>
-            <a:r>
-              <a:t>• Solution: Built standardized ETL pipeline consolidating all feeds into SQLite.</a:t>
-            </a:r>
-          </a:p>
-        </p:txBody>
-      </p:sp>
-      <p:sp>
-        <p:nvSpPr>
-          <p:cNvPr id="4" name="Rectangle 3"/>
+          <a:bodyPr rtlCol="0" anchor="ctr"/>
+          <a:lstStyle/>
+          <a:p>
+            <a:pPr algn="ctr"/>
+          </a:p>
+        </p:txBody>
+      </p:sp>
+      <p:sp>
+        <p:nvSpPr>
+          <p:cNvPr id="3" name="Rectangle 2"/>
           <p:cNvSpPr/>
           <p:nvPr/>
         </p:nvSpPr>
         <p:spPr>
           <a:xfrm>
-            <a:off x="4389120" y="1645920"/>
-            <a:ext cx="3383280" cy="4572000"/>
+            <a:off x="0" y="1005840"/>
+            <a:ext cx="12191695" cy="54864"/>
           </a:xfrm>
           <a:prstGeom prst="rect">
             <a:avLst/>
           </a:prstGeom>
           <a:solidFill>
-            <a:srgbClr val="F5F7FA"/>
+            <a:srgbClr val="0284C7"/>
           </a:solidFill>
-          <a:ln w="19050">
-            <a:solidFill>
-              <a:srgbClr val="3565A9"/>
-            </a:solidFill>
+          <a:ln>
+            <a:noFill/>
           </a:ln>
         </p:spPr>
         <p:style>
@@ -4656,87 +5356,105 @@
           </a:fontRef>
         </p:style>
         <p:txBody>
-          <a:bodyPr rtlCol="0" anchor="ctr" wrap="square" lIns="274320" rIns="274320" tIns="228600" bIns="228600"/>
-          <a:lstStyle/>
-          <a:p>
-            <a:pPr algn="ctr">
-              <a:defRPr sz="1800" b="1">
-                <a:solidFill>
-                  <a:srgbClr val="102C57"/>
-                </a:solidFill>
-              </a:defRPr>
-            </a:pPr>
-            <a:r>
-              <a:t>P2: Risk Analytics Gap</a:t>
-            </a:r>
-          </a:p>
-          <a:p>
-            <a:pPr>
-              <a:spcBef>
-                <a:spcPts val="600"/>
-              </a:spcBef>
-              <a:defRPr sz="1300">
-                <a:solidFill>
-                  <a:srgbClr val="212529"/>
-                </a:solidFill>
-              </a:defRPr>
-            </a:pPr>
-            <a:r>
-              <a:t>• Investors rely solely on 1-year or 3-year absolute returns without volatility adjustment.</a:t>
-            </a:r>
-          </a:p>
-          <a:p>
-            <a:pPr>
-              <a:spcBef>
-                <a:spcPts val="600"/>
-              </a:spcBef>
-              <a:defRPr sz="1300">
-                <a:solidFill>
-                  <a:srgbClr val="212529"/>
-                </a:solidFill>
-              </a:defRPr>
-            </a:pPr>
-            <a:r>
-              <a:t>• High returns frequently mask dangerous drawdown risks.</a:t>
-            </a:r>
-          </a:p>
-          <a:p>
-            <a:pPr>
-              <a:spcBef>
-                <a:spcPts val="600"/>
-              </a:spcBef>
-              <a:defRPr sz="1300">
-                <a:solidFill>
-                  <a:srgbClr val="212529"/>
-                </a:solidFill>
-              </a:defRPr>
-            </a:pPr>
-            <a:r>
-              <a:t>• Solution: Automated computation of Sharpe, Sortino, and Value-at-Risk across all 40 schemes.</a:t>
-            </a:r>
-          </a:p>
-        </p:txBody>
-      </p:sp>
-      <p:sp>
-        <p:nvSpPr>
-          <p:cNvPr id="5" name="Rectangle 4"/>
+          <a:bodyPr rtlCol="0" anchor="ctr"/>
+          <a:lstStyle/>
+          <a:p>
+            <a:pPr algn="ctr"/>
+          </a:p>
+        </p:txBody>
+      </p:sp>
+      <p:sp>
+        <p:nvSpPr>
+          <p:cNvPr id="4" name="TextBox 3"/>
+          <p:cNvSpPr txBox="1"/>
+          <p:nvPr/>
+        </p:nvSpPr>
+        <p:spPr>
+          <a:xfrm>
+            <a:off x="731520" y="109728"/>
+            <a:ext cx="10515600" cy="274320"/>
+          </a:xfrm>
+          <a:prstGeom prst="rect">
+            <a:avLst/>
+          </a:prstGeom>
+          <a:noFill/>
+        </p:spPr>
+        <p:txBody>
+          <a:bodyPr wrap="square">
+            <a:spAutoFit/>
+          </a:bodyPr>
+          <a:lstStyle/>
+          <a:p>
+            <a:pPr>
+              <a:defRPr sz="900" b="1">
+                <a:solidFill>
+                  <a:srgbClr val="0284C7"/>
+                </a:solidFill>
+                <a:latin typeface="Arial"/>
+              </a:defRPr>
+            </a:pPr>
+            <a:r>
+              <a:t>BLUESTOCK FINTECH • MUTUAL FUND ANALYTICS CAPSTONE</a:t>
+            </a:r>
+          </a:p>
+        </p:txBody>
+      </p:sp>
+      <p:sp>
+        <p:nvSpPr>
+          <p:cNvPr id="5" name="TextBox 4"/>
+          <p:cNvSpPr txBox="1"/>
+          <p:nvPr/>
+        </p:nvSpPr>
+        <p:spPr>
+          <a:xfrm>
+            <a:off x="731520" y="347472"/>
+            <a:ext cx="10515600" cy="548640"/>
+          </a:xfrm>
+          <a:prstGeom prst="rect">
+            <a:avLst/>
+          </a:prstGeom>
+          <a:noFill/>
+        </p:spPr>
+        <p:txBody>
+          <a:bodyPr wrap="square">
+            <a:spAutoFit/>
+          </a:bodyPr>
+          <a:lstStyle/>
+          <a:p>
+            <a:pPr>
+              <a:defRPr sz="2000" b="1">
+                <a:solidFill>
+                  <a:srgbClr val="FFFFFF"/>
+                </a:solidFill>
+                <a:latin typeface="Arial"/>
+              </a:defRPr>
+            </a:pPr>
+            <a:r>
+              <a:t>2. Data Ingestion Architecture &amp; Disparate Sources</a:t>
+            </a:r>
+          </a:p>
+        </p:txBody>
+      </p:sp>
+      <p:sp>
+        <p:nvSpPr>
+          <p:cNvPr id="6" name="Rectangle 5"/>
           <p:cNvSpPr/>
           <p:nvPr/>
         </p:nvSpPr>
         <p:spPr>
           <a:xfrm>
-            <a:off x="8046720" y="1645920"/>
-            <a:ext cx="3383280" cy="4572000"/>
+            <a:off x="0" y="6492240"/>
+            <a:ext cx="12191695" cy="365760"/>
           </a:xfrm>
           <a:prstGeom prst="rect">
             <a:avLst/>
           </a:prstGeom>
           <a:solidFill>
-            <a:srgbClr val="F5F7FA"/>
+            <a:srgbClr val="F8FAFC"/>
           </a:solidFill>
-          <a:ln w="19050">
+          <a:ln>
             <a:solidFill>
-              <a:srgbClr val="3565A9"/>
+              <a:srgbClr val="E2E8F0"/>
             </a:solidFill>
           </a:ln>
         </p:spPr>
@@ -4755,63 +5473,341 @@
           </a:fontRef>
         </p:style>
         <p:txBody>
-          <a:bodyPr rtlCol="0" anchor="ctr" wrap="square" lIns="274320" rIns="274320" tIns="228600" bIns="228600"/>
-          <a:lstStyle/>
-          <a:p>
-            <a:pPr algn="ctr">
-              <a:defRPr sz="1800" b="1">
-                <a:solidFill>
-                  <a:srgbClr val="102C57"/>
-                </a:solidFill>
-              </a:defRPr>
-            </a:pPr>
-            <a:r>
-              <a:t>P3: Benchmark Tracking</a:t>
-            </a:r>
-          </a:p>
-          <a:p>
-            <a:pPr>
-              <a:spcBef>
-                <a:spcPts val="600"/>
-              </a:spcBef>
-              <a:defRPr sz="1300">
-                <a:solidFill>
-                  <a:srgbClr val="212529"/>
-                </a:solidFill>
-              </a:defRPr>
-            </a:pPr>
-            <a:r>
-              <a:t>• Retail folios often lack active Alpha/Beta benchmarking against Nifty 50 / BSE indices.</a:t>
-            </a:r>
-          </a:p>
-          <a:p>
-            <a:pPr>
-              <a:spcBef>
-                <a:spcPts val="600"/>
-              </a:spcBef>
-              <a:defRPr sz="1300">
-                <a:solidFill>
-                  <a:srgbClr val="212529"/>
-                </a:solidFill>
-              </a:defRPr>
-            </a:pPr>
-            <a:r>
-              <a:t>• Expense ratios directly erode compounding yields over multi-year horizons.</a:t>
-            </a:r>
-          </a:p>
-          <a:p>
-            <a:pPr>
-              <a:spcBef>
-                <a:spcPts val="600"/>
-              </a:spcBef>
-              <a:defRPr sz="1300">
-                <a:solidFill>
-                  <a:srgbClr val="212529"/>
-                </a:solidFill>
-              </a:defRPr>
-            </a:pPr>
-            <a:r>
-              <a:t>• Solution: Built transparent benchmark alpha attribution and direct vs regular plan comparison.</a:t>
+          <a:bodyPr rtlCol="0" anchor="ctr"/>
+          <a:lstStyle/>
+          <a:p>
+            <a:pPr algn="ctr"/>
+          </a:p>
+        </p:txBody>
+      </p:sp>
+      <p:sp>
+        <p:nvSpPr>
+          <p:cNvPr id="7" name="TextBox 6"/>
+          <p:cNvSpPr txBox="1"/>
+          <p:nvPr/>
+        </p:nvSpPr>
+        <p:spPr>
+          <a:xfrm>
+            <a:off x="731520" y="6537960"/>
+            <a:ext cx="10515600" cy="274320"/>
+          </a:xfrm>
+          <a:prstGeom prst="rect">
+            <a:avLst/>
+          </a:prstGeom>
+          <a:noFill/>
+        </p:spPr>
+        <p:txBody>
+          <a:bodyPr wrap="none">
+            <a:spAutoFit/>
+          </a:bodyPr>
+          <a:lstStyle/>
+          <a:p>
+            <a:pPr>
+              <a:defRPr sz="850">
+                <a:solidFill>
+                  <a:srgbClr val="64748B"/>
+                </a:solidFill>
+                <a:latin typeface="Arial"/>
+              </a:defRPr>
+            </a:pPr>
+            <a:r>
+              <a:t>Confidential • Bluestock Fintech Analytics • Group: 62FMBF • Author: Rajeev Reddy</a:t>
+            </a:r>
+          </a:p>
+        </p:txBody>
+      </p:sp>
+      <p:sp>
+        <p:nvSpPr>
+          <p:cNvPr id="8" name="Rounded Rectangle 7"/>
+          <p:cNvSpPr/>
+          <p:nvPr/>
+        </p:nvSpPr>
+        <p:spPr>
+          <a:xfrm>
+            <a:off x="731520" y="1280160"/>
+            <a:ext cx="10698480" cy="4937760"/>
+          </a:xfrm>
+          <a:prstGeom prst="roundRect">
+            <a:avLst/>
+          </a:prstGeom>
+          <a:solidFill>
+            <a:srgbClr val="FFFFFF"/>
+          </a:solidFill>
+          <a:ln w="12700">
+            <a:solidFill>
+              <a:srgbClr val="E2E8F0"/>
+            </a:solidFill>
+          </a:ln>
+        </p:spPr>
+        <p:style>
+          <a:lnRef idx="1">
+            <a:schemeClr val="accent1"/>
+          </a:lnRef>
+          <a:fillRef idx="3">
+            <a:schemeClr val="accent1"/>
+          </a:fillRef>
+          <a:effectRef idx="2">
+            <a:schemeClr val="accent1"/>
+          </a:effectRef>
+          <a:fontRef idx="minor">
+            <a:schemeClr val="lt1"/>
+          </a:fontRef>
+        </p:style>
+        <p:txBody>
+          <a:bodyPr rtlCol="0" anchor="ctr"/>
+          <a:lstStyle/>
+          <a:p>
+            <a:pPr algn="ctr"/>
+          </a:p>
+        </p:txBody>
+      </p:sp>
+      <p:sp>
+        <p:nvSpPr>
+          <p:cNvPr id="9" name="TextBox 8"/>
+          <p:cNvSpPr txBox="1"/>
+          <p:nvPr/>
+        </p:nvSpPr>
+        <p:spPr>
+          <a:xfrm>
+            <a:off x="914400" y="1417319"/>
+            <a:ext cx="10332719" cy="411480"/>
+          </a:xfrm>
+          <a:prstGeom prst="rect">
+            <a:avLst/>
+          </a:prstGeom>
+          <a:noFill/>
+        </p:spPr>
+        <p:txBody>
+          <a:bodyPr wrap="square">
+            <a:spAutoFit/>
+          </a:bodyPr>
+          <a:lstStyle/>
+          <a:p>
+            <a:pPr>
+              <a:defRPr sz="1300" b="1">
+                <a:solidFill>
+                  <a:srgbClr val="1A365D"/>
+                </a:solidFill>
+                <a:latin typeface="Arial"/>
+              </a:defRPr>
+            </a:pPr>
+            <a:r>
+              <a:t>10 Unified AMFI Data Sources &amp; Live API Integration</a:t>
+            </a:r>
+          </a:p>
+        </p:txBody>
+      </p:sp>
+      <p:sp>
+        <p:nvSpPr>
+          <p:cNvPr id="10" name="TextBox 9"/>
+          <p:cNvSpPr txBox="1"/>
+          <p:nvPr/>
+        </p:nvSpPr>
+        <p:spPr>
+          <a:xfrm>
+            <a:off x="914400" y="1828800"/>
+            <a:ext cx="10332720" cy="4206240"/>
+          </a:xfrm>
+          <a:prstGeom prst="rect">
+            <a:avLst/>
+          </a:prstGeom>
+          <a:noFill/>
+        </p:spPr>
+        <p:txBody>
+          <a:bodyPr wrap="square">
+            <a:spAutoFit/>
+          </a:bodyPr>
+          <a:lstStyle/>
+          <a:p>
+            <a:pPr>
+              <a:spcAft>
+                <a:spcPts val="800"/>
+              </a:spcAft>
+              <a:defRPr sz="1200" b="1">
+                <a:solidFill>
+                  <a:srgbClr val="0284C7"/>
+                </a:solidFill>
+                <a:latin typeface="Arial"/>
+              </a:defRPr>
+            </a:pPr>
+            <a:r>
+              <a:t>Comprehensive Ingestion Scope: 87,000+ Raw Records Cleaned, Validated &amp; Normalized</a:t>
+            </a:r>
+          </a:p>
+          <a:p>
+            <a:pPr>
+              <a:spcAft>
+                <a:spcPts val="250"/>
+              </a:spcAft>
+              <a:defRPr sz="1000">
+                <a:solidFill>
+                  <a:srgbClr val="1E293B"/>
+                </a:solidFill>
+                <a:latin typeface="Consolas"/>
+              </a:defRPr>
+            </a:pPr>
+            <a:r>
+              <a:t>• 01_fund_master.csv           | 40 Schemes       | Scheme metadata, AMFI code, fund house, category, plan type, TER</a:t>
+            </a:r>
+          </a:p>
+          <a:p>
+            <a:pPr>
+              <a:spcAft>
+                <a:spcPts val="250"/>
+              </a:spcAft>
+              <a:defRPr sz="1000">
+                <a:solidFill>
+                  <a:srgbClr val="1E293B"/>
+                </a:solidFill>
+                <a:latin typeface="Consolas"/>
+              </a:defRPr>
+            </a:pPr>
+            <a:r>
+              <a:t>• 02_nav_history.csv           | 46,000 Records   | Daily historical NAV time series (2020–2025) across all 40 funds</a:t>
+            </a:r>
+          </a:p>
+          <a:p>
+            <a:pPr>
+              <a:spcAft>
+                <a:spcPts val="250"/>
+              </a:spcAft>
+              <a:defRPr sz="1000">
+                <a:solidFill>
+                  <a:srgbClr val="1E293B"/>
+                </a:solidFill>
+                <a:latin typeface="Consolas"/>
+              </a:defRPr>
+            </a:pPr>
+            <a:r>
+              <a:t>• 03_aum_by_fund_house.csv     | 44 Fund Houses   | Total AUM, market share %, and quarterly growth rankings</a:t>
+            </a:r>
+          </a:p>
+          <a:p>
+            <a:pPr>
+              <a:spcAft>
+                <a:spcPts val="250"/>
+              </a:spcAft>
+              <a:defRPr sz="1000">
+                <a:solidFill>
+                  <a:srgbClr val="1E293B"/>
+                </a:solidFill>
+                <a:latin typeface="Consolas"/>
+              </a:defRPr>
+            </a:pPr>
+            <a:r>
+              <a:t>• 04_monthly_sip_inflows.csv   | 60 Months        | Industry-wide monthly SIP mobilization figures (Rs. Crore)</a:t>
+            </a:r>
+          </a:p>
+          <a:p>
+            <a:pPr>
+              <a:spcAft>
+                <a:spcPts val="250"/>
+              </a:spcAft>
+              <a:defRPr sz="1000">
+                <a:solidFill>
+                  <a:srgbClr val="1E293B"/>
+                </a:solidFill>
+                <a:latin typeface="Consolas"/>
+              </a:defRPr>
+            </a:pPr>
+            <a:r>
+              <a:t>• 05_category_inflows.csv      | 36 Months        | Net capital flows across Equity, Debt, Hybrid, and Liquid categories</a:t>
+            </a:r>
+          </a:p>
+          <a:p>
+            <a:pPr>
+              <a:spcAft>
+                <a:spcPts val="250"/>
+              </a:spcAft>
+              <a:defRPr sz="1000">
+                <a:solidFill>
+                  <a:srgbClr val="1E293B"/>
+                </a:solidFill>
+                <a:latin typeface="Consolas"/>
+              </a:defRPr>
+            </a:pPr>
+            <a:r>
+              <a:t>• 06_industry_folio_count.csv  | 60 Months        | Unique investor folios tracking retail vs HNI participation trends</a:t>
+            </a:r>
+          </a:p>
+          <a:p>
+            <a:pPr>
+              <a:spcAft>
+                <a:spcPts val="250"/>
+              </a:spcAft>
+              <a:defRPr sz="1000">
+                <a:solidFill>
+                  <a:srgbClr val="1E293B"/>
+                </a:solidFill>
+                <a:latin typeface="Consolas"/>
+              </a:defRPr>
+            </a:pPr>
+            <a:r>
+              <a:t>• 07_scheme_performance.csv    | 40 Schemes       | Historical 1Y, 3Y, 5Y return baselines and reported benchmark indices</a:t>
+            </a:r>
+          </a:p>
+          <a:p>
+            <a:pPr>
+              <a:spcAft>
+                <a:spcPts val="250"/>
+              </a:spcAft>
+              <a:defRPr sz="1000">
+                <a:solidFill>
+                  <a:srgbClr val="1E293B"/>
+                </a:solidFill>
+                <a:latin typeface="Consolas"/>
+              </a:defRPr>
+            </a:pPr>
+            <a:r>
+              <a:t>• 08_investor_transactions.csv | 32,778 Records   | Granular investor demographics (age, state, city tier, SIP continuity)</a:t>
+            </a:r>
+          </a:p>
+          <a:p>
+            <a:pPr>
+              <a:spcAft>
+                <a:spcPts val="250"/>
+              </a:spcAft>
+              <a:defRPr sz="1000">
+                <a:solidFill>
+                  <a:srgbClr val="1E293B"/>
+                </a:solidFill>
+                <a:latin typeface="Consolas"/>
+              </a:defRPr>
+            </a:pPr>
+            <a:r>
+              <a:t>• 09_portfolio_holdings.csv    | 400+ Holdings    | Top 10 equity and debt holdings per scheme with sector weights</a:t>
+            </a:r>
+          </a:p>
+          <a:p>
+            <a:pPr>
+              <a:spcAft>
+                <a:spcPts val="250"/>
+              </a:spcAft>
+              <a:defRPr sz="1000">
+                <a:solidFill>
+                  <a:srgbClr val="1E293B"/>
+                </a:solidFill>
+                <a:latin typeface="Consolas"/>
+              </a:defRPr>
+            </a:pPr>
+            <a:r>
+              <a:t>• 10_benchmark_indices.csv     | 1,250 Dates      | Daily closing price history for Nifty 50 and Nifty 100 benchmarks</a:t>
+            </a:r>
+          </a:p>
+          <a:p>
+            <a:pPr>
+              <a:spcAft>
+                <a:spcPts val="250"/>
+              </a:spcAft>
+              <a:defRPr sz="1000">
+                <a:solidFill>
+                  <a:srgbClr val="1E293B"/>
+                </a:solidFill>
+                <a:latin typeface="Consolas"/>
+              </a:defRPr>
+            </a:pPr>
+            <a:r>
+              <a:t>• Live mfapi.in REST API       | Active Web Service | Live automated endpoint fetching real-time NAVs and JSON metadata</a:t>
             </a:r>
           </a:p>
         </p:txBody>
@@ -4836,75 +5832,23 @@
       <p:grpSpPr/>
       <p:sp>
         <p:nvSpPr>
-          <p:cNvPr id="2" name="TextBox 1"/>
-          <p:cNvSpPr txBox="1"/>
-          <p:nvPr/>
-        </p:nvSpPr>
-        <p:spPr>
-          <a:xfrm>
-            <a:off x="731520" y="457200"/>
-            <a:ext cx="10698480" cy="1097280"/>
-          </a:xfrm>
-          <a:prstGeom prst="rect">
-            <a:avLst/>
-          </a:prstGeom>
-          <a:noFill/>
-        </p:spPr>
-        <p:txBody>
-          <a:bodyPr wrap="square" lIns="0" tIns="0" rIns="0" bIns="0">
-            <a:spAutoFit/>
-          </a:bodyPr>
-          <a:lstStyle/>
-          <a:p>
-            <a:pPr>
-              <a:defRPr sz="2800" b="1">
-                <a:solidFill>
-                  <a:srgbClr val="102C57"/>
-                </a:solidFill>
-              </a:defRPr>
-            </a:pPr>
-            <a:r>
-              <a:t>System Architecture &amp; ETL Pipeline</a:t>
-            </a:r>
-          </a:p>
-          <a:p>
-            <a:pPr>
-              <a:spcBef>
-                <a:spcPts val="400"/>
-              </a:spcBef>
-              <a:defRPr sz="1400">
-                <a:solidFill>
-                  <a:srgbClr val="6C757D"/>
-                </a:solidFill>
-              </a:defRPr>
-            </a:pPr>
-            <a:r>
-              <a:t>End-to-end data pipeline from raw ingestion to analytical reporting</a:t>
-            </a:r>
-          </a:p>
-        </p:txBody>
-      </p:sp>
-      <p:sp>
-        <p:nvSpPr>
-          <p:cNvPr id="3" name="Rectangle 2"/>
+          <p:cNvPr id="2" name="Rectangle 1"/>
           <p:cNvSpPr/>
           <p:nvPr/>
         </p:nvSpPr>
         <p:spPr>
           <a:xfrm>
-            <a:off x="731520" y="1645920"/>
-            <a:ext cx="3383280" cy="4572000"/>
+            <a:off x="0" y="0"/>
+            <a:ext cx="12191695" cy="1005840"/>
           </a:xfrm>
           <a:prstGeom prst="rect">
             <a:avLst/>
           </a:prstGeom>
           <a:solidFill>
-            <a:srgbClr val="F5F7FA"/>
+            <a:srgbClr val="0F2537"/>
           </a:solidFill>
-          <a:ln w="19050">
-            <a:solidFill>
-              <a:srgbClr val="3565A9"/>
-            </a:solidFill>
+          <a:ln>
+            <a:noFill/>
           </a:ln>
         </p:spPr>
         <p:style>
@@ -4922,103 +5866,32 @@
           </a:fontRef>
         </p:style>
         <p:txBody>
-          <a:bodyPr rtlCol="0" anchor="ctr" wrap="square" lIns="274320" rIns="274320" tIns="228600" bIns="228600"/>
-          <a:lstStyle/>
-          <a:p>
-            <a:pPr algn="ctr">
-              <a:defRPr sz="1800" b="1">
-                <a:solidFill>
-                  <a:srgbClr val="102C57"/>
-                </a:solidFill>
-              </a:defRPr>
-            </a:pPr>
-            <a:r>
-              <a:t>1. Extraction Layer</a:t>
-            </a:r>
-          </a:p>
-          <a:p>
-            <a:pPr>
-              <a:spcBef>
-                <a:spcPts val="600"/>
-              </a:spcBef>
-              <a:defRPr sz="1300">
-                <a:solidFill>
-                  <a:srgbClr val="212529"/>
-                </a:solidFill>
-              </a:defRPr>
-            </a:pPr>
-            <a:r>
-              <a:t>• 10 Provided CSV Datasets (87,000+ records).</a:t>
-            </a:r>
-          </a:p>
-          <a:p>
-            <a:pPr>
-              <a:spcBef>
-                <a:spcPts val="600"/>
-              </a:spcBef>
-              <a:defRPr sz="1300">
-                <a:solidFill>
-                  <a:srgbClr val="212529"/>
-                </a:solidFill>
-              </a:defRPr>
-            </a:pPr>
-            <a:r>
-              <a:t>• REST API Ingestion: Real-time NAV from mfapi.in.</a:t>
-            </a:r>
-          </a:p>
-          <a:p>
-            <a:pPr>
-              <a:spcBef>
-                <a:spcPts val="600"/>
-              </a:spcBef>
-              <a:defRPr sz="1300">
-                <a:solidFill>
-                  <a:srgbClr val="212529"/>
-                </a:solidFill>
-              </a:defRPr>
-            </a:pPr>
-            <a:r>
-              <a:t>• 6 Schemes tracked dynamically with JSON parsing.</a:t>
-            </a:r>
-          </a:p>
-          <a:p>
-            <a:pPr>
-              <a:spcBef>
-                <a:spcPts val="600"/>
-              </a:spcBef>
-              <a:defRPr sz="1300">
-                <a:solidFill>
-                  <a:srgbClr val="212529"/>
-                </a:solidFill>
-              </a:defRPr>
-            </a:pPr>
-            <a:r>
-              <a:t>• Automated anomaly and null-value detection.</a:t>
-            </a:r>
-          </a:p>
-        </p:txBody>
-      </p:sp>
-      <p:sp>
-        <p:nvSpPr>
-          <p:cNvPr id="4" name="Rectangle 3"/>
+          <a:bodyPr rtlCol="0" anchor="ctr"/>
+          <a:lstStyle/>
+          <a:p>
+            <a:pPr algn="ctr"/>
+          </a:p>
+        </p:txBody>
+      </p:sp>
+      <p:sp>
+        <p:nvSpPr>
+          <p:cNvPr id="3" name="Rectangle 2"/>
           <p:cNvSpPr/>
           <p:nvPr/>
         </p:nvSpPr>
         <p:spPr>
           <a:xfrm>
-            <a:off x="4389120" y="1645920"/>
-            <a:ext cx="3383280" cy="4572000"/>
+            <a:off x="0" y="1005840"/>
+            <a:ext cx="12191695" cy="54864"/>
           </a:xfrm>
           <a:prstGeom prst="rect">
             <a:avLst/>
           </a:prstGeom>
           <a:solidFill>
-            <a:srgbClr val="F5F7FA"/>
+            <a:srgbClr val="0284C7"/>
           </a:solidFill>
-          <a:ln w="19050">
-            <a:solidFill>
-              <a:srgbClr val="3565A9"/>
-            </a:solidFill>
+          <a:ln>
+            <a:noFill/>
           </a:ln>
         </p:spPr>
         <p:style>
@@ -5036,102 +5909,105 @@
           </a:fontRef>
         </p:style>
         <p:txBody>
-          <a:bodyPr rtlCol="0" anchor="ctr" wrap="square" lIns="274320" rIns="274320" tIns="228600" bIns="228600"/>
-          <a:lstStyle/>
-          <a:p>
-            <a:pPr algn="ctr">
-              <a:defRPr sz="1800" b="1">
-                <a:solidFill>
-                  <a:srgbClr val="102C57"/>
-                </a:solidFill>
-              </a:defRPr>
-            </a:pPr>
-            <a:r>
-              <a:t>2. Transformation &amp; Storage</a:t>
-            </a:r>
-          </a:p>
-          <a:p>
-            <a:pPr>
-              <a:spcBef>
-                <a:spcPts val="600"/>
-              </a:spcBef>
-              <a:defRPr sz="1300">
-                <a:solidFill>
-                  <a:srgbClr val="212529"/>
-                </a:solidFill>
-              </a:defRPr>
-            </a:pPr>
-            <a:r>
-              <a:t>• Data cleaning, type casting &amp; datetime ISO conversion.</a:t>
-            </a:r>
-          </a:p>
-          <a:p>
-            <a:pPr>
-              <a:spcBef>
-                <a:spcPts val="600"/>
-              </a:spcBef>
-              <a:defRPr sz="1300">
-                <a:solidFill>
-                  <a:srgbClr val="212529"/>
-                </a:solidFill>
-              </a:defRPr>
-            </a:pPr>
-            <a:r>
-              <a:t>• Star Schema Relational SQLite Database (bluestock_mf.db).</a:t>
-            </a:r>
-          </a:p>
-          <a:p>
-            <a:pPr>
-              <a:spcBef>
-                <a:spcPts val="600"/>
-              </a:spcBef>
-              <a:defRPr sz="1300">
-                <a:solidFill>
-                  <a:srgbClr val="212529"/>
-                </a:solidFill>
-              </a:defRPr>
-            </a:pPr>
-            <a:r>
-              <a:t>• dim_fund, dim_date, fact_nav, fact_transactions, fact_performance, fact_aum, fact_sip_industry.</a:t>
-            </a:r>
-          </a:p>
-          <a:p>
-            <a:pPr>
-              <a:spcBef>
-                <a:spcPts val="600"/>
-              </a:spcBef>
-              <a:defRPr sz="1300">
-                <a:solidFill>
-                  <a:srgbClr val="212529"/>
-                </a:solidFill>
-              </a:defRPr>
-            </a:pPr>
-            <a:r>
-              <a:t>• 100% AMFI scheme code referential integrity.</a:t>
-            </a:r>
-          </a:p>
-        </p:txBody>
-      </p:sp>
-      <p:sp>
-        <p:nvSpPr>
-          <p:cNvPr id="5" name="Rectangle 4"/>
+          <a:bodyPr rtlCol="0" anchor="ctr"/>
+          <a:lstStyle/>
+          <a:p>
+            <a:pPr algn="ctr"/>
+          </a:p>
+        </p:txBody>
+      </p:sp>
+      <p:sp>
+        <p:nvSpPr>
+          <p:cNvPr id="4" name="TextBox 3"/>
+          <p:cNvSpPr txBox="1"/>
+          <p:nvPr/>
+        </p:nvSpPr>
+        <p:spPr>
+          <a:xfrm>
+            <a:off x="731520" y="109728"/>
+            <a:ext cx="10515600" cy="274320"/>
+          </a:xfrm>
+          <a:prstGeom prst="rect">
+            <a:avLst/>
+          </a:prstGeom>
+          <a:noFill/>
+        </p:spPr>
+        <p:txBody>
+          <a:bodyPr wrap="square">
+            <a:spAutoFit/>
+          </a:bodyPr>
+          <a:lstStyle/>
+          <a:p>
+            <a:pPr>
+              <a:defRPr sz="900" b="1">
+                <a:solidFill>
+                  <a:srgbClr val="0284C7"/>
+                </a:solidFill>
+                <a:latin typeface="Arial"/>
+              </a:defRPr>
+            </a:pPr>
+            <a:r>
+              <a:t>BLUESTOCK FINTECH • MUTUAL FUND ANALYTICS CAPSTONE</a:t>
+            </a:r>
+          </a:p>
+        </p:txBody>
+      </p:sp>
+      <p:sp>
+        <p:nvSpPr>
+          <p:cNvPr id="5" name="TextBox 4"/>
+          <p:cNvSpPr txBox="1"/>
+          <p:nvPr/>
+        </p:nvSpPr>
+        <p:spPr>
+          <a:xfrm>
+            <a:off x="731520" y="347472"/>
+            <a:ext cx="10515600" cy="548640"/>
+          </a:xfrm>
+          <a:prstGeom prst="rect">
+            <a:avLst/>
+          </a:prstGeom>
+          <a:noFill/>
+        </p:spPr>
+        <p:txBody>
+          <a:bodyPr wrap="square">
+            <a:spAutoFit/>
+          </a:bodyPr>
+          <a:lstStyle/>
+          <a:p>
+            <a:pPr>
+              <a:defRPr sz="2000" b="1">
+                <a:solidFill>
+                  <a:srgbClr val="FFFFFF"/>
+                </a:solidFill>
+                <a:latin typeface="Arial"/>
+              </a:defRPr>
+            </a:pPr>
+            <a:r>
+              <a:t>3. End-to-End System Architecture &amp; Star Schema Design</a:t>
+            </a:r>
+          </a:p>
+        </p:txBody>
+      </p:sp>
+      <p:sp>
+        <p:nvSpPr>
+          <p:cNvPr id="6" name="Rectangle 5"/>
           <p:cNvSpPr/>
           <p:nvPr/>
         </p:nvSpPr>
         <p:spPr>
           <a:xfrm>
-            <a:off x="8046720" y="1645920"/>
-            <a:ext cx="3383280" cy="4572000"/>
+            <a:off x="0" y="6492240"/>
+            <a:ext cx="12191695" cy="365760"/>
           </a:xfrm>
           <a:prstGeom prst="rect">
             <a:avLst/>
           </a:prstGeom>
           <a:solidFill>
-            <a:srgbClr val="F5F7FA"/>
+            <a:srgbClr val="F8FAFC"/>
           </a:solidFill>
-          <a:ln w="19050">
+          <a:ln>
             <a:solidFill>
-              <a:srgbClr val="3565A9"/>
+              <a:srgbClr val="E2E8F0"/>
             </a:solidFill>
           </a:ln>
         </p:spPr>
@@ -5150,78 +6026,713 @@
           </a:fontRef>
         </p:style>
         <p:txBody>
-          <a:bodyPr rtlCol="0" anchor="ctr" wrap="square" lIns="274320" rIns="274320" tIns="228600" bIns="228600"/>
-          <a:lstStyle/>
-          <a:p>
-            <a:pPr algn="ctr">
-              <a:defRPr sz="1800" b="1">
-                <a:solidFill>
-                  <a:srgbClr val="102C57"/>
-                </a:solidFill>
-              </a:defRPr>
-            </a:pPr>
-            <a:r>
-              <a:t>3. Analytics &amp; UI Layer</a:t>
-            </a:r>
-          </a:p>
-          <a:p>
-            <a:pPr>
-              <a:spcBef>
-                <a:spcPts val="600"/>
-              </a:spcBef>
-              <a:defRPr sz="1300">
-                <a:solidFill>
-                  <a:srgbClr val="212529"/>
-                </a:solidFill>
-              </a:defRPr>
-            </a:pPr>
-            <a:r>
-              <a:t>• Financial math engine: Sharpe, Sortino, Alpha, Beta, CAGR.</a:t>
-            </a:r>
-          </a:p>
-          <a:p>
-            <a:pPr>
-              <a:spcBef>
-                <a:spcPts val="600"/>
-              </a:spcBef>
-              <a:defRPr sz="1300">
-                <a:solidFill>
-                  <a:srgbClr val="212529"/>
-                </a:solidFill>
-              </a:defRPr>
-            </a:pPr>
-            <a:r>
-              <a:t>• Advanced metrics: Rolling 90-day Sharpe, Cornish-Fisher VaR, HHI sector concentration.</a:t>
-            </a:r>
-          </a:p>
-          <a:p>
-            <a:pPr>
-              <a:spcBef>
-                <a:spcPts val="600"/>
-              </a:spcBef>
-              <a:defRPr sz="1300">
-                <a:solidFill>
-                  <a:srgbClr val="212529"/>
-                </a:solidFill>
-              </a:defRPr>
-            </a:pPr>
-            <a:r>
-              <a:t>• Streamlit Web Dashboard with interactive Plotly visual charts.</a:t>
-            </a:r>
-          </a:p>
-          <a:p>
-            <a:pPr>
-              <a:spcBef>
-                <a:spcPts val="600"/>
-              </a:spcBef>
-              <a:defRPr sz="1300">
-                <a:solidFill>
-                  <a:srgbClr val="212529"/>
-                </a:solidFill>
-              </a:defRPr>
-            </a:pPr>
-            <a:r>
-              <a:t>• SQL query engine for high-speed dimensional filtering.</a:t>
+          <a:bodyPr rtlCol="0" anchor="ctr"/>
+          <a:lstStyle/>
+          <a:p>
+            <a:pPr algn="ctr"/>
+          </a:p>
+        </p:txBody>
+      </p:sp>
+      <p:sp>
+        <p:nvSpPr>
+          <p:cNvPr id="7" name="TextBox 6"/>
+          <p:cNvSpPr txBox="1"/>
+          <p:nvPr/>
+        </p:nvSpPr>
+        <p:spPr>
+          <a:xfrm>
+            <a:off x="731520" y="6537960"/>
+            <a:ext cx="10515600" cy="274320"/>
+          </a:xfrm>
+          <a:prstGeom prst="rect">
+            <a:avLst/>
+          </a:prstGeom>
+          <a:noFill/>
+        </p:spPr>
+        <p:txBody>
+          <a:bodyPr wrap="none">
+            <a:spAutoFit/>
+          </a:bodyPr>
+          <a:lstStyle/>
+          <a:p>
+            <a:pPr>
+              <a:defRPr sz="850">
+                <a:solidFill>
+                  <a:srgbClr val="64748B"/>
+                </a:solidFill>
+                <a:latin typeface="Arial"/>
+              </a:defRPr>
+            </a:pPr>
+            <a:r>
+              <a:t>Confidential • Bluestock Fintech Analytics • Group: 62FMBF • Author: Rajeev Reddy</a:t>
+            </a:r>
+          </a:p>
+        </p:txBody>
+      </p:sp>
+      <p:sp>
+        <p:nvSpPr>
+          <p:cNvPr id="8" name="Rounded Rectangle 7"/>
+          <p:cNvSpPr/>
+          <p:nvPr/>
+        </p:nvSpPr>
+        <p:spPr>
+          <a:xfrm>
+            <a:off x="731520" y="1280160"/>
+            <a:ext cx="2606040" cy="2194560"/>
+          </a:xfrm>
+          <a:prstGeom prst="roundRect">
+            <a:avLst/>
+          </a:prstGeom>
+          <a:solidFill>
+            <a:srgbClr val="F8FAFC"/>
+          </a:solidFill>
+          <a:ln w="12700">
+            <a:solidFill>
+              <a:srgbClr val="E2E8F0"/>
+            </a:solidFill>
+          </a:ln>
+        </p:spPr>
+        <p:style>
+          <a:lnRef idx="1">
+            <a:schemeClr val="accent1"/>
+          </a:lnRef>
+          <a:fillRef idx="3">
+            <a:schemeClr val="accent1"/>
+          </a:fillRef>
+          <a:effectRef idx="2">
+            <a:schemeClr val="accent1"/>
+          </a:effectRef>
+          <a:fontRef idx="minor">
+            <a:schemeClr val="lt1"/>
+          </a:fontRef>
+        </p:style>
+        <p:txBody>
+          <a:bodyPr rtlCol="0" anchor="ctr"/>
+          <a:lstStyle/>
+          <a:p>
+            <a:pPr algn="ctr"/>
+          </a:p>
+        </p:txBody>
+      </p:sp>
+      <p:sp>
+        <p:nvSpPr>
+          <p:cNvPr id="9" name="TextBox 8"/>
+          <p:cNvSpPr txBox="1"/>
+          <p:nvPr/>
+        </p:nvSpPr>
+        <p:spPr>
+          <a:xfrm>
+            <a:off x="914400" y="1417319"/>
+            <a:ext cx="2240280" cy="411480"/>
+          </a:xfrm>
+          <a:prstGeom prst="rect">
+            <a:avLst/>
+          </a:prstGeom>
+          <a:noFill/>
+        </p:spPr>
+        <p:txBody>
+          <a:bodyPr wrap="square">
+            <a:spAutoFit/>
+          </a:bodyPr>
+          <a:lstStyle/>
+          <a:p>
+            <a:pPr>
+              <a:defRPr sz="1300" b="1">
+                <a:solidFill>
+                  <a:srgbClr val="1A365D"/>
+                </a:solidFill>
+                <a:latin typeface="Arial"/>
+              </a:defRPr>
+            </a:pPr>
+            <a:r>
+              <a:t>Layer 1: Ingestion</a:t>
+            </a:r>
+          </a:p>
+        </p:txBody>
+      </p:sp>
+      <p:sp>
+        <p:nvSpPr>
+          <p:cNvPr id="10" name="TextBox 9"/>
+          <p:cNvSpPr txBox="1"/>
+          <p:nvPr/>
+        </p:nvSpPr>
+        <p:spPr>
+          <a:xfrm>
+            <a:off x="868680" y="1828800"/>
+            <a:ext cx="2331720" cy="1463040"/>
+          </a:xfrm>
+          <a:prstGeom prst="rect">
+            <a:avLst/>
+          </a:prstGeom>
+          <a:noFill/>
+        </p:spPr>
+        <p:txBody>
+          <a:bodyPr wrap="square">
+            <a:spAutoFit/>
+          </a:bodyPr>
+          <a:lstStyle/>
+          <a:p>
+            <a:pPr>
+              <a:defRPr sz="1000">
+                <a:solidFill>
+                  <a:srgbClr val="1E293B"/>
+                </a:solidFill>
+                <a:latin typeface="Arial"/>
+              </a:defRPr>
+            </a:pPr>
+            <a:r>
+              <a:t>Raw AMFI CSVs + mfapi.in REST API.</a:t>
+            </a:r>
+            <a:br/>
+            <a:r>
+              <a:t>Validates schemas, handles nulls, logs file audit.</a:t>
+            </a:r>
+          </a:p>
+        </p:txBody>
+      </p:sp>
+      <p:sp>
+        <p:nvSpPr>
+          <p:cNvPr id="11" name="Rounded Rectangle 10"/>
+          <p:cNvSpPr/>
+          <p:nvPr/>
+        </p:nvSpPr>
+        <p:spPr>
+          <a:xfrm>
+            <a:off x="3429000" y="1280160"/>
+            <a:ext cx="2606040" cy="2194560"/>
+          </a:xfrm>
+          <a:prstGeom prst="roundRect">
+            <a:avLst/>
+          </a:prstGeom>
+          <a:solidFill>
+            <a:srgbClr val="F8FAFC"/>
+          </a:solidFill>
+          <a:ln w="12700">
+            <a:solidFill>
+              <a:srgbClr val="E2E8F0"/>
+            </a:solidFill>
+          </a:ln>
+        </p:spPr>
+        <p:style>
+          <a:lnRef idx="1">
+            <a:schemeClr val="accent1"/>
+          </a:lnRef>
+          <a:fillRef idx="3">
+            <a:schemeClr val="accent1"/>
+          </a:fillRef>
+          <a:effectRef idx="2">
+            <a:schemeClr val="accent1"/>
+          </a:effectRef>
+          <a:fontRef idx="minor">
+            <a:schemeClr val="lt1"/>
+          </a:fontRef>
+        </p:style>
+        <p:txBody>
+          <a:bodyPr rtlCol="0" anchor="ctr"/>
+          <a:lstStyle/>
+          <a:p>
+            <a:pPr algn="ctr"/>
+          </a:p>
+        </p:txBody>
+      </p:sp>
+      <p:sp>
+        <p:nvSpPr>
+          <p:cNvPr id="12" name="TextBox 11"/>
+          <p:cNvSpPr txBox="1"/>
+          <p:nvPr/>
+        </p:nvSpPr>
+        <p:spPr>
+          <a:xfrm>
+            <a:off x="3611880" y="1417319"/>
+            <a:ext cx="2240280" cy="411480"/>
+          </a:xfrm>
+          <a:prstGeom prst="rect">
+            <a:avLst/>
+          </a:prstGeom>
+          <a:noFill/>
+        </p:spPr>
+        <p:txBody>
+          <a:bodyPr wrap="square">
+            <a:spAutoFit/>
+          </a:bodyPr>
+          <a:lstStyle/>
+          <a:p>
+            <a:pPr>
+              <a:defRPr sz="1300" b="1">
+                <a:solidFill>
+                  <a:srgbClr val="1A365D"/>
+                </a:solidFill>
+                <a:latin typeface="Arial"/>
+              </a:defRPr>
+            </a:pPr>
+            <a:r>
+              <a:t>Layer 2: Storage</a:t>
+            </a:r>
+          </a:p>
+        </p:txBody>
+      </p:sp>
+      <p:sp>
+        <p:nvSpPr>
+          <p:cNvPr id="13" name="TextBox 12"/>
+          <p:cNvSpPr txBox="1"/>
+          <p:nvPr/>
+        </p:nvSpPr>
+        <p:spPr>
+          <a:xfrm>
+            <a:off x="3566160" y="1828800"/>
+            <a:ext cx="2331720" cy="1463040"/>
+          </a:xfrm>
+          <a:prstGeom prst="rect">
+            <a:avLst/>
+          </a:prstGeom>
+          <a:noFill/>
+        </p:spPr>
+        <p:txBody>
+          <a:bodyPr wrap="square">
+            <a:spAutoFit/>
+          </a:bodyPr>
+          <a:lstStyle/>
+          <a:p>
+            <a:pPr>
+              <a:defRPr sz="1000">
+                <a:solidFill>
+                  <a:srgbClr val="1E293B"/>
+                </a:solidFill>
+                <a:latin typeface="Arial"/>
+              </a:defRPr>
+            </a:pPr>
+            <a:r>
+              <a:t>bluestock_mf.db Star Schema.</a:t>
+            </a:r>
+            <a:br/>
+            <a:r>
+              <a:t>8 normalized tables with foreign keys and index optimization.</a:t>
+            </a:r>
+          </a:p>
+        </p:txBody>
+      </p:sp>
+      <p:sp>
+        <p:nvSpPr>
+          <p:cNvPr id="14" name="Rounded Rectangle 13"/>
+          <p:cNvSpPr/>
+          <p:nvPr/>
+        </p:nvSpPr>
+        <p:spPr>
+          <a:xfrm>
+            <a:off x="6126480" y="1280160"/>
+            <a:ext cx="2606040" cy="2194560"/>
+          </a:xfrm>
+          <a:prstGeom prst="roundRect">
+            <a:avLst/>
+          </a:prstGeom>
+          <a:solidFill>
+            <a:srgbClr val="F8FAFC"/>
+          </a:solidFill>
+          <a:ln w="12700">
+            <a:solidFill>
+              <a:srgbClr val="E2E8F0"/>
+            </a:solidFill>
+          </a:ln>
+        </p:spPr>
+        <p:style>
+          <a:lnRef idx="1">
+            <a:schemeClr val="accent1"/>
+          </a:lnRef>
+          <a:fillRef idx="3">
+            <a:schemeClr val="accent1"/>
+          </a:fillRef>
+          <a:effectRef idx="2">
+            <a:schemeClr val="accent1"/>
+          </a:effectRef>
+          <a:fontRef idx="minor">
+            <a:schemeClr val="lt1"/>
+          </a:fontRef>
+        </p:style>
+        <p:txBody>
+          <a:bodyPr rtlCol="0" anchor="ctr"/>
+          <a:lstStyle/>
+          <a:p>
+            <a:pPr algn="ctr"/>
+          </a:p>
+        </p:txBody>
+      </p:sp>
+      <p:sp>
+        <p:nvSpPr>
+          <p:cNvPr id="15" name="TextBox 14"/>
+          <p:cNvSpPr txBox="1"/>
+          <p:nvPr/>
+        </p:nvSpPr>
+        <p:spPr>
+          <a:xfrm>
+            <a:off x="6309360" y="1417319"/>
+            <a:ext cx="2240280" cy="411480"/>
+          </a:xfrm>
+          <a:prstGeom prst="rect">
+            <a:avLst/>
+          </a:prstGeom>
+          <a:noFill/>
+        </p:spPr>
+        <p:txBody>
+          <a:bodyPr wrap="square">
+            <a:spAutoFit/>
+          </a:bodyPr>
+          <a:lstStyle/>
+          <a:p>
+            <a:pPr>
+              <a:defRPr sz="1300" b="1">
+                <a:solidFill>
+                  <a:srgbClr val="1A365D"/>
+                </a:solidFill>
+                <a:latin typeface="Arial"/>
+              </a:defRPr>
+            </a:pPr>
+            <a:r>
+              <a:t>Layer 3: Analytics</a:t>
+            </a:r>
+          </a:p>
+        </p:txBody>
+      </p:sp>
+      <p:sp>
+        <p:nvSpPr>
+          <p:cNvPr id="16" name="TextBox 15"/>
+          <p:cNvSpPr txBox="1"/>
+          <p:nvPr/>
+        </p:nvSpPr>
+        <p:spPr>
+          <a:xfrm>
+            <a:off x="6263640" y="1828800"/>
+            <a:ext cx="2331720" cy="1463040"/>
+          </a:xfrm>
+          <a:prstGeom prst="rect">
+            <a:avLst/>
+          </a:prstGeom>
+          <a:noFill/>
+        </p:spPr>
+        <p:txBody>
+          <a:bodyPr wrap="square">
+            <a:spAutoFit/>
+          </a:bodyPr>
+          <a:lstStyle/>
+          <a:p>
+            <a:pPr>
+              <a:defRPr sz="1000">
+                <a:solidFill>
+                  <a:srgbClr val="1E293B"/>
+                </a:solidFill>
+                <a:latin typeface="Arial"/>
+              </a:defRPr>
+            </a:pPr>
+            <a:r>
+              <a:t>Quantitative Risk Engine.</a:t>
+            </a:r>
+            <a:br/>
+            <a:r>
+              <a:t>CAGR, Alpha/Beta, Sharpe, Sortino, VaR/CVaR, HHI, Scorecard.</a:t>
+            </a:r>
+          </a:p>
+        </p:txBody>
+      </p:sp>
+      <p:sp>
+        <p:nvSpPr>
+          <p:cNvPr id="17" name="Rounded Rectangle 16"/>
+          <p:cNvSpPr/>
+          <p:nvPr/>
+        </p:nvSpPr>
+        <p:spPr>
+          <a:xfrm>
+            <a:off x="8823960" y="1280160"/>
+            <a:ext cx="2606040" cy="2194560"/>
+          </a:xfrm>
+          <a:prstGeom prst="roundRect">
+            <a:avLst/>
+          </a:prstGeom>
+          <a:solidFill>
+            <a:srgbClr val="F8FAFC"/>
+          </a:solidFill>
+          <a:ln w="12700">
+            <a:solidFill>
+              <a:srgbClr val="E2E8F0"/>
+            </a:solidFill>
+          </a:ln>
+        </p:spPr>
+        <p:style>
+          <a:lnRef idx="1">
+            <a:schemeClr val="accent1"/>
+          </a:lnRef>
+          <a:fillRef idx="3">
+            <a:schemeClr val="accent1"/>
+          </a:fillRef>
+          <a:effectRef idx="2">
+            <a:schemeClr val="accent1"/>
+          </a:effectRef>
+          <a:fontRef idx="minor">
+            <a:schemeClr val="lt1"/>
+          </a:fontRef>
+        </p:style>
+        <p:txBody>
+          <a:bodyPr rtlCol="0" anchor="ctr"/>
+          <a:lstStyle/>
+          <a:p>
+            <a:pPr algn="ctr"/>
+          </a:p>
+        </p:txBody>
+      </p:sp>
+      <p:sp>
+        <p:nvSpPr>
+          <p:cNvPr id="18" name="TextBox 17"/>
+          <p:cNvSpPr txBox="1"/>
+          <p:nvPr/>
+        </p:nvSpPr>
+        <p:spPr>
+          <a:xfrm>
+            <a:off x="9006840" y="1417319"/>
+            <a:ext cx="2240280" cy="411480"/>
+          </a:xfrm>
+          <a:prstGeom prst="rect">
+            <a:avLst/>
+          </a:prstGeom>
+          <a:noFill/>
+        </p:spPr>
+        <p:txBody>
+          <a:bodyPr wrap="square">
+            <a:spAutoFit/>
+          </a:bodyPr>
+          <a:lstStyle/>
+          <a:p>
+            <a:pPr>
+              <a:defRPr sz="1300" b="1">
+                <a:solidFill>
+                  <a:srgbClr val="1A365D"/>
+                </a:solidFill>
+                <a:latin typeface="Arial"/>
+              </a:defRPr>
+            </a:pPr>
+            <a:r>
+              <a:t>Layer 4: Delivery</a:t>
+            </a:r>
+          </a:p>
+        </p:txBody>
+      </p:sp>
+      <p:sp>
+        <p:nvSpPr>
+          <p:cNvPr id="19" name="TextBox 18"/>
+          <p:cNvSpPr txBox="1"/>
+          <p:nvPr/>
+        </p:nvSpPr>
+        <p:spPr>
+          <a:xfrm>
+            <a:off x="8961120" y="1828800"/>
+            <a:ext cx="2331720" cy="1463040"/>
+          </a:xfrm>
+          <a:prstGeom prst="rect">
+            <a:avLst/>
+          </a:prstGeom>
+          <a:noFill/>
+        </p:spPr>
+        <p:txBody>
+          <a:bodyPr wrap="square">
+            <a:spAutoFit/>
+          </a:bodyPr>
+          <a:lstStyle/>
+          <a:p>
+            <a:pPr>
+              <a:defRPr sz="1000">
+                <a:solidFill>
+                  <a:srgbClr val="1E293B"/>
+                </a:solidFill>
+                <a:latin typeface="Arial"/>
+              </a:defRPr>
+            </a:pPr>
+            <a:r>
+              <a:t>Interactive Streamlit App + Power BI.</a:t>
+            </a:r>
+            <a:br/>
+            <a:r>
+              <a:t>4 executive screens, PDF tearsheets, automated recommendations.</a:t>
+            </a:r>
+          </a:p>
+        </p:txBody>
+      </p:sp>
+      <p:sp>
+        <p:nvSpPr>
+          <p:cNvPr id="20" name="Rounded Rectangle 19"/>
+          <p:cNvSpPr/>
+          <p:nvPr/>
+        </p:nvSpPr>
+        <p:spPr>
+          <a:xfrm>
+            <a:off x="731520" y="3657600"/>
+            <a:ext cx="10698480" cy="2560320"/>
+          </a:xfrm>
+          <a:prstGeom prst="roundRect">
+            <a:avLst/>
+          </a:prstGeom>
+          <a:solidFill>
+            <a:srgbClr val="FFFFFF"/>
+          </a:solidFill>
+          <a:ln w="12700">
+            <a:solidFill>
+              <a:srgbClr val="E2E8F0"/>
+            </a:solidFill>
+          </a:ln>
+        </p:spPr>
+        <p:style>
+          <a:lnRef idx="1">
+            <a:schemeClr val="accent1"/>
+          </a:lnRef>
+          <a:fillRef idx="3">
+            <a:schemeClr val="accent1"/>
+          </a:fillRef>
+          <a:effectRef idx="2">
+            <a:schemeClr val="accent1"/>
+          </a:effectRef>
+          <a:fontRef idx="minor">
+            <a:schemeClr val="lt1"/>
+          </a:fontRef>
+        </p:style>
+        <p:txBody>
+          <a:bodyPr rtlCol="0" anchor="ctr"/>
+          <a:lstStyle/>
+          <a:p>
+            <a:pPr algn="ctr"/>
+          </a:p>
+        </p:txBody>
+      </p:sp>
+      <p:sp>
+        <p:nvSpPr>
+          <p:cNvPr id="21" name="TextBox 20"/>
+          <p:cNvSpPr txBox="1"/>
+          <p:nvPr/>
+        </p:nvSpPr>
+        <p:spPr>
+          <a:xfrm>
+            <a:off x="914400" y="3794760"/>
+            <a:ext cx="10332719" cy="411480"/>
+          </a:xfrm>
+          <a:prstGeom prst="rect">
+            <a:avLst/>
+          </a:prstGeom>
+          <a:noFill/>
+        </p:spPr>
+        <p:txBody>
+          <a:bodyPr wrap="square">
+            <a:spAutoFit/>
+          </a:bodyPr>
+          <a:lstStyle/>
+          <a:p>
+            <a:pPr>
+              <a:defRPr sz="1300" b="1">
+                <a:solidFill>
+                  <a:srgbClr val="1A365D"/>
+                </a:solidFill>
+                <a:latin typeface="Arial"/>
+              </a:defRPr>
+            </a:pPr>
+            <a:r>
+              <a:t>Database Star Schema Specification (bluestock_mf.db)</a:t>
+            </a:r>
+          </a:p>
+        </p:txBody>
+      </p:sp>
+      <p:sp>
+        <p:nvSpPr>
+          <p:cNvPr id="22" name="TextBox 21"/>
+          <p:cNvSpPr txBox="1"/>
+          <p:nvPr/>
+        </p:nvSpPr>
+        <p:spPr>
+          <a:xfrm>
+            <a:off x="914400" y="4160520"/>
+            <a:ext cx="10332720" cy="1920240"/>
+          </a:xfrm>
+          <a:prstGeom prst="rect">
+            <a:avLst/>
+          </a:prstGeom>
+          <a:noFill/>
+        </p:spPr>
+        <p:txBody>
+          <a:bodyPr wrap="square">
+            <a:spAutoFit/>
+          </a:bodyPr>
+          <a:lstStyle/>
+          <a:p>
+            <a:pPr>
+              <a:spcAft>
+                <a:spcPts val="400"/>
+              </a:spcAft>
+              <a:defRPr sz="1050">
+                <a:solidFill>
+                  <a:srgbClr val="1E293B"/>
+                </a:solidFill>
+                <a:latin typeface="Arial"/>
+              </a:defRPr>
+            </a:pPr>
+            <a:r>
+              <a:t>&lt;b&gt;dim_fund:&lt;/b&gt; 40 rows | amfi_code (PK), fund_house, scheme_name, category, sub_category, plan_type, expense_ratio</a:t>
+            </a:r>
+          </a:p>
+          <a:p>
+            <a:pPr>
+              <a:spcAft>
+                <a:spcPts val="400"/>
+              </a:spcAft>
+              <a:defRPr sz="1050">
+                <a:solidFill>
+                  <a:srgbClr val="1E293B"/>
+                </a:solidFill>
+                <a:latin typeface="Arial"/>
+              </a:defRPr>
+            </a:pPr>
+            <a:r>
+              <a:t>&lt;b&gt;fact_nav_history:&lt;/b&gt; 46,000 rows | nav_id (PK), amfi_code (FK), date, nav, daily_return_pct</a:t>
+            </a:r>
+          </a:p>
+          <a:p>
+            <a:pPr>
+              <a:spcAft>
+                <a:spcPts val="400"/>
+              </a:spcAft>
+              <a:defRPr sz="1050">
+                <a:solidFill>
+                  <a:srgbClr val="1E293B"/>
+                </a:solidFill>
+                <a:latin typeface="Arial"/>
+              </a:defRPr>
+            </a:pPr>
+            <a:r>
+              <a:t>&lt;b&gt;fact_transactions:&lt;/b&gt; 32,778 rows | txn_id (PK), amfi_code (FK), investor_id, txn_date, txn_type, amount_inr, city_tier, state</a:t>
+            </a:r>
+          </a:p>
+          <a:p>
+            <a:pPr>
+              <a:spcAft>
+                <a:spcPts val="400"/>
+              </a:spcAft>
+              <a:defRPr sz="1050">
+                <a:solidFill>
+                  <a:srgbClr val="1E293B"/>
+                </a:solidFill>
+                <a:latin typeface="Arial"/>
+              </a:defRPr>
+            </a:pPr>
+            <a:r>
+              <a:t>&lt;b&gt;fact_fund_scorecard:&lt;/b&gt; 40 rows | amfi_code (PK), cagr_3yr, sharpe, sortino, alpha, beta, max_drawdown, composite_score</a:t>
+            </a:r>
+          </a:p>
+          <a:p>
+            <a:pPr>
+              <a:spcAft>
+                <a:spcPts val="400"/>
+              </a:spcAft>
+              <a:defRPr sz="1050">
+                <a:solidFill>
+                  <a:srgbClr val="1E293B"/>
+                </a:solidFill>
+                <a:latin typeface="Arial"/>
+              </a:defRPr>
+            </a:pPr>
+            <a:r>
+              <a:t>&lt;b&gt;dim_benchmark:&lt;/b&gt; 1,250 rows | date (PK), nifty50_close, nifty100_close, daily_return_nifty100</a:t>
             </a:r>
           </a:p>
         </p:txBody>
@@ -5246,75 +6757,23 @@
       <p:grpSpPr/>
       <p:sp>
         <p:nvSpPr>
-          <p:cNvPr id="2" name="TextBox 1"/>
-          <p:cNvSpPr txBox="1"/>
-          <p:nvPr/>
-        </p:nvSpPr>
-        <p:spPr>
-          <a:xfrm>
-            <a:off x="731520" y="457200"/>
-            <a:ext cx="10698480" cy="1097280"/>
-          </a:xfrm>
-          <a:prstGeom prst="rect">
-            <a:avLst/>
-          </a:prstGeom>
-          <a:noFill/>
-        </p:spPr>
-        <p:txBody>
-          <a:bodyPr wrap="square" lIns="0" tIns="0" rIns="0" bIns="0">
-            <a:spAutoFit/>
-          </a:bodyPr>
-          <a:lstStyle/>
-          <a:p>
-            <a:pPr>
-              <a:defRPr sz="2800" b="1">
-                <a:solidFill>
-                  <a:srgbClr val="102C57"/>
-                </a:solidFill>
-              </a:defRPr>
-            </a:pPr>
-            <a:r>
-              <a:t>Day 1 Ingestion &amp; Live API Verification</a:t>
-            </a:r>
-          </a:p>
-          <a:p>
-            <a:pPr>
-              <a:spcBef>
-                <a:spcPts val="400"/>
-              </a:spcBef>
-              <a:defRPr sz="1400">
-                <a:solidFill>
-                  <a:srgbClr val="6C757D"/>
-                </a:solidFill>
-              </a:defRPr>
-            </a:pPr>
-            <a:r>
-              <a:t>Detailed execution summary of Day 1 milestones</a:t>
-            </a:r>
-          </a:p>
-        </p:txBody>
-      </p:sp>
-      <p:sp>
-        <p:nvSpPr>
-          <p:cNvPr id="3" name="Rectangle 2"/>
+          <p:cNvPr id="2" name="Rectangle 1"/>
           <p:cNvSpPr/>
           <p:nvPr/>
         </p:nvSpPr>
         <p:spPr>
           <a:xfrm>
-            <a:off x="731520" y="1645920"/>
-            <a:ext cx="5120640" cy="4572000"/>
+            <a:off x="0" y="0"/>
+            <a:ext cx="12191695" cy="1005840"/>
           </a:xfrm>
           <a:prstGeom prst="rect">
             <a:avLst/>
           </a:prstGeom>
           <a:solidFill>
-            <a:srgbClr val="F5F7FA"/>
+            <a:srgbClr val="0F2537"/>
           </a:solidFill>
-          <a:ln w="19050">
-            <a:solidFill>
-              <a:srgbClr val="3565A9"/>
-            </a:solidFill>
+          <a:ln>
+            <a:noFill/>
           </a:ln>
         </p:spPr>
         <p:style>
@@ -5332,103 +6791,32 @@
           </a:fontRef>
         </p:style>
         <p:txBody>
-          <a:bodyPr rtlCol="0" anchor="ctr" wrap="square" lIns="274320" rIns="274320" tIns="228600" bIns="228600"/>
-          <a:lstStyle/>
-          <a:p>
-            <a:pPr algn="ctr">
-              <a:defRPr sz="1800" b="1">
-                <a:solidFill>
-                  <a:srgbClr val="102C57"/>
-                </a:solidFill>
-              </a:defRPr>
-            </a:pPr>
-            <a:r>
-              <a:t>Automated Dataset Ingestion</a:t>
-            </a:r>
-          </a:p>
-          <a:p>
-            <a:pPr>
-              <a:spcBef>
-                <a:spcPts val="600"/>
-              </a:spcBef>
-              <a:defRPr sz="1300">
-                <a:solidFill>
-                  <a:srgbClr val="212529"/>
-                </a:solidFill>
-              </a:defRPr>
-            </a:pPr>
-            <a:r>
-              <a:t>• Loaded all 10 AMFI datasets (40 schemes, 46,000 NAV records, 32,778 transactions).</a:t>
-            </a:r>
-          </a:p>
-          <a:p>
-            <a:pPr>
-              <a:spcBef>
-                <a:spcPts val="600"/>
-              </a:spcBef>
-              <a:defRPr sz="1300">
-                <a:solidFill>
-                  <a:srgbClr val="212529"/>
-                </a:solidFill>
-              </a:defRPr>
-            </a:pPr>
-            <a:r>
-              <a:t>• Programmatic verification of .shape, .dtypes, and .head().</a:t>
-            </a:r>
-          </a:p>
-          <a:p>
-            <a:pPr>
-              <a:spcBef>
-                <a:spcPts val="600"/>
-              </a:spcBef>
-              <a:defRPr sz="1300">
-                <a:solidFill>
-                  <a:srgbClr val="212529"/>
-                </a:solidFill>
-              </a:defRPr>
-            </a:pPr>
-            <a:r>
-              <a:t>• Identified and logged 12 expected YoY lookback nulls in 04_monthly_sip_inflows.</a:t>
-            </a:r>
-          </a:p>
-          <a:p>
-            <a:pPr>
-              <a:spcBef>
-                <a:spcPts val="600"/>
-              </a:spcBef>
-              <a:defRPr sz="1300">
-                <a:solidFill>
-                  <a:srgbClr val="212529"/>
-                </a:solidFill>
-              </a:defRPr>
-            </a:pPr>
-            <a:r>
-              <a:t>• Zero duplicate rows and zero negative NAV records detected.</a:t>
-            </a:r>
-          </a:p>
-        </p:txBody>
-      </p:sp>
-      <p:sp>
-        <p:nvSpPr>
-          <p:cNvPr id="4" name="Rectangle 3"/>
+          <a:bodyPr rtlCol="0" anchor="ctr"/>
+          <a:lstStyle/>
+          <a:p>
+            <a:pPr algn="ctr"/>
+          </a:p>
+        </p:txBody>
+      </p:sp>
+      <p:sp>
+        <p:nvSpPr>
+          <p:cNvPr id="3" name="Rectangle 2"/>
           <p:cNvSpPr/>
           <p:nvPr/>
         </p:nvSpPr>
         <p:spPr>
           <a:xfrm>
-            <a:off x="6217920" y="1645920"/>
-            <a:ext cx="5120640" cy="4572000"/>
+            <a:off x="0" y="1005840"/>
+            <a:ext cx="12191695" cy="54864"/>
           </a:xfrm>
           <a:prstGeom prst="rect">
             <a:avLst/>
           </a:prstGeom>
           <a:solidFill>
-            <a:srgbClr val="F5F7FA"/>
+            <a:srgbClr val="0284C7"/>
           </a:solidFill>
-          <a:ln w="19050">
-            <a:solidFill>
-              <a:srgbClr val="3565A9"/>
-            </a:solidFill>
+          <a:ln>
+            <a:noFill/>
           </a:ln>
         </p:spPr>
         <p:style>
@@ -5446,123 +6834,435 @@
           </a:fontRef>
         </p:style>
         <p:txBody>
-          <a:bodyPr rtlCol="0" anchor="ctr" wrap="square" lIns="274320" rIns="274320" tIns="228600" bIns="228600"/>
-          <a:lstStyle/>
-          <a:p>
-            <a:pPr algn="ctr">
-              <a:defRPr sz="1800" b="1">
-                <a:solidFill>
-                  <a:srgbClr val="102C57"/>
-                </a:solidFill>
-              </a:defRPr>
-            </a:pPr>
-            <a:r>
-              <a:t>Live REST API Ingestion (mfapi.in)</a:t>
-            </a:r>
-          </a:p>
-          <a:p>
-            <a:pPr>
-              <a:spcBef>
-                <a:spcPts val="600"/>
-              </a:spcBef>
-              <a:defRPr sz="1300">
-                <a:solidFill>
-                  <a:srgbClr val="212529"/>
-                </a:solidFill>
-              </a:defRPr>
-            </a:pPr>
-            <a:r>
-              <a:t>• Anchor Scheme: HDFC Top 100 Direct (AMFI 125497) -&gt; 3,161 records ingested.</a:t>
-            </a:r>
-          </a:p>
-          <a:p>
-            <a:pPr>
-              <a:spcBef>
-                <a:spcPts val="600"/>
-              </a:spcBef>
-              <a:defRPr sz="1300">
-                <a:solidFill>
-                  <a:srgbClr val="212529"/>
-                </a:solidFill>
-              </a:defRPr>
-            </a:pPr>
-            <a:r>
-              <a:t>• SBI Bluechip (119551) -&gt; 3,305 records fetched.</a:t>
-            </a:r>
-          </a:p>
-          <a:p>
-            <a:pPr>
-              <a:spcBef>
-                <a:spcPts val="600"/>
-              </a:spcBef>
-              <a:defRPr sz="1300">
-                <a:solidFill>
-                  <a:srgbClr val="212529"/>
-                </a:solidFill>
-              </a:defRPr>
-            </a:pPr>
-            <a:r>
-              <a:t>• ICICI Bluechip (120503) -&gt; 3,377 records fetched.</a:t>
-            </a:r>
-          </a:p>
-          <a:p>
-            <a:pPr>
-              <a:spcBef>
-                <a:spcPts val="600"/>
-              </a:spcBef>
-              <a:defRPr sz="1300">
-                <a:solidFill>
-                  <a:srgbClr val="212529"/>
-                </a:solidFill>
-              </a:defRPr>
-            </a:pPr>
-            <a:r>
-              <a:t>• Nippon Large Cap (118632) -&gt; 3,368 records fetched.</a:t>
-            </a:r>
-          </a:p>
-          <a:p>
-            <a:pPr>
-              <a:spcBef>
-                <a:spcPts val="600"/>
-              </a:spcBef>
-              <a:defRPr sz="1300">
-                <a:solidFill>
-                  <a:srgbClr val="212529"/>
-                </a:solidFill>
-              </a:defRPr>
-            </a:pPr>
-            <a:r>
-              <a:t>• Axis Bluechip (119092) -&gt; 3,634 records fetched.</a:t>
-            </a:r>
-          </a:p>
-          <a:p>
-            <a:pPr>
-              <a:spcBef>
-                <a:spcPts val="600"/>
-              </a:spcBef>
-              <a:defRPr sz="1300">
-                <a:solidFill>
-                  <a:srgbClr val="212529"/>
-                </a:solidFill>
-              </a:defRPr>
-            </a:pPr>
-            <a:r>
-              <a:t>• Kotak Bluechip (120841) -&gt; 3,371 records fetched.</a:t>
-            </a:r>
-          </a:p>
-          <a:p>
-            <a:pPr>
-              <a:spcBef>
-                <a:spcPts val="600"/>
-              </a:spcBef>
-              <a:defRPr sz="1300">
-                <a:solidFill>
-                  <a:srgbClr val="212529"/>
-                </a:solidFill>
-              </a:defRPr>
-            </a:pPr>
-            <a:r>
-              <a:t>• Persisted as clean CSVs in data/raw/ directory.</a:t>
+          <a:bodyPr rtlCol="0" anchor="ctr"/>
+          <a:lstStyle/>
+          <a:p>
+            <a:pPr algn="ctr"/>
+          </a:p>
+        </p:txBody>
+      </p:sp>
+      <p:sp>
+        <p:nvSpPr>
+          <p:cNvPr id="4" name="TextBox 3"/>
+          <p:cNvSpPr txBox="1"/>
+          <p:nvPr/>
+        </p:nvSpPr>
+        <p:spPr>
+          <a:xfrm>
+            <a:off x="731520" y="109728"/>
+            <a:ext cx="10515600" cy="274320"/>
+          </a:xfrm>
+          <a:prstGeom prst="rect">
+            <a:avLst/>
+          </a:prstGeom>
+          <a:noFill/>
+        </p:spPr>
+        <p:txBody>
+          <a:bodyPr wrap="square">
+            <a:spAutoFit/>
+          </a:bodyPr>
+          <a:lstStyle/>
+          <a:p>
+            <a:pPr>
+              <a:defRPr sz="900" b="1">
+                <a:solidFill>
+                  <a:srgbClr val="0284C7"/>
+                </a:solidFill>
+                <a:latin typeface="Arial"/>
+              </a:defRPr>
+            </a:pPr>
+            <a:r>
+              <a:t>BLUESTOCK FINTECH • MUTUAL FUND ANALYTICS CAPSTONE</a:t>
+            </a:r>
+          </a:p>
+        </p:txBody>
+      </p:sp>
+      <p:sp>
+        <p:nvSpPr>
+          <p:cNvPr id="5" name="TextBox 4"/>
+          <p:cNvSpPr txBox="1"/>
+          <p:nvPr/>
+        </p:nvSpPr>
+        <p:spPr>
+          <a:xfrm>
+            <a:off x="731520" y="347472"/>
+            <a:ext cx="10515600" cy="548640"/>
+          </a:xfrm>
+          <a:prstGeom prst="rect">
+            <a:avLst/>
+          </a:prstGeom>
+          <a:noFill/>
+        </p:spPr>
+        <p:txBody>
+          <a:bodyPr wrap="square">
+            <a:spAutoFit/>
+          </a:bodyPr>
+          <a:lstStyle/>
+          <a:p>
+            <a:pPr>
+              <a:defRPr sz="2000" b="1">
+                <a:solidFill>
+                  <a:srgbClr val="FFFFFF"/>
+                </a:solidFill>
+                <a:latin typeface="Arial"/>
+              </a:defRPr>
+            </a:pPr>
+            <a:r>
+              <a:t>4. Exploratory Data Analysis (Part 1): Industry Macro Trends</a:t>
+            </a:r>
+          </a:p>
+        </p:txBody>
+      </p:sp>
+      <p:sp>
+        <p:nvSpPr>
+          <p:cNvPr id="6" name="Rectangle 5"/>
+          <p:cNvSpPr/>
+          <p:nvPr/>
+        </p:nvSpPr>
+        <p:spPr>
+          <a:xfrm>
+            <a:off x="0" y="6492240"/>
+            <a:ext cx="12191695" cy="365760"/>
+          </a:xfrm>
+          <a:prstGeom prst="rect">
+            <a:avLst/>
+          </a:prstGeom>
+          <a:solidFill>
+            <a:srgbClr val="F8FAFC"/>
+          </a:solidFill>
+          <a:ln>
+            <a:solidFill>
+              <a:srgbClr val="E2E8F0"/>
+            </a:solidFill>
+          </a:ln>
+        </p:spPr>
+        <p:style>
+          <a:lnRef idx="1">
+            <a:schemeClr val="accent1"/>
+          </a:lnRef>
+          <a:fillRef idx="3">
+            <a:schemeClr val="accent1"/>
+          </a:fillRef>
+          <a:effectRef idx="2">
+            <a:schemeClr val="accent1"/>
+          </a:effectRef>
+          <a:fontRef idx="minor">
+            <a:schemeClr val="lt1"/>
+          </a:fontRef>
+        </p:style>
+        <p:txBody>
+          <a:bodyPr rtlCol="0" anchor="ctr"/>
+          <a:lstStyle/>
+          <a:p>
+            <a:pPr algn="ctr"/>
+          </a:p>
+        </p:txBody>
+      </p:sp>
+      <p:sp>
+        <p:nvSpPr>
+          <p:cNvPr id="7" name="TextBox 6"/>
+          <p:cNvSpPr txBox="1"/>
+          <p:nvPr/>
+        </p:nvSpPr>
+        <p:spPr>
+          <a:xfrm>
+            <a:off x="731520" y="6537960"/>
+            <a:ext cx="10515600" cy="274320"/>
+          </a:xfrm>
+          <a:prstGeom prst="rect">
+            <a:avLst/>
+          </a:prstGeom>
+          <a:noFill/>
+        </p:spPr>
+        <p:txBody>
+          <a:bodyPr wrap="none">
+            <a:spAutoFit/>
+          </a:bodyPr>
+          <a:lstStyle/>
+          <a:p>
+            <a:pPr>
+              <a:defRPr sz="850">
+                <a:solidFill>
+                  <a:srgbClr val="64748B"/>
+                </a:solidFill>
+                <a:latin typeface="Arial"/>
+              </a:defRPr>
+            </a:pPr>
+            <a:r>
+              <a:t>Confidential • Bluestock Fintech Analytics • Group: 62FMBF • Author: Rajeev Reddy</a:t>
+            </a:r>
+          </a:p>
+        </p:txBody>
+      </p:sp>
+      <p:sp>
+        <p:nvSpPr>
+          <p:cNvPr id="8" name="Rounded Rectangle 7"/>
+          <p:cNvSpPr/>
+          <p:nvPr/>
+        </p:nvSpPr>
+        <p:spPr>
+          <a:xfrm>
+            <a:off x="731520" y="1280160"/>
+            <a:ext cx="5669280" cy="4937760"/>
+          </a:xfrm>
+          <a:prstGeom prst="roundRect">
+            <a:avLst/>
+          </a:prstGeom>
+          <a:solidFill>
+            <a:srgbClr val="FFFFFF"/>
+          </a:solidFill>
+          <a:ln w="12700">
+            <a:solidFill>
+              <a:srgbClr val="E2E8F0"/>
+            </a:solidFill>
+          </a:ln>
+        </p:spPr>
+        <p:style>
+          <a:lnRef idx="1">
+            <a:schemeClr val="accent1"/>
+          </a:lnRef>
+          <a:fillRef idx="3">
+            <a:schemeClr val="accent1"/>
+          </a:fillRef>
+          <a:effectRef idx="2">
+            <a:schemeClr val="accent1"/>
+          </a:effectRef>
+          <a:fontRef idx="minor">
+            <a:schemeClr val="lt1"/>
+          </a:fontRef>
+        </p:style>
+        <p:txBody>
+          <a:bodyPr rtlCol="0" anchor="ctr"/>
+          <a:lstStyle/>
+          <a:p>
+            <a:pPr algn="ctr"/>
+          </a:p>
+        </p:txBody>
+      </p:sp>
+      <p:sp>
+        <p:nvSpPr>
+          <p:cNvPr id="9" name="TextBox 8"/>
+          <p:cNvSpPr txBox="1"/>
+          <p:nvPr/>
+        </p:nvSpPr>
+        <p:spPr>
+          <a:xfrm>
+            <a:off x="914400" y="1417319"/>
+            <a:ext cx="5303520" cy="411480"/>
+          </a:xfrm>
+          <a:prstGeom prst="rect">
+            <a:avLst/>
+          </a:prstGeom>
+          <a:noFill/>
+        </p:spPr>
+        <p:txBody>
+          <a:bodyPr wrap="square">
+            <a:spAutoFit/>
+          </a:bodyPr>
+          <a:lstStyle/>
+          <a:p>
+            <a:pPr>
+              <a:defRPr sz="1300" b="1">
+                <a:solidFill>
+                  <a:srgbClr val="1A365D"/>
+                </a:solidFill>
+                <a:latin typeface="Arial"/>
+              </a:defRPr>
+            </a:pPr>
+            <a:r>
+              <a:t>Industry AUM Trajectory &amp; Market Share</a:t>
+            </a:r>
+          </a:p>
+        </p:txBody>
+      </p:sp>
+      <p:pic>
+        <p:nvPicPr>
+          <p:cNvPr id="10" name="Picture 9" descr="aum_growth_by_amc.png"/>
+          <p:cNvPicPr>
+            <a:picLocks noChangeAspect="1"/>
+          </p:cNvPicPr>
+          <p:nvPr/>
+        </p:nvPicPr>
+        <p:blipFill>
+          <a:blip r:embed="rId2"/>
+          <a:stretch>
+            <a:fillRect/>
+          </a:stretch>
+        </p:blipFill>
+        <p:spPr>
+          <a:xfrm>
+            <a:off x="868680" y="1828800"/>
+            <a:ext cx="5394960" cy="4206240"/>
+          </a:xfrm>
+          <a:prstGeom prst="rect">
+            <a:avLst/>
+          </a:prstGeom>
+        </p:spPr>
+      </p:pic>
+      <p:sp>
+        <p:nvSpPr>
+          <p:cNvPr id="11" name="Rounded Rectangle 10"/>
+          <p:cNvSpPr/>
+          <p:nvPr/>
+        </p:nvSpPr>
+        <p:spPr>
+          <a:xfrm>
+            <a:off x="6583680" y="1280160"/>
+            <a:ext cx="4846320" cy="4937760"/>
+          </a:xfrm>
+          <a:prstGeom prst="roundRect">
+            <a:avLst/>
+          </a:prstGeom>
+          <a:solidFill>
+            <a:srgbClr val="FFFFFF"/>
+          </a:solidFill>
+          <a:ln w="12700">
+            <a:solidFill>
+              <a:srgbClr val="E2E8F0"/>
+            </a:solidFill>
+          </a:ln>
+        </p:spPr>
+        <p:style>
+          <a:lnRef idx="1">
+            <a:schemeClr val="accent1"/>
+          </a:lnRef>
+          <a:fillRef idx="3">
+            <a:schemeClr val="accent1"/>
+          </a:fillRef>
+          <a:effectRef idx="2">
+            <a:schemeClr val="accent1"/>
+          </a:effectRef>
+          <a:fontRef idx="minor">
+            <a:schemeClr val="lt1"/>
+          </a:fontRef>
+        </p:style>
+        <p:txBody>
+          <a:bodyPr rtlCol="0" anchor="ctr"/>
+          <a:lstStyle/>
+          <a:p>
+            <a:pPr algn="ctr"/>
+          </a:p>
+        </p:txBody>
+      </p:sp>
+      <p:sp>
+        <p:nvSpPr>
+          <p:cNvPr id="12" name="TextBox 11"/>
+          <p:cNvSpPr txBox="1"/>
+          <p:nvPr/>
+        </p:nvSpPr>
+        <p:spPr>
+          <a:xfrm>
+            <a:off x="6766560" y="1417319"/>
+            <a:ext cx="4480559" cy="411480"/>
+          </a:xfrm>
+          <a:prstGeom prst="rect">
+            <a:avLst/>
+          </a:prstGeom>
+          <a:noFill/>
+        </p:spPr>
+        <p:txBody>
+          <a:bodyPr wrap="square">
+            <a:spAutoFit/>
+          </a:bodyPr>
+          <a:lstStyle/>
+          <a:p>
+            <a:pPr>
+              <a:defRPr sz="1300" b="1">
+                <a:solidFill>
+                  <a:srgbClr val="1A365D"/>
+                </a:solidFill>
+                <a:latin typeface="Arial"/>
+              </a:defRPr>
+            </a:pPr>
+            <a:r>
+              <a:t>Key Macro Observations</a:t>
+            </a:r>
+          </a:p>
+        </p:txBody>
+      </p:sp>
+      <p:sp>
+        <p:nvSpPr>
+          <p:cNvPr id="13" name="TextBox 12"/>
+          <p:cNvSpPr txBox="1"/>
+          <p:nvPr/>
+        </p:nvSpPr>
+        <p:spPr>
+          <a:xfrm>
+            <a:off x="6766560" y="1828800"/>
+            <a:ext cx="4480560" cy="4206240"/>
+          </a:xfrm>
+          <a:prstGeom prst="rect">
+            <a:avLst/>
+          </a:prstGeom>
+          <a:noFill/>
+        </p:spPr>
+        <p:txBody>
+          <a:bodyPr wrap="square">
+            <a:spAutoFit/>
+          </a:bodyPr>
+          <a:lstStyle/>
+          <a:p>
+            <a:pPr>
+              <a:spcAft>
+                <a:spcPts val="1400"/>
+              </a:spcAft>
+              <a:defRPr sz="1100">
+                <a:solidFill>
+                  <a:srgbClr val="1E293B"/>
+                </a:solidFill>
+                <a:latin typeface="Arial"/>
+              </a:defRPr>
+            </a:pPr>
+            <a:r>
+              <a:t>&lt;b&gt;Exponential AUM Expansion:&lt;/b&gt; Indian Mutual Fund industry AUM scaled from Rs. 27 Lakh Cr (2020) to Rs. 81.3 Lakh Cr (2025), compounding at ~24.6% annually.</a:t>
+            </a:r>
+          </a:p>
+          <a:p>
+            <a:pPr>
+              <a:spcAft>
+                <a:spcPts val="1400"/>
+              </a:spcAft>
+              <a:defRPr sz="1100">
+                <a:solidFill>
+                  <a:srgbClr val="1E293B"/>
+                </a:solidFill>
+                <a:latin typeface="Arial"/>
+              </a:defRPr>
+            </a:pPr>
+            <a:r>
+              <a:t>&lt;b&gt;AMC Concentration:&lt;/b&gt; Top 3 AMCs (SBI, ICICI Prudential, HDFC) command &gt;52% of total industry AUM, displaying high market dominance.</a:t>
+            </a:r>
+          </a:p>
+          <a:p>
+            <a:pPr>
+              <a:spcAft>
+                <a:spcPts val="1400"/>
+              </a:spcAft>
+              <a:defRPr sz="1100">
+                <a:solidFill>
+                  <a:srgbClr val="1E293B"/>
+                </a:solidFill>
+                <a:latin typeface="Arial"/>
+              </a:defRPr>
+            </a:pPr>
+            <a:r>
+              <a:t>&lt;b&gt;SIP Inflow Resilience:&lt;/b&gt; Monthly SIP inflows surged past Rs. 26,000 Cr in 2025, demonstrating retail stickiness even through market corrections.</a:t>
+            </a:r>
+          </a:p>
+          <a:p>
+            <a:pPr>
+              <a:spcAft>
+                <a:spcPts val="1400"/>
+              </a:spcAft>
+              <a:defRPr sz="1100">
+                <a:solidFill>
+                  <a:srgbClr val="1E293B"/>
+                </a:solidFill>
+                <a:latin typeface="Arial"/>
+              </a:defRPr>
+            </a:pPr>
+            <a:r>
+              <a:t>&lt;b&gt;Category Flow Shifts:&lt;/b&gt; Equity schemes experienced the highest net inflows (+64%), while Debt funds saw intermittent redemptions amidst interest rate cycles.</a:t>
             </a:r>
           </a:p>
         </p:txBody>
@@ -5587,75 +7287,23 @@
       <p:grpSpPr/>
       <p:sp>
         <p:nvSpPr>
-          <p:cNvPr id="2" name="TextBox 1"/>
-          <p:cNvSpPr txBox="1"/>
-          <p:nvPr/>
-        </p:nvSpPr>
-        <p:spPr>
-          <a:xfrm>
-            <a:off x="731520" y="457200"/>
-            <a:ext cx="10698480" cy="1097280"/>
-          </a:xfrm>
-          <a:prstGeom prst="rect">
-            <a:avLst/>
-          </a:prstGeom>
-          <a:noFill/>
-        </p:spPr>
-        <p:txBody>
-          <a:bodyPr wrap="square" lIns="0" tIns="0" rIns="0" bIns="0">
-            <a:spAutoFit/>
-          </a:bodyPr>
-          <a:lstStyle/>
-          <a:p>
-            <a:pPr>
-              <a:defRPr sz="2800" b="1">
-                <a:solidFill>
-                  <a:srgbClr val="102C57"/>
-                </a:solidFill>
-              </a:defRPr>
-            </a:pPr>
-            <a:r>
-              <a:t>Relational Star Schema Database Design</a:t>
-            </a:r>
-          </a:p>
-          <a:p>
-            <a:pPr>
-              <a:spcBef>
-                <a:spcPts val="400"/>
-              </a:spcBef>
-              <a:defRPr sz="1400">
-                <a:solidFill>
-                  <a:srgbClr val="6C757D"/>
-                </a:solidFill>
-              </a:defRPr>
-            </a:pPr>
-            <a:r>
-              <a:t>bluestock_mf.db: Normalized star schema optimized for OLAP analytical queries</a:t>
-            </a:r>
-          </a:p>
-        </p:txBody>
-      </p:sp>
-      <p:sp>
-        <p:nvSpPr>
-          <p:cNvPr id="3" name="Rectangle 2"/>
+          <p:cNvPr id="2" name="Rectangle 1"/>
           <p:cNvSpPr/>
           <p:nvPr/>
         </p:nvSpPr>
         <p:spPr>
           <a:xfrm>
-            <a:off x="731520" y="1645920"/>
-            <a:ext cx="5120640" cy="4572000"/>
+            <a:off x="0" y="0"/>
+            <a:ext cx="12191695" cy="1005840"/>
           </a:xfrm>
           <a:prstGeom prst="rect">
             <a:avLst/>
           </a:prstGeom>
           <a:solidFill>
-            <a:srgbClr val="F5F7FA"/>
+            <a:srgbClr val="0F2537"/>
           </a:solidFill>
-          <a:ln w="19050">
-            <a:solidFill>
-              <a:srgbClr val="3565A9"/>
-            </a:solidFill>
+          <a:ln>
+            <a:noFill/>
           </a:ln>
         </p:spPr>
         <p:style>
@@ -5673,88 +7321,32 @@
           </a:fontRef>
         </p:style>
         <p:txBody>
-          <a:bodyPr rtlCol="0" anchor="ctr" wrap="square" lIns="274320" rIns="274320" tIns="228600" bIns="228600"/>
-          <a:lstStyle/>
-          <a:p>
-            <a:pPr algn="ctr">
-              <a:defRPr sz="1800" b="1">
-                <a:solidFill>
-                  <a:srgbClr val="102C57"/>
-                </a:solidFill>
-              </a:defRPr>
-            </a:pPr>
-            <a:r>
-              <a:t>Dimension Tables</a:t>
-            </a:r>
-          </a:p>
-          <a:p>
-            <a:pPr>
-              <a:spcBef>
-                <a:spcPts val="600"/>
-              </a:spcBef>
-              <a:defRPr sz="1300">
-                <a:solidFill>
-                  <a:srgbClr val="212529"/>
-                </a:solidFill>
-              </a:defRPr>
-            </a:pPr>
-            <a:r>
-              <a:t>• dim_fund (40 rows): amfi_code (PK), fund_house, scheme_name, category, sub_category, plan, expense_ratio, risk_category.</a:t>
-            </a:r>
-          </a:p>
-          <a:p>
-            <a:pPr>
-              <a:spcBef>
-                <a:spcPts val="600"/>
-              </a:spcBef>
-              <a:defRPr sz="1300">
-                <a:solidFill>
-                  <a:srgbClr val="212529"/>
-                </a:solidFill>
-              </a:defRPr>
-            </a:pPr>
-            <a:r>
-              <a:t>• dim_date (1,500+ rows): date (PK), year, quarter, month, day, day_of_week, is_weekend.</a:t>
-            </a:r>
-          </a:p>
-          <a:p>
-            <a:pPr>
-              <a:spcBef>
-                <a:spcPts val="600"/>
-              </a:spcBef>
-              <a:defRPr sz="1300">
-                <a:solidFill>
-                  <a:srgbClr val="212529"/>
-                </a:solidFill>
-              </a:defRPr>
-            </a:pPr>
-            <a:r>
-              <a:t>• Enables rapid slicing by AMC, Category, Risk Grade, and Time.</a:t>
-            </a:r>
-          </a:p>
-        </p:txBody>
-      </p:sp>
-      <p:sp>
-        <p:nvSpPr>
-          <p:cNvPr id="4" name="Rectangle 3"/>
+          <a:bodyPr rtlCol="0" anchor="ctr"/>
+          <a:lstStyle/>
+          <a:p>
+            <a:pPr algn="ctr"/>
+          </a:p>
+        </p:txBody>
+      </p:sp>
+      <p:sp>
+        <p:nvSpPr>
+          <p:cNvPr id="3" name="Rectangle 2"/>
           <p:cNvSpPr/>
           <p:nvPr/>
         </p:nvSpPr>
         <p:spPr>
           <a:xfrm>
-            <a:off x="6217920" y="1645920"/>
-            <a:ext cx="5120640" cy="4572000"/>
+            <a:off x="0" y="1005840"/>
+            <a:ext cx="12191695" cy="54864"/>
           </a:xfrm>
           <a:prstGeom prst="rect">
             <a:avLst/>
           </a:prstGeom>
           <a:solidFill>
-            <a:srgbClr val="F5F7FA"/>
+            <a:srgbClr val="0284C7"/>
           </a:solidFill>
-          <a:ln w="19050">
-            <a:solidFill>
-              <a:srgbClr val="3565A9"/>
-            </a:solidFill>
+          <a:ln>
+            <a:noFill/>
           </a:ln>
         </p:spPr>
         <p:style>
@@ -5772,97 +7364,439 @@
           </a:fontRef>
         </p:style>
         <p:txBody>
-          <a:bodyPr rtlCol="0" anchor="ctr" wrap="square" lIns="274320" rIns="274320" tIns="228600" bIns="228600"/>
-          <a:lstStyle/>
-          <a:p>
-            <a:pPr algn="ctr">
-              <a:defRPr sz="1800" b="1">
-                <a:solidFill>
-                  <a:srgbClr val="102C57"/>
-                </a:solidFill>
-              </a:defRPr>
-            </a:pPr>
-            <a:r>
-              <a:t>Fact Tables</a:t>
-            </a:r>
-          </a:p>
-          <a:p>
-            <a:pPr>
-              <a:spcBef>
-                <a:spcPts val="600"/>
-              </a:spcBef>
-              <a:defRPr sz="1300">
-                <a:solidFill>
-                  <a:srgbClr val="212529"/>
-                </a:solidFill>
-              </a:defRPr>
-            </a:pPr>
-            <a:r>
-              <a:t>• fact_nav (46,000 rows): amfi_code (FK), date (FK), nav, daily_return.</a:t>
-            </a:r>
-          </a:p>
-          <a:p>
-            <a:pPr>
-              <a:spcBef>
-                <a:spcPts val="600"/>
-              </a:spcBef>
-              <a:defRPr sz="1300">
-                <a:solidFill>
-                  <a:srgbClr val="212529"/>
-                </a:solidFill>
-              </a:defRPr>
-            </a:pPr>
-            <a:r>
-              <a:t>• fact_transactions (32,778 rows): investor_id, amount_inr, transaction_type, state, city_tier.</a:t>
-            </a:r>
-          </a:p>
-          <a:p>
-            <a:pPr>
-              <a:spcBef>
-                <a:spcPts val="600"/>
-              </a:spcBef>
-              <a:defRPr sz="1300">
-                <a:solidFill>
-                  <a:srgbClr val="212529"/>
-                </a:solidFill>
-              </a:defRPr>
-            </a:pPr>
-            <a:r>
-              <a:t>• fact_performance (40 rows): Sharpe, Sortino, Alpha, Beta, Max Drawdown.</a:t>
-            </a:r>
-          </a:p>
-          <a:p>
-            <a:pPr>
-              <a:spcBef>
-                <a:spcPts val="600"/>
-              </a:spcBef>
-              <a:defRPr sz="1300">
-                <a:solidFill>
-                  <a:srgbClr val="212529"/>
-                </a:solidFill>
-              </a:defRPr>
-            </a:pPr>
-            <a:r>
-              <a:t>• fact_aum (90 rows): Quarterly AUM by fund house.</a:t>
-            </a:r>
-          </a:p>
-          <a:p>
-            <a:pPr>
-              <a:spcBef>
-                <a:spcPts val="600"/>
-              </a:spcBef>
-              <a:defRPr sz="1300">
-                <a:solidFill>
-                  <a:srgbClr val="212529"/>
-                </a:solidFill>
-              </a:defRPr>
-            </a:pPr>
-            <a:r>
-              <a:t>• fact_sip_industry (48 rows): Monthly industry-wide SIP flows.</a:t>
-            </a:r>
-          </a:p>
-        </p:txBody>
-      </p:sp>
+          <a:bodyPr rtlCol="0" anchor="ctr"/>
+          <a:lstStyle/>
+          <a:p>
+            <a:pPr algn="ctr"/>
+          </a:p>
+        </p:txBody>
+      </p:sp>
+      <p:sp>
+        <p:nvSpPr>
+          <p:cNvPr id="4" name="TextBox 3"/>
+          <p:cNvSpPr txBox="1"/>
+          <p:nvPr/>
+        </p:nvSpPr>
+        <p:spPr>
+          <a:xfrm>
+            <a:off x="731520" y="109728"/>
+            <a:ext cx="10515600" cy="274320"/>
+          </a:xfrm>
+          <a:prstGeom prst="rect">
+            <a:avLst/>
+          </a:prstGeom>
+          <a:noFill/>
+        </p:spPr>
+        <p:txBody>
+          <a:bodyPr wrap="square">
+            <a:spAutoFit/>
+          </a:bodyPr>
+          <a:lstStyle/>
+          <a:p>
+            <a:pPr>
+              <a:defRPr sz="900" b="1">
+                <a:solidFill>
+                  <a:srgbClr val="0284C7"/>
+                </a:solidFill>
+                <a:latin typeface="Arial"/>
+              </a:defRPr>
+            </a:pPr>
+            <a:r>
+              <a:t>BLUESTOCK FINTECH • MUTUAL FUND ANALYTICS CAPSTONE</a:t>
+            </a:r>
+          </a:p>
+        </p:txBody>
+      </p:sp>
+      <p:sp>
+        <p:nvSpPr>
+          <p:cNvPr id="5" name="TextBox 4"/>
+          <p:cNvSpPr txBox="1"/>
+          <p:nvPr/>
+        </p:nvSpPr>
+        <p:spPr>
+          <a:xfrm>
+            <a:off x="731520" y="347472"/>
+            <a:ext cx="10515600" cy="548640"/>
+          </a:xfrm>
+          <a:prstGeom prst="rect">
+            <a:avLst/>
+          </a:prstGeom>
+          <a:noFill/>
+        </p:spPr>
+        <p:txBody>
+          <a:bodyPr wrap="square">
+            <a:spAutoFit/>
+          </a:bodyPr>
+          <a:lstStyle/>
+          <a:p>
+            <a:pPr>
+              <a:defRPr sz="2000" b="1">
+                <a:solidFill>
+                  <a:srgbClr val="FFFFFF"/>
+                </a:solidFill>
+                <a:latin typeface="Arial"/>
+              </a:defRPr>
+            </a:pPr>
+            <a:r>
+              <a:t>5. Exploratory Data Analysis (Part 2): Investor Demographics &amp; B30</a:t>
+            </a:r>
+          </a:p>
+        </p:txBody>
+      </p:sp>
+      <p:sp>
+        <p:nvSpPr>
+          <p:cNvPr id="6" name="Rectangle 5"/>
+          <p:cNvSpPr/>
+          <p:nvPr/>
+        </p:nvSpPr>
+        <p:spPr>
+          <a:xfrm>
+            <a:off x="0" y="6492240"/>
+            <a:ext cx="12191695" cy="365760"/>
+          </a:xfrm>
+          <a:prstGeom prst="rect">
+            <a:avLst/>
+          </a:prstGeom>
+          <a:solidFill>
+            <a:srgbClr val="F8FAFC"/>
+          </a:solidFill>
+          <a:ln>
+            <a:solidFill>
+              <a:srgbClr val="E2E8F0"/>
+            </a:solidFill>
+          </a:ln>
+        </p:spPr>
+        <p:style>
+          <a:lnRef idx="1">
+            <a:schemeClr val="accent1"/>
+          </a:lnRef>
+          <a:fillRef idx="3">
+            <a:schemeClr val="accent1"/>
+          </a:fillRef>
+          <a:effectRef idx="2">
+            <a:schemeClr val="accent1"/>
+          </a:effectRef>
+          <a:fontRef idx="minor">
+            <a:schemeClr val="lt1"/>
+          </a:fontRef>
+        </p:style>
+        <p:txBody>
+          <a:bodyPr rtlCol="0" anchor="ctr"/>
+          <a:lstStyle/>
+          <a:p>
+            <a:pPr algn="ctr"/>
+          </a:p>
+        </p:txBody>
+      </p:sp>
+      <p:sp>
+        <p:nvSpPr>
+          <p:cNvPr id="7" name="TextBox 6"/>
+          <p:cNvSpPr txBox="1"/>
+          <p:nvPr/>
+        </p:nvSpPr>
+        <p:spPr>
+          <a:xfrm>
+            <a:off x="731520" y="6537960"/>
+            <a:ext cx="10515600" cy="274320"/>
+          </a:xfrm>
+          <a:prstGeom prst="rect">
+            <a:avLst/>
+          </a:prstGeom>
+          <a:noFill/>
+        </p:spPr>
+        <p:txBody>
+          <a:bodyPr wrap="none">
+            <a:spAutoFit/>
+          </a:bodyPr>
+          <a:lstStyle/>
+          <a:p>
+            <a:pPr>
+              <a:defRPr sz="850">
+                <a:solidFill>
+                  <a:srgbClr val="64748B"/>
+                </a:solidFill>
+                <a:latin typeface="Arial"/>
+              </a:defRPr>
+            </a:pPr>
+            <a:r>
+              <a:t>Confidential • Bluestock Fintech Analytics • Group: 62FMBF • Author: Rajeev Reddy</a:t>
+            </a:r>
+          </a:p>
+        </p:txBody>
+      </p:sp>
+      <p:sp>
+        <p:nvSpPr>
+          <p:cNvPr id="8" name="Rounded Rectangle 7"/>
+          <p:cNvSpPr/>
+          <p:nvPr/>
+        </p:nvSpPr>
+        <p:spPr>
+          <a:xfrm>
+            <a:off x="731520" y="1280160"/>
+            <a:ext cx="4846320" cy="4937760"/>
+          </a:xfrm>
+          <a:prstGeom prst="roundRect">
+            <a:avLst/>
+          </a:prstGeom>
+          <a:solidFill>
+            <a:srgbClr val="FFFFFF"/>
+          </a:solidFill>
+          <a:ln w="12700">
+            <a:solidFill>
+              <a:srgbClr val="E2E8F0"/>
+            </a:solidFill>
+          </a:ln>
+        </p:spPr>
+        <p:style>
+          <a:lnRef idx="1">
+            <a:schemeClr val="accent1"/>
+          </a:lnRef>
+          <a:fillRef idx="3">
+            <a:schemeClr val="accent1"/>
+          </a:fillRef>
+          <a:effectRef idx="2">
+            <a:schemeClr val="accent1"/>
+          </a:effectRef>
+          <a:fontRef idx="minor">
+            <a:schemeClr val="lt1"/>
+          </a:fontRef>
+        </p:style>
+        <p:txBody>
+          <a:bodyPr rtlCol="0" anchor="ctr"/>
+          <a:lstStyle/>
+          <a:p>
+            <a:pPr algn="ctr"/>
+          </a:p>
+        </p:txBody>
+      </p:sp>
+      <p:sp>
+        <p:nvSpPr>
+          <p:cNvPr id="9" name="TextBox 8"/>
+          <p:cNvSpPr txBox="1"/>
+          <p:nvPr/>
+        </p:nvSpPr>
+        <p:spPr>
+          <a:xfrm>
+            <a:off x="914400" y="1417319"/>
+            <a:ext cx="4480559" cy="411480"/>
+          </a:xfrm>
+          <a:prstGeom prst="rect">
+            <a:avLst/>
+          </a:prstGeom>
+          <a:noFill/>
+        </p:spPr>
+        <p:txBody>
+          <a:bodyPr wrap="square">
+            <a:spAutoFit/>
+          </a:bodyPr>
+          <a:lstStyle/>
+          <a:p>
+            <a:pPr>
+              <a:defRPr sz="1300" b="1">
+                <a:solidFill>
+                  <a:srgbClr val="1A365D"/>
+                </a:solidFill>
+                <a:latin typeface="Arial"/>
+              </a:defRPr>
+            </a:pPr>
+            <a:r>
+              <a:t>Demographic Insights &amp; Retention Patterns</a:t>
+            </a:r>
+          </a:p>
+        </p:txBody>
+      </p:sp>
+      <p:sp>
+        <p:nvSpPr>
+          <p:cNvPr id="10" name="TextBox 9"/>
+          <p:cNvSpPr txBox="1"/>
+          <p:nvPr/>
+        </p:nvSpPr>
+        <p:spPr>
+          <a:xfrm>
+            <a:off x="914400" y="1828800"/>
+            <a:ext cx="4480560" cy="4206240"/>
+          </a:xfrm>
+          <a:prstGeom prst="rect">
+            <a:avLst/>
+          </a:prstGeom>
+          <a:noFill/>
+        </p:spPr>
+        <p:txBody>
+          <a:bodyPr wrap="square">
+            <a:spAutoFit/>
+          </a:bodyPr>
+          <a:lstStyle/>
+          <a:p>
+            <a:pPr>
+              <a:spcAft>
+                <a:spcPts val="1400"/>
+              </a:spcAft>
+              <a:defRPr sz="1100">
+                <a:solidFill>
+                  <a:srgbClr val="1E293B"/>
+                </a:solidFill>
+                <a:latin typeface="Arial"/>
+              </a:defRPr>
+            </a:pPr>
+            <a:r>
+              <a:t>&lt;b&gt;B30 Penetration Surge:&lt;/b&gt; Beyond Top 30 (B30) cities now contribute 28% of incremental SIP folios, signaling strong tier-2 and tier-3 adoption.</a:t>
+            </a:r>
+          </a:p>
+          <a:p>
+            <a:pPr>
+              <a:spcAft>
+                <a:spcPts val="1400"/>
+              </a:spcAft>
+              <a:defRPr sz="1100">
+                <a:solidFill>
+                  <a:srgbClr val="1E293B"/>
+                </a:solidFill>
+                <a:latin typeface="Arial"/>
+              </a:defRPr>
+            </a:pPr>
+            <a:r>
+              <a:t>&lt;b&gt;Millennial &amp; Gen-Z Participation:&lt;/b&gt; Investors aged 25–38 represent 47.8% of active folios, primarily investing through digital Direct platforms.</a:t>
+            </a:r>
+          </a:p>
+          <a:p>
+            <a:pPr>
+              <a:spcAft>
+                <a:spcPts val="1400"/>
+              </a:spcAft>
+              <a:defRPr sz="1100">
+                <a:solidFill>
+                  <a:srgbClr val="1E293B"/>
+                </a:solidFill>
+                <a:latin typeface="Arial"/>
+              </a:defRPr>
+            </a:pPr>
+            <a:r>
+              <a:t>&lt;b&gt;SIP Continuity Analysis:&lt;/b&gt; Out of 2,950 analyzed active SIP accounts, 2,949 experienced at least one payment gap &gt; 35 days, highlighting a massive retention opportunity.</a:t>
+            </a:r>
+          </a:p>
+          <a:p>
+            <a:pPr>
+              <a:spcAft>
+                <a:spcPts val="1400"/>
+              </a:spcAft>
+              <a:defRPr sz="1100">
+                <a:solidFill>
+                  <a:srgbClr val="1E293B"/>
+                </a:solidFill>
+                <a:latin typeface="Arial"/>
+              </a:defRPr>
+            </a:pPr>
+            <a:r>
+              <a:t>&lt;b&gt;Average Ticket Size:&lt;/b&gt; T30 investors average Rs. 4,200/month per SIP versus Rs. 1,850/month in B30 geographies, presenting high expansion headroom.</a:t>
+            </a:r>
+          </a:p>
+        </p:txBody>
+      </p:sp>
+      <p:sp>
+        <p:nvSpPr>
+          <p:cNvPr id="11" name="Rounded Rectangle 10"/>
+          <p:cNvSpPr/>
+          <p:nvPr/>
+        </p:nvSpPr>
+        <p:spPr>
+          <a:xfrm>
+            <a:off x="5760720" y="1280160"/>
+            <a:ext cx="5669280" cy="4937760"/>
+          </a:xfrm>
+          <a:prstGeom prst="roundRect">
+            <a:avLst/>
+          </a:prstGeom>
+          <a:solidFill>
+            <a:srgbClr val="FFFFFF"/>
+          </a:solidFill>
+          <a:ln w="12700">
+            <a:solidFill>
+              <a:srgbClr val="E2E8F0"/>
+            </a:solidFill>
+          </a:ln>
+        </p:spPr>
+        <p:style>
+          <a:lnRef idx="1">
+            <a:schemeClr val="accent1"/>
+          </a:lnRef>
+          <a:fillRef idx="3">
+            <a:schemeClr val="accent1"/>
+          </a:fillRef>
+          <a:effectRef idx="2">
+            <a:schemeClr val="accent1"/>
+          </a:effectRef>
+          <a:fontRef idx="minor">
+            <a:schemeClr val="lt1"/>
+          </a:fontRef>
+        </p:style>
+        <p:txBody>
+          <a:bodyPr rtlCol="0" anchor="ctr"/>
+          <a:lstStyle/>
+          <a:p>
+            <a:pPr algn="ctr"/>
+          </a:p>
+        </p:txBody>
+      </p:sp>
+      <p:sp>
+        <p:nvSpPr>
+          <p:cNvPr id="12" name="TextBox 11"/>
+          <p:cNvSpPr txBox="1"/>
+          <p:nvPr/>
+        </p:nvSpPr>
+        <p:spPr>
+          <a:xfrm>
+            <a:off x="5943600" y="1417319"/>
+            <a:ext cx="5303520" cy="411480"/>
+          </a:xfrm>
+          <a:prstGeom prst="rect">
+            <a:avLst/>
+          </a:prstGeom>
+          <a:noFill/>
+        </p:spPr>
+        <p:txBody>
+          <a:bodyPr wrap="square">
+            <a:spAutoFit/>
+          </a:bodyPr>
+          <a:lstStyle/>
+          <a:p>
+            <a:pPr>
+              <a:defRPr sz="1300" b="1">
+                <a:solidFill>
+                  <a:srgbClr val="1A365D"/>
+                </a:solidFill>
+                <a:latin typeface="Arial"/>
+              </a:defRPr>
+            </a:pPr>
+            <a:r>
+              <a:t>Sector Concentration &amp; Geographic Distribution</a:t>
+            </a:r>
+          </a:p>
+        </p:txBody>
+      </p:sp>
+      <p:pic>
+        <p:nvPicPr>
+          <p:cNvPr id="13" name="Picture 12" descr="sector_hhi_chart.png"/>
+          <p:cNvPicPr>
+            <a:picLocks noChangeAspect="1"/>
+          </p:cNvPicPr>
+          <p:nvPr/>
+        </p:nvPicPr>
+        <p:blipFill>
+          <a:blip r:embed="rId2"/>
+          <a:stretch>
+            <a:fillRect/>
+          </a:stretch>
+        </p:blipFill>
+        <p:spPr>
+          <a:xfrm>
+            <a:off x="5897880" y="1828800"/>
+            <a:ext cx="5394960" cy="4206240"/>
+          </a:xfrm>
+          <a:prstGeom prst="rect">
+            <a:avLst/>
+          </a:prstGeom>
+        </p:spPr>
+      </p:pic>
     </p:spTree>
   </p:cSld>
   <p:clrMapOvr>
@@ -5883,75 +7817,23 @@
       <p:grpSpPr/>
       <p:sp>
         <p:nvSpPr>
-          <p:cNvPr id="2" name="TextBox 1"/>
-          <p:cNvSpPr txBox="1"/>
-          <p:nvPr/>
-        </p:nvSpPr>
-        <p:spPr>
-          <a:xfrm>
-            <a:off x="731520" y="457200"/>
-            <a:ext cx="10698480" cy="1097280"/>
-          </a:xfrm>
-          <a:prstGeom prst="rect">
-            <a:avLst/>
-          </a:prstGeom>
-          <a:noFill/>
-        </p:spPr>
-        <p:txBody>
-          <a:bodyPr wrap="square" lIns="0" tIns="0" rIns="0" bIns="0">
-            <a:spAutoFit/>
-          </a:bodyPr>
-          <a:lstStyle/>
-          <a:p>
-            <a:pPr>
-              <a:defRPr sz="2800" b="1">
-                <a:solidFill>
-                  <a:srgbClr val="102C57"/>
-                </a:solidFill>
-              </a:defRPr>
-            </a:pPr>
-            <a:r>
-              <a:t>Exploratory Data Analysis Highlights</a:t>
-            </a:r>
-          </a:p>
-          <a:p>
-            <a:pPr>
-              <a:spcBef>
-                <a:spcPts val="400"/>
-              </a:spcBef>
-              <a:defRPr sz="1400">
-                <a:solidFill>
-                  <a:srgbClr val="6C757D"/>
-                </a:solidFill>
-              </a:defRPr>
-            </a:pPr>
-            <a:r>
-              <a:t>Key findings from macro industry trends and micro fund distributions</a:t>
-            </a:r>
-          </a:p>
-        </p:txBody>
-      </p:sp>
-      <p:sp>
-        <p:nvSpPr>
-          <p:cNvPr id="3" name="Rectangle 2"/>
+          <p:cNvPr id="2" name="Rectangle 1"/>
           <p:cNvSpPr/>
           <p:nvPr/>
         </p:nvSpPr>
         <p:spPr>
           <a:xfrm>
-            <a:off x="731520" y="1645920"/>
-            <a:ext cx="5120640" cy="4572000"/>
+            <a:off x="0" y="0"/>
+            <a:ext cx="12191695" cy="1005840"/>
           </a:xfrm>
           <a:prstGeom prst="rect">
             <a:avLst/>
           </a:prstGeom>
           <a:solidFill>
-            <a:srgbClr val="F5F7FA"/>
+            <a:srgbClr val="0F2537"/>
           </a:solidFill>
-          <a:ln w="19050">
-            <a:solidFill>
-              <a:srgbClr val="3565A9"/>
-            </a:solidFill>
+          <a:ln>
+            <a:noFill/>
           </a:ln>
         </p:spPr>
         <p:style>
@@ -5969,103 +7851,32 @@
           </a:fontRef>
         </p:style>
         <p:txBody>
-          <a:bodyPr rtlCol="0" anchor="ctr" wrap="square" lIns="274320" rIns="274320" tIns="228600" bIns="228600"/>
-          <a:lstStyle/>
-          <a:p>
-            <a:pPr algn="ctr">
-              <a:defRPr sz="1800" b="1">
-                <a:solidFill>
-                  <a:srgbClr val="102C57"/>
-                </a:solidFill>
-              </a:defRPr>
-            </a:pPr>
-            <a:r>
-              <a:t>Macro Industry Dynamics</a:t>
-            </a:r>
-          </a:p>
-          <a:p>
-            <a:pPr>
-              <a:spcBef>
-                <a:spcPts val="600"/>
-              </a:spcBef>
-              <a:defRPr sz="1300">
-                <a:solidFill>
-                  <a:srgbClr val="212529"/>
-                </a:solidFill>
-              </a:defRPr>
-            </a:pPr>
-            <a:r>
-              <a:t>• AUM Concentration: Top 3 AMCs (SBI, ICICI, HDFC) control &gt;50% of aggregate industry AUM.</a:t>
-            </a:r>
-          </a:p>
-          <a:p>
-            <a:pPr>
-              <a:spcBef>
-                <a:spcPts val="600"/>
-              </a:spcBef>
-              <a:defRPr sz="1300">
-                <a:solidFill>
-                  <a:srgbClr val="212529"/>
-                </a:solidFill>
-              </a:defRPr>
-            </a:pPr>
-            <a:r>
-              <a:t>• SIP Compounding: Monthly SIP inflows expanded from Rs. 11,517 Cr (Jan 2022) to &gt;Rs. 25,000 Cr in 2025.</a:t>
-            </a:r>
-          </a:p>
-          <a:p>
-            <a:pPr>
-              <a:spcBef>
-                <a:spcPts val="600"/>
-              </a:spcBef>
-              <a:defRPr sz="1300">
-                <a:solidFill>
-                  <a:srgbClr val="212529"/>
-                </a:solidFill>
-              </a:defRPr>
-            </a:pPr>
-            <a:r>
-              <a:t>• Geographic Expansion: Tier 2/3 (B30) cities represent 42%+ of all transaction volumes.</a:t>
-            </a:r>
-          </a:p>
-          <a:p>
-            <a:pPr>
-              <a:spcBef>
-                <a:spcPts val="600"/>
-              </a:spcBef>
-              <a:defRPr sz="1300">
-                <a:solidFill>
-                  <a:srgbClr val="212529"/>
-                </a:solidFill>
-              </a:defRPr>
-            </a:pPr>
-            <a:r>
-              <a:t>• Equity Dominance: Equity mutual funds capture over 70% of total investor folios.</a:t>
-            </a:r>
-          </a:p>
-        </p:txBody>
-      </p:sp>
-      <p:sp>
-        <p:nvSpPr>
-          <p:cNvPr id="4" name="Rectangle 3"/>
+          <a:bodyPr rtlCol="0" anchor="ctr"/>
+          <a:lstStyle/>
+          <a:p>
+            <a:pPr algn="ctr"/>
+          </a:p>
+        </p:txBody>
+      </p:sp>
+      <p:sp>
+        <p:nvSpPr>
+          <p:cNvPr id="3" name="Rectangle 2"/>
           <p:cNvSpPr/>
           <p:nvPr/>
         </p:nvSpPr>
         <p:spPr>
           <a:xfrm>
-            <a:off x="6217920" y="1645920"/>
-            <a:ext cx="5120640" cy="4572000"/>
+            <a:off x="0" y="1005840"/>
+            <a:ext cx="12191695" cy="54864"/>
           </a:xfrm>
           <a:prstGeom prst="rect">
             <a:avLst/>
           </a:prstGeom>
           <a:solidFill>
-            <a:srgbClr val="F5F7FA"/>
+            <a:srgbClr val="0284C7"/>
           </a:solidFill>
-          <a:ln w="19050">
-            <a:solidFill>
-              <a:srgbClr val="3565A9"/>
-            </a:solidFill>
+          <a:ln>
+            <a:noFill/>
           </a:ln>
         </p:spPr>
         <p:style>
@@ -6083,78 +7894,435 @@
           </a:fontRef>
         </p:style>
         <p:txBody>
-          <a:bodyPr rtlCol="0" anchor="ctr" wrap="square" lIns="274320" rIns="274320" tIns="228600" bIns="228600"/>
-          <a:lstStyle/>
-          <a:p>
-            <a:pPr algn="ctr">
-              <a:defRPr sz="1800" b="1">
-                <a:solidFill>
-                  <a:srgbClr val="102C57"/>
-                </a:solidFill>
-              </a:defRPr>
-            </a:pPr>
-            <a:r>
-              <a:t>Fund Master Insights</a:t>
-            </a:r>
-          </a:p>
-          <a:p>
-            <a:pPr>
-              <a:spcBef>
-                <a:spcPts val="600"/>
-              </a:spcBef>
-              <a:defRPr sz="1300">
-                <a:solidFill>
-                  <a:srgbClr val="212529"/>
-                </a:solidFill>
-              </a:defRPr>
-            </a:pPr>
-            <a:r>
-              <a:t>• 40 Schemes evaluated across 10 top asset management companies (AMCs).</a:t>
-            </a:r>
-          </a:p>
-          <a:p>
-            <a:pPr>
-              <a:spcBef>
-                <a:spcPts val="600"/>
-              </a:spcBef>
-              <a:defRPr sz="1300">
-                <a:solidFill>
-                  <a:srgbClr val="212529"/>
-                </a:solidFill>
-              </a:defRPr>
-            </a:pPr>
-            <a:r>
-              <a:t>• Sub-categories: 14 Large Cap, 7 Mid Cap, 6 Small Cap, 6 Debt/Liquid, 7 Hybrid/Other.</a:t>
-            </a:r>
-          </a:p>
-          <a:p>
-            <a:pPr>
-              <a:spcBef>
-                <a:spcPts val="600"/>
-              </a:spcBef>
-              <a:defRPr sz="1300">
-                <a:solidFill>
-                  <a:srgbClr val="212529"/>
-                </a:solidFill>
-              </a:defRPr>
-            </a:pPr>
-            <a:r>
-              <a:t>• Expense Ratios: Direct plans average 0.78% vs Regular plans at 1.62% (~84 bps delta).</a:t>
-            </a:r>
-          </a:p>
-          <a:p>
-            <a:pPr>
-              <a:spcBef>
-                <a:spcPts val="600"/>
-              </a:spcBef>
-              <a:defRPr sz="1300">
-                <a:solidFill>
-                  <a:srgbClr val="212529"/>
-                </a:solidFill>
-              </a:defRPr>
-            </a:pPr>
-            <a:r>
-              <a:t>• 100% AMFI code referential integrity across all fact and dimension tables.</a:t>
+          <a:bodyPr rtlCol="0" anchor="ctr"/>
+          <a:lstStyle/>
+          <a:p>
+            <a:pPr algn="ctr"/>
+          </a:p>
+        </p:txBody>
+      </p:sp>
+      <p:sp>
+        <p:nvSpPr>
+          <p:cNvPr id="4" name="TextBox 3"/>
+          <p:cNvSpPr txBox="1"/>
+          <p:nvPr/>
+        </p:nvSpPr>
+        <p:spPr>
+          <a:xfrm>
+            <a:off x="731520" y="109728"/>
+            <a:ext cx="10515600" cy="274320"/>
+          </a:xfrm>
+          <a:prstGeom prst="rect">
+            <a:avLst/>
+          </a:prstGeom>
+          <a:noFill/>
+        </p:spPr>
+        <p:txBody>
+          <a:bodyPr wrap="square">
+            <a:spAutoFit/>
+          </a:bodyPr>
+          <a:lstStyle/>
+          <a:p>
+            <a:pPr>
+              <a:defRPr sz="900" b="1">
+                <a:solidFill>
+                  <a:srgbClr val="0284C7"/>
+                </a:solidFill>
+                <a:latin typeface="Arial"/>
+              </a:defRPr>
+            </a:pPr>
+            <a:r>
+              <a:t>BLUESTOCK FINTECH • MUTUAL FUND ANALYTICS CAPSTONE</a:t>
+            </a:r>
+          </a:p>
+        </p:txBody>
+      </p:sp>
+      <p:sp>
+        <p:nvSpPr>
+          <p:cNvPr id="5" name="TextBox 4"/>
+          <p:cNvSpPr txBox="1"/>
+          <p:nvPr/>
+        </p:nvSpPr>
+        <p:spPr>
+          <a:xfrm>
+            <a:off x="731520" y="347472"/>
+            <a:ext cx="10515600" cy="548640"/>
+          </a:xfrm>
+          <a:prstGeom prst="rect">
+            <a:avLst/>
+          </a:prstGeom>
+          <a:noFill/>
+        </p:spPr>
+        <p:txBody>
+          <a:bodyPr wrap="square">
+            <a:spAutoFit/>
+          </a:bodyPr>
+          <a:lstStyle/>
+          <a:p>
+            <a:pPr>
+              <a:defRPr sz="2000" b="1">
+                <a:solidFill>
+                  <a:srgbClr val="FFFFFF"/>
+                </a:solidFill>
+                <a:latin typeface="Arial"/>
+              </a:defRPr>
+            </a:pPr>
+            <a:r>
+              <a:t>6. Quantitative Performance Metrics: Returns &amp; Alpha Generation</a:t>
+            </a:r>
+          </a:p>
+        </p:txBody>
+      </p:sp>
+      <p:sp>
+        <p:nvSpPr>
+          <p:cNvPr id="6" name="Rectangle 5"/>
+          <p:cNvSpPr/>
+          <p:nvPr/>
+        </p:nvSpPr>
+        <p:spPr>
+          <a:xfrm>
+            <a:off x="0" y="6492240"/>
+            <a:ext cx="12191695" cy="365760"/>
+          </a:xfrm>
+          <a:prstGeom prst="rect">
+            <a:avLst/>
+          </a:prstGeom>
+          <a:solidFill>
+            <a:srgbClr val="F8FAFC"/>
+          </a:solidFill>
+          <a:ln>
+            <a:solidFill>
+              <a:srgbClr val="E2E8F0"/>
+            </a:solidFill>
+          </a:ln>
+        </p:spPr>
+        <p:style>
+          <a:lnRef idx="1">
+            <a:schemeClr val="accent1"/>
+          </a:lnRef>
+          <a:fillRef idx="3">
+            <a:schemeClr val="accent1"/>
+          </a:fillRef>
+          <a:effectRef idx="2">
+            <a:schemeClr val="accent1"/>
+          </a:effectRef>
+          <a:fontRef idx="minor">
+            <a:schemeClr val="lt1"/>
+          </a:fontRef>
+        </p:style>
+        <p:txBody>
+          <a:bodyPr rtlCol="0" anchor="ctr"/>
+          <a:lstStyle/>
+          <a:p>
+            <a:pPr algn="ctr"/>
+          </a:p>
+        </p:txBody>
+      </p:sp>
+      <p:sp>
+        <p:nvSpPr>
+          <p:cNvPr id="7" name="TextBox 6"/>
+          <p:cNvSpPr txBox="1"/>
+          <p:nvPr/>
+        </p:nvSpPr>
+        <p:spPr>
+          <a:xfrm>
+            <a:off x="731520" y="6537960"/>
+            <a:ext cx="10515600" cy="274320"/>
+          </a:xfrm>
+          <a:prstGeom prst="rect">
+            <a:avLst/>
+          </a:prstGeom>
+          <a:noFill/>
+        </p:spPr>
+        <p:txBody>
+          <a:bodyPr wrap="none">
+            <a:spAutoFit/>
+          </a:bodyPr>
+          <a:lstStyle/>
+          <a:p>
+            <a:pPr>
+              <a:defRPr sz="850">
+                <a:solidFill>
+                  <a:srgbClr val="64748B"/>
+                </a:solidFill>
+                <a:latin typeface="Arial"/>
+              </a:defRPr>
+            </a:pPr>
+            <a:r>
+              <a:t>Confidential • Bluestock Fintech Analytics • Group: 62FMBF • Author: Rajeev Reddy</a:t>
+            </a:r>
+          </a:p>
+        </p:txBody>
+      </p:sp>
+      <p:sp>
+        <p:nvSpPr>
+          <p:cNvPr id="8" name="Rounded Rectangle 7"/>
+          <p:cNvSpPr/>
+          <p:nvPr/>
+        </p:nvSpPr>
+        <p:spPr>
+          <a:xfrm>
+            <a:off x="731520" y="1280160"/>
+            <a:ext cx="5852160" cy="4937760"/>
+          </a:xfrm>
+          <a:prstGeom prst="roundRect">
+            <a:avLst/>
+          </a:prstGeom>
+          <a:solidFill>
+            <a:srgbClr val="FFFFFF"/>
+          </a:solidFill>
+          <a:ln w="12700">
+            <a:solidFill>
+              <a:srgbClr val="E2E8F0"/>
+            </a:solidFill>
+          </a:ln>
+        </p:spPr>
+        <p:style>
+          <a:lnRef idx="1">
+            <a:schemeClr val="accent1"/>
+          </a:lnRef>
+          <a:fillRef idx="3">
+            <a:schemeClr val="accent1"/>
+          </a:fillRef>
+          <a:effectRef idx="2">
+            <a:schemeClr val="accent1"/>
+          </a:effectRef>
+          <a:fontRef idx="minor">
+            <a:schemeClr val="lt1"/>
+          </a:fontRef>
+        </p:style>
+        <p:txBody>
+          <a:bodyPr rtlCol="0" anchor="ctr"/>
+          <a:lstStyle/>
+          <a:p>
+            <a:pPr algn="ctr"/>
+          </a:p>
+        </p:txBody>
+      </p:sp>
+      <p:sp>
+        <p:nvSpPr>
+          <p:cNvPr id="9" name="TextBox 8"/>
+          <p:cNvSpPr txBox="1"/>
+          <p:nvPr/>
+        </p:nvSpPr>
+        <p:spPr>
+          <a:xfrm>
+            <a:off x="914400" y="1417319"/>
+            <a:ext cx="5486400" cy="411480"/>
+          </a:xfrm>
+          <a:prstGeom prst="rect">
+            <a:avLst/>
+          </a:prstGeom>
+          <a:noFill/>
+        </p:spPr>
+        <p:txBody>
+          <a:bodyPr wrap="square">
+            <a:spAutoFit/>
+          </a:bodyPr>
+          <a:lstStyle/>
+          <a:p>
+            <a:pPr>
+              <a:defRPr sz="1300" b="1">
+                <a:solidFill>
+                  <a:srgbClr val="1A365D"/>
+                </a:solidFill>
+                <a:latin typeface="Arial"/>
+              </a:defRPr>
+            </a:pPr>
+            <a:r>
+              <a:t>Top 5 Schemes vs Nifty 100 Benchmark</a:t>
+            </a:r>
+          </a:p>
+        </p:txBody>
+      </p:sp>
+      <p:pic>
+        <p:nvPicPr>
+          <p:cNvPr id="10" name="Picture 9" descr="benchmark_comparison_chart.png"/>
+          <p:cNvPicPr>
+            <a:picLocks noChangeAspect="1"/>
+          </p:cNvPicPr>
+          <p:nvPr/>
+        </p:nvPicPr>
+        <p:blipFill>
+          <a:blip r:embed="rId2"/>
+          <a:stretch>
+            <a:fillRect/>
+          </a:stretch>
+        </p:blipFill>
+        <p:spPr>
+          <a:xfrm>
+            <a:off x="868680" y="1828800"/>
+            <a:ext cx="5577840" cy="4206240"/>
+          </a:xfrm>
+          <a:prstGeom prst="rect">
+            <a:avLst/>
+          </a:prstGeom>
+        </p:spPr>
+      </p:pic>
+      <p:sp>
+        <p:nvSpPr>
+          <p:cNvPr id="11" name="Rounded Rectangle 10"/>
+          <p:cNvSpPr/>
+          <p:nvPr/>
+        </p:nvSpPr>
+        <p:spPr>
+          <a:xfrm>
+            <a:off x="6766560" y="1280160"/>
+            <a:ext cx="4663440" cy="4937760"/>
+          </a:xfrm>
+          <a:prstGeom prst="roundRect">
+            <a:avLst/>
+          </a:prstGeom>
+          <a:solidFill>
+            <a:srgbClr val="FFFFFF"/>
+          </a:solidFill>
+          <a:ln w="12700">
+            <a:solidFill>
+              <a:srgbClr val="E2E8F0"/>
+            </a:solidFill>
+          </a:ln>
+        </p:spPr>
+        <p:style>
+          <a:lnRef idx="1">
+            <a:schemeClr val="accent1"/>
+          </a:lnRef>
+          <a:fillRef idx="3">
+            <a:schemeClr val="accent1"/>
+          </a:fillRef>
+          <a:effectRef idx="2">
+            <a:schemeClr val="accent1"/>
+          </a:effectRef>
+          <a:fontRef idx="minor">
+            <a:schemeClr val="lt1"/>
+          </a:fontRef>
+        </p:style>
+        <p:txBody>
+          <a:bodyPr rtlCol="0" anchor="ctr"/>
+          <a:lstStyle/>
+          <a:p>
+            <a:pPr algn="ctr"/>
+          </a:p>
+        </p:txBody>
+      </p:sp>
+      <p:sp>
+        <p:nvSpPr>
+          <p:cNvPr id="12" name="TextBox 11"/>
+          <p:cNvSpPr txBox="1"/>
+          <p:nvPr/>
+        </p:nvSpPr>
+        <p:spPr>
+          <a:xfrm>
+            <a:off x="6949440" y="1417319"/>
+            <a:ext cx="4297679" cy="411480"/>
+          </a:xfrm>
+          <a:prstGeom prst="rect">
+            <a:avLst/>
+          </a:prstGeom>
+          <a:noFill/>
+        </p:spPr>
+        <p:txBody>
+          <a:bodyPr wrap="square">
+            <a:spAutoFit/>
+          </a:bodyPr>
+          <a:lstStyle/>
+          <a:p>
+            <a:pPr>
+              <a:defRPr sz="1300" b="1">
+                <a:solidFill>
+                  <a:srgbClr val="1A365D"/>
+                </a:solidFill>
+                <a:latin typeface="Arial"/>
+              </a:defRPr>
+            </a:pPr>
+            <a:r>
+              <a:t>Top Performing Schemes (Scorecard)</a:t>
+            </a:r>
+          </a:p>
+        </p:txBody>
+      </p:sp>
+      <p:sp>
+        <p:nvSpPr>
+          <p:cNvPr id="13" name="TextBox 12"/>
+          <p:cNvSpPr txBox="1"/>
+          <p:nvPr/>
+        </p:nvSpPr>
+        <p:spPr>
+          <a:xfrm>
+            <a:off x="6949440" y="1828800"/>
+            <a:ext cx="4297680" cy="4206240"/>
+          </a:xfrm>
+          <a:prstGeom prst="rect">
+            <a:avLst/>
+          </a:prstGeom>
+          <a:noFill/>
+        </p:spPr>
+        <p:txBody>
+          <a:bodyPr wrap="square">
+            <a:spAutoFit/>
+          </a:bodyPr>
+          <a:lstStyle/>
+          <a:p>
+            <a:pPr>
+              <a:spcAft>
+                <a:spcPts val="1000"/>
+              </a:spcAft>
+              <a:defRPr sz="1050">
+                <a:solidFill>
+                  <a:srgbClr val="1E293B"/>
+                </a:solidFill>
+                <a:latin typeface="Arial"/>
+              </a:defRPr>
+            </a:pPr>
+            <a:r>
+              <a:t>&lt;b&gt;Composite Scorecard Top 3:&lt;/b&gt;&lt;br/&gt;1. ICICI Pru Midcap Fund (Score: 84.5)&lt;br/&gt;2. HDFC Mid-Cap Opportunities (Score: 82.0)&lt;br/&gt;3. Axis Midcap Fund (Score: 80.8)</a:t>
+            </a:r>
+          </a:p>
+          <a:p>
+            <a:pPr>
+              <a:spcAft>
+                <a:spcPts val="1000"/>
+              </a:spcAft>
+              <a:defRPr sz="1050">
+                <a:solidFill>
+                  <a:srgbClr val="1E293B"/>
+                </a:solidFill>
+                <a:latin typeface="Arial"/>
+              </a:defRPr>
+            </a:pPr>
+            <a:r>
+              <a:t>&lt;b&gt;Alpha Generation vs Nifty 100:&lt;/b&gt;&lt;br/&gt;Mid-cap and Small-cap funds generated positive annual alpha between +3.2% and +6.8% over the 5-year cycle.</a:t>
+            </a:r>
+          </a:p>
+          <a:p>
+            <a:pPr>
+              <a:spcAft>
+                <a:spcPts val="1000"/>
+              </a:spcAft>
+              <a:defRPr sz="1050">
+                <a:solidFill>
+                  <a:srgbClr val="1E293B"/>
+                </a:solidFill>
+                <a:latin typeface="Arial"/>
+              </a:defRPr>
+            </a:pPr>
+            <a:r>
+              <a:t>&lt;b&gt;Risk-Adjusted Efficiency (Sharpe &amp; Sortino):&lt;/b&gt;&lt;br/&gt;Liquid and Hybrid funds achieved high Sharpe ratios (&gt;2.5) due to minimal downside volatility (Sortino &gt; 4.0).</a:t>
+            </a:r>
+          </a:p>
+          <a:p>
+            <a:pPr>
+              <a:spcAft>
+                <a:spcPts val="1000"/>
+              </a:spcAft>
+              <a:defRPr sz="1050">
+                <a:solidFill>
+                  <a:srgbClr val="1E293B"/>
+                </a:solidFill>
+                <a:latin typeface="Arial"/>
+              </a:defRPr>
+            </a:pPr>
+            <a:r>
+              <a:t>&lt;b&gt;Tracking Error:&lt;/b&gt; Large-cap passive index funds maintained tight tracking errors (&lt;0.45%), ensuring reliable benchmark replication.</a:t>
             </a:r>
           </a:p>
         </p:txBody>
@@ -6179,75 +8347,23 @@
       <p:grpSpPr/>
       <p:sp>
         <p:nvSpPr>
-          <p:cNvPr id="2" name="TextBox 1"/>
-          <p:cNvSpPr txBox="1"/>
-          <p:nvPr/>
-        </p:nvSpPr>
-        <p:spPr>
-          <a:xfrm>
-            <a:off x="731520" y="457200"/>
-            <a:ext cx="10698480" cy="1097280"/>
-          </a:xfrm>
-          <a:prstGeom prst="rect">
-            <a:avLst/>
-          </a:prstGeom>
-          <a:noFill/>
-        </p:spPr>
-        <p:txBody>
-          <a:bodyPr wrap="square" lIns="0" tIns="0" rIns="0" bIns="0">
-            <a:spAutoFit/>
-          </a:bodyPr>
-          <a:lstStyle/>
-          <a:p>
-            <a:pPr>
-              <a:defRPr sz="2800" b="1">
-                <a:solidFill>
-                  <a:srgbClr val="102C57"/>
-                </a:solidFill>
-              </a:defRPr>
-            </a:pPr>
-            <a:r>
-              <a:t>Fund Performance &amp; Risk Analytics</a:t>
-            </a:r>
-          </a:p>
-          <a:p>
-            <a:pPr>
-              <a:spcBef>
-                <a:spcPts val="400"/>
-              </a:spcBef>
-              <a:defRPr sz="1400">
-                <a:solidFill>
-                  <a:srgbClr val="6C757D"/>
-                </a:solidFill>
-              </a:defRPr>
-            </a:pPr>
-            <a:r>
-              <a:t>Risk-adjusted performance scoring across equity and debt categories</a:t>
-            </a:r>
-          </a:p>
-        </p:txBody>
-      </p:sp>
-      <p:sp>
-        <p:nvSpPr>
-          <p:cNvPr id="3" name="Rectangle 2"/>
+          <p:cNvPr id="2" name="Rectangle 1"/>
           <p:cNvSpPr/>
           <p:nvPr/>
         </p:nvSpPr>
         <p:spPr>
           <a:xfrm>
-            <a:off x="731520" y="1645920"/>
-            <a:ext cx="5120640" cy="4572000"/>
+            <a:off x="0" y="0"/>
+            <a:ext cx="12191695" cy="1005840"/>
           </a:xfrm>
           <a:prstGeom prst="rect">
             <a:avLst/>
           </a:prstGeom>
           <a:solidFill>
-            <a:srgbClr val="F5F7FA"/>
+            <a:srgbClr val="0F2537"/>
           </a:solidFill>
-          <a:ln w="19050">
-            <a:solidFill>
-              <a:srgbClr val="3565A9"/>
-            </a:solidFill>
+          <a:ln>
+            <a:noFill/>
           </a:ln>
         </p:spPr>
         <p:style>
@@ -6265,118 +8381,32 @@
           </a:fontRef>
         </p:style>
         <p:txBody>
-          <a:bodyPr rtlCol="0" anchor="ctr" wrap="square" lIns="274320" rIns="274320" tIns="228600" bIns="228600"/>
-          <a:lstStyle/>
-          <a:p>
-            <a:pPr algn="ctr">
-              <a:defRPr sz="1800" b="1">
-                <a:solidFill>
-                  <a:srgbClr val="102C57"/>
-                </a:solidFill>
-              </a:defRPr>
-            </a:pPr>
-            <a:r>
-              <a:t>Key Financial Metrics Computed</a:t>
-            </a:r>
-          </a:p>
-          <a:p>
-            <a:pPr>
-              <a:spcBef>
-                <a:spcPts val="600"/>
-              </a:spcBef>
-              <a:defRPr sz="1300">
-                <a:solidFill>
-                  <a:srgbClr val="212529"/>
-                </a:solidFill>
-              </a:defRPr>
-            </a:pPr>
-            <a:r>
-              <a:t>• CAGR: Compound Annual Growth Rate over 1-year, 3-year, and 5-year periods.</a:t>
-            </a:r>
-          </a:p>
-          <a:p>
-            <a:pPr>
-              <a:spcBef>
-                <a:spcPts val="600"/>
-              </a:spcBef>
-              <a:defRPr sz="1300">
-                <a:solidFill>
-                  <a:srgbClr val="212529"/>
-                </a:solidFill>
-              </a:defRPr>
-            </a:pPr>
-            <a:r>
-              <a:t>• Sharpe Ratio: Excess return per unit of total risk (annualized standard deviation).</a:t>
-            </a:r>
-          </a:p>
-          <a:p>
-            <a:pPr>
-              <a:spcBef>
-                <a:spcPts val="600"/>
-              </a:spcBef>
-              <a:defRPr sz="1300">
-                <a:solidFill>
-                  <a:srgbClr val="212529"/>
-                </a:solidFill>
-              </a:defRPr>
-            </a:pPr>
-            <a:r>
-              <a:t>• Sortino Ratio: Excess return adjusted specifically for downside semivariance.</a:t>
-            </a:r>
-          </a:p>
-          <a:p>
-            <a:pPr>
-              <a:spcBef>
-                <a:spcPts val="600"/>
-              </a:spcBef>
-              <a:defRPr sz="1300">
-                <a:solidFill>
-                  <a:srgbClr val="212529"/>
-                </a:solidFill>
-              </a:defRPr>
-            </a:pPr>
-            <a:r>
-              <a:t>• Treynor Ratio &amp; Jensen's Alpha: True active managerial value add over benchmark.</a:t>
-            </a:r>
-          </a:p>
-          <a:p>
-            <a:pPr>
-              <a:spcBef>
-                <a:spcPts val="600"/>
-              </a:spcBef>
-              <a:defRPr sz="1300">
-                <a:solidFill>
-                  <a:srgbClr val="212529"/>
-                </a:solidFill>
-              </a:defRPr>
-            </a:pPr>
-            <a:r>
-              <a:t>• Beta: Systemic market sensitivity relative to Nifty 50.</a:t>
-            </a:r>
-          </a:p>
-        </p:txBody>
-      </p:sp>
-      <p:sp>
-        <p:nvSpPr>
-          <p:cNvPr id="4" name="Rectangle 3"/>
+          <a:bodyPr rtlCol="0" anchor="ctr"/>
+          <a:lstStyle/>
+          <a:p>
+            <a:pPr algn="ctr"/>
+          </a:p>
+        </p:txBody>
+      </p:sp>
+      <p:sp>
+        <p:nvSpPr>
+          <p:cNvPr id="3" name="Rectangle 2"/>
           <p:cNvSpPr/>
           <p:nvPr/>
         </p:nvSpPr>
         <p:spPr>
           <a:xfrm>
-            <a:off x="6217920" y="1645920"/>
-            <a:ext cx="5120640" cy="4572000"/>
+            <a:off x="0" y="1005840"/>
+            <a:ext cx="12191695" cy="54864"/>
           </a:xfrm>
           <a:prstGeom prst="rect">
             <a:avLst/>
           </a:prstGeom>
           <a:solidFill>
-            <a:srgbClr val="F5F7FA"/>
+            <a:srgbClr val="0284C7"/>
           </a:solidFill>
-          <a:ln w="19050">
-            <a:solidFill>
-              <a:srgbClr val="3565A9"/>
-            </a:solidFill>
+          <a:ln>
+            <a:noFill/>
           </a:ln>
         </p:spPr>
         <p:style>
@@ -6394,78 +8424,435 @@
           </a:fontRef>
         </p:style>
         <p:txBody>
-          <a:bodyPr rtlCol="0" anchor="ctr" wrap="square" lIns="274320" rIns="274320" tIns="228600" bIns="228600"/>
-          <a:lstStyle/>
-          <a:p>
-            <a:pPr algn="ctr">
-              <a:defRPr sz="1800" b="1">
-                <a:solidFill>
-                  <a:srgbClr val="102C57"/>
-                </a:solidFill>
-              </a:defRPr>
-            </a:pPr>
-            <a:r>
-              <a:t>Performance Findings</a:t>
-            </a:r>
-          </a:p>
-          <a:p>
-            <a:pPr>
-              <a:spcBef>
-                <a:spcPts val="600"/>
-              </a:spcBef>
-              <a:defRPr sz="1300">
-                <a:solidFill>
-                  <a:srgbClr val="212529"/>
-                </a:solidFill>
-              </a:defRPr>
-            </a:pPr>
-            <a:r>
-              <a:t>• Small Cap and Mid Cap funds delivered superior 3-year annualized returns (&gt;18-22%).</a:t>
-            </a:r>
-          </a:p>
-          <a:p>
-            <a:pPr>
-              <a:spcBef>
-                <a:spcPts val="600"/>
-              </a:spcBef>
-              <a:defRPr sz="1300">
-                <a:solidFill>
-                  <a:srgbClr val="212529"/>
-                </a:solidFill>
-              </a:defRPr>
-            </a:pPr>
-            <a:r>
-              <a:t>• Large Cap Bluechip funds demonstrated highest Sortino ratios with limited downside drawdowns.</a:t>
-            </a:r>
-          </a:p>
-          <a:p>
-            <a:pPr>
-              <a:spcBef>
-                <a:spcPts val="600"/>
-              </a:spcBef>
-              <a:defRPr sz="1300">
-                <a:solidFill>
-                  <a:srgbClr val="212529"/>
-                </a:solidFill>
-              </a:defRPr>
-            </a:pPr>
-            <a:r>
-              <a:t>• Nippon Large Cap and ICICI Bluechip consistently generated positive Alpha vs Nifty 50.</a:t>
-            </a:r>
-          </a:p>
-          <a:p>
-            <a:pPr>
-              <a:spcBef>
-                <a:spcPts val="600"/>
-              </a:spcBef>
-              <a:defRPr sz="1300">
-                <a:solidFill>
-                  <a:srgbClr val="212529"/>
-                </a:solidFill>
-              </a:defRPr>
-            </a:pPr>
-            <a:r>
-              <a:t>• Direct plans outperformed Regular plan counterparts by 1.2% - 1.8% annualized net CAGR.</a:t>
+          <a:bodyPr rtlCol="0" anchor="ctr"/>
+          <a:lstStyle/>
+          <a:p>
+            <a:pPr algn="ctr"/>
+          </a:p>
+        </p:txBody>
+      </p:sp>
+      <p:sp>
+        <p:nvSpPr>
+          <p:cNvPr id="4" name="TextBox 3"/>
+          <p:cNvSpPr txBox="1"/>
+          <p:nvPr/>
+        </p:nvSpPr>
+        <p:spPr>
+          <a:xfrm>
+            <a:off x="731520" y="109728"/>
+            <a:ext cx="10515600" cy="274320"/>
+          </a:xfrm>
+          <a:prstGeom prst="rect">
+            <a:avLst/>
+          </a:prstGeom>
+          <a:noFill/>
+        </p:spPr>
+        <p:txBody>
+          <a:bodyPr wrap="square">
+            <a:spAutoFit/>
+          </a:bodyPr>
+          <a:lstStyle/>
+          <a:p>
+            <a:pPr>
+              <a:defRPr sz="900" b="1">
+                <a:solidFill>
+                  <a:srgbClr val="0284C7"/>
+                </a:solidFill>
+                <a:latin typeface="Arial"/>
+              </a:defRPr>
+            </a:pPr>
+            <a:r>
+              <a:t>BLUESTOCK FINTECH • MUTUAL FUND ANALYTICS CAPSTONE</a:t>
+            </a:r>
+          </a:p>
+        </p:txBody>
+      </p:sp>
+      <p:sp>
+        <p:nvSpPr>
+          <p:cNvPr id="5" name="TextBox 4"/>
+          <p:cNvSpPr txBox="1"/>
+          <p:nvPr/>
+        </p:nvSpPr>
+        <p:spPr>
+          <a:xfrm>
+            <a:off x="731520" y="347472"/>
+            <a:ext cx="10515600" cy="548640"/>
+          </a:xfrm>
+          <a:prstGeom prst="rect">
+            <a:avLst/>
+          </a:prstGeom>
+          <a:noFill/>
+        </p:spPr>
+        <p:txBody>
+          <a:bodyPr wrap="square">
+            <a:spAutoFit/>
+          </a:bodyPr>
+          <a:lstStyle/>
+          <a:p>
+            <a:pPr>
+              <a:defRPr sz="2000" b="1">
+                <a:solidFill>
+                  <a:srgbClr val="FFFFFF"/>
+                </a:solidFill>
+                <a:latin typeface="Arial"/>
+              </a:defRPr>
+            </a:pPr>
+            <a:r>
+              <a:t>7. Advanced Risk Analytics: Downside Risk, Drawdown &amp; VaR</a:t>
+            </a:r>
+          </a:p>
+        </p:txBody>
+      </p:sp>
+      <p:sp>
+        <p:nvSpPr>
+          <p:cNvPr id="6" name="Rectangle 5"/>
+          <p:cNvSpPr/>
+          <p:nvPr/>
+        </p:nvSpPr>
+        <p:spPr>
+          <a:xfrm>
+            <a:off x="0" y="6492240"/>
+            <a:ext cx="12191695" cy="365760"/>
+          </a:xfrm>
+          <a:prstGeom prst="rect">
+            <a:avLst/>
+          </a:prstGeom>
+          <a:solidFill>
+            <a:srgbClr val="F8FAFC"/>
+          </a:solidFill>
+          <a:ln>
+            <a:solidFill>
+              <a:srgbClr val="E2E8F0"/>
+            </a:solidFill>
+          </a:ln>
+        </p:spPr>
+        <p:style>
+          <a:lnRef idx="1">
+            <a:schemeClr val="accent1"/>
+          </a:lnRef>
+          <a:fillRef idx="3">
+            <a:schemeClr val="accent1"/>
+          </a:fillRef>
+          <a:effectRef idx="2">
+            <a:schemeClr val="accent1"/>
+          </a:effectRef>
+          <a:fontRef idx="minor">
+            <a:schemeClr val="lt1"/>
+          </a:fontRef>
+        </p:style>
+        <p:txBody>
+          <a:bodyPr rtlCol="0" anchor="ctr"/>
+          <a:lstStyle/>
+          <a:p>
+            <a:pPr algn="ctr"/>
+          </a:p>
+        </p:txBody>
+      </p:sp>
+      <p:sp>
+        <p:nvSpPr>
+          <p:cNvPr id="7" name="TextBox 6"/>
+          <p:cNvSpPr txBox="1"/>
+          <p:nvPr/>
+        </p:nvSpPr>
+        <p:spPr>
+          <a:xfrm>
+            <a:off x="731520" y="6537960"/>
+            <a:ext cx="10515600" cy="274320"/>
+          </a:xfrm>
+          <a:prstGeom prst="rect">
+            <a:avLst/>
+          </a:prstGeom>
+          <a:noFill/>
+        </p:spPr>
+        <p:txBody>
+          <a:bodyPr wrap="none">
+            <a:spAutoFit/>
+          </a:bodyPr>
+          <a:lstStyle/>
+          <a:p>
+            <a:pPr>
+              <a:defRPr sz="850">
+                <a:solidFill>
+                  <a:srgbClr val="64748B"/>
+                </a:solidFill>
+                <a:latin typeface="Arial"/>
+              </a:defRPr>
+            </a:pPr>
+            <a:r>
+              <a:t>Confidential • Bluestock Fintech Analytics • Group: 62FMBF • Author: Rajeev Reddy</a:t>
+            </a:r>
+          </a:p>
+        </p:txBody>
+      </p:sp>
+      <p:sp>
+        <p:nvSpPr>
+          <p:cNvPr id="8" name="Rounded Rectangle 7"/>
+          <p:cNvSpPr/>
+          <p:nvPr/>
+        </p:nvSpPr>
+        <p:spPr>
+          <a:xfrm>
+            <a:off x="731520" y="1280160"/>
+            <a:ext cx="5852160" cy="4937760"/>
+          </a:xfrm>
+          <a:prstGeom prst="roundRect">
+            <a:avLst/>
+          </a:prstGeom>
+          <a:solidFill>
+            <a:srgbClr val="FFFFFF"/>
+          </a:solidFill>
+          <a:ln w="12700">
+            <a:solidFill>
+              <a:srgbClr val="E2E8F0"/>
+            </a:solidFill>
+          </a:ln>
+        </p:spPr>
+        <p:style>
+          <a:lnRef idx="1">
+            <a:schemeClr val="accent1"/>
+          </a:lnRef>
+          <a:fillRef idx="3">
+            <a:schemeClr val="accent1"/>
+          </a:fillRef>
+          <a:effectRef idx="2">
+            <a:schemeClr val="accent1"/>
+          </a:effectRef>
+          <a:fontRef idx="minor">
+            <a:schemeClr val="lt1"/>
+          </a:fontRef>
+        </p:style>
+        <p:txBody>
+          <a:bodyPr rtlCol="0" anchor="ctr"/>
+          <a:lstStyle/>
+          <a:p>
+            <a:pPr algn="ctr"/>
+          </a:p>
+        </p:txBody>
+      </p:sp>
+      <p:sp>
+        <p:nvSpPr>
+          <p:cNvPr id="9" name="TextBox 8"/>
+          <p:cNvSpPr txBox="1"/>
+          <p:nvPr/>
+        </p:nvSpPr>
+        <p:spPr>
+          <a:xfrm>
+            <a:off x="914400" y="1417319"/>
+            <a:ext cx="5486400" cy="411480"/>
+          </a:xfrm>
+          <a:prstGeom prst="rect">
+            <a:avLst/>
+          </a:prstGeom>
+          <a:noFill/>
+        </p:spPr>
+        <p:txBody>
+          <a:bodyPr wrap="square">
+            <a:spAutoFit/>
+          </a:bodyPr>
+          <a:lstStyle/>
+          <a:p>
+            <a:pPr>
+              <a:defRPr sz="1300" b="1">
+                <a:solidFill>
+                  <a:srgbClr val="1A365D"/>
+                </a:solidFill>
+                <a:latin typeface="Arial"/>
+              </a:defRPr>
+            </a:pPr>
+            <a:r>
+              <a:t>90-Day Rolling Sharpe Ratio Trajectory</a:t>
+            </a:r>
+          </a:p>
+        </p:txBody>
+      </p:sp>
+      <p:pic>
+        <p:nvPicPr>
+          <p:cNvPr id="10" name="Picture 9" descr="rolling_sharpe_chart.png"/>
+          <p:cNvPicPr>
+            <a:picLocks noChangeAspect="1"/>
+          </p:cNvPicPr>
+          <p:nvPr/>
+        </p:nvPicPr>
+        <p:blipFill>
+          <a:blip r:embed="rId2"/>
+          <a:stretch>
+            <a:fillRect/>
+          </a:stretch>
+        </p:blipFill>
+        <p:spPr>
+          <a:xfrm>
+            <a:off x="868680" y="1828800"/>
+            <a:ext cx="5577840" cy="4206240"/>
+          </a:xfrm>
+          <a:prstGeom prst="rect">
+            <a:avLst/>
+          </a:prstGeom>
+        </p:spPr>
+      </p:pic>
+      <p:sp>
+        <p:nvSpPr>
+          <p:cNvPr id="11" name="Rounded Rectangle 10"/>
+          <p:cNvSpPr/>
+          <p:nvPr/>
+        </p:nvSpPr>
+        <p:spPr>
+          <a:xfrm>
+            <a:off x="6766560" y="1280160"/>
+            <a:ext cx="4663440" cy="4937760"/>
+          </a:xfrm>
+          <a:prstGeom prst="roundRect">
+            <a:avLst/>
+          </a:prstGeom>
+          <a:solidFill>
+            <a:srgbClr val="FFFFFF"/>
+          </a:solidFill>
+          <a:ln w="12700">
+            <a:solidFill>
+              <a:srgbClr val="E2E8F0"/>
+            </a:solidFill>
+          </a:ln>
+        </p:spPr>
+        <p:style>
+          <a:lnRef idx="1">
+            <a:schemeClr val="accent1"/>
+          </a:lnRef>
+          <a:fillRef idx="3">
+            <a:schemeClr val="accent1"/>
+          </a:fillRef>
+          <a:effectRef idx="2">
+            <a:schemeClr val="accent1"/>
+          </a:effectRef>
+          <a:fontRef idx="minor">
+            <a:schemeClr val="lt1"/>
+          </a:fontRef>
+        </p:style>
+        <p:txBody>
+          <a:bodyPr rtlCol="0" anchor="ctr"/>
+          <a:lstStyle/>
+          <a:p>
+            <a:pPr algn="ctr"/>
+          </a:p>
+        </p:txBody>
+      </p:sp>
+      <p:sp>
+        <p:nvSpPr>
+          <p:cNvPr id="12" name="TextBox 11"/>
+          <p:cNvSpPr txBox="1"/>
+          <p:nvPr/>
+        </p:nvSpPr>
+        <p:spPr>
+          <a:xfrm>
+            <a:off x="6949440" y="1417319"/>
+            <a:ext cx="4297679" cy="411480"/>
+          </a:xfrm>
+          <a:prstGeom prst="rect">
+            <a:avLst/>
+          </a:prstGeom>
+          <a:noFill/>
+        </p:spPr>
+        <p:txBody>
+          <a:bodyPr wrap="square">
+            <a:spAutoFit/>
+          </a:bodyPr>
+          <a:lstStyle/>
+          <a:p>
+            <a:pPr>
+              <a:defRPr sz="1300" b="1">
+                <a:solidFill>
+                  <a:srgbClr val="1A365D"/>
+                </a:solidFill>
+                <a:latin typeface="Arial"/>
+              </a:defRPr>
+            </a:pPr>
+            <a:r>
+              <a:t>Institutional Risk Metrics Summary</a:t>
+            </a:r>
+          </a:p>
+        </p:txBody>
+      </p:sp>
+      <p:sp>
+        <p:nvSpPr>
+          <p:cNvPr id="13" name="TextBox 12"/>
+          <p:cNvSpPr txBox="1"/>
+          <p:nvPr/>
+        </p:nvSpPr>
+        <p:spPr>
+          <a:xfrm>
+            <a:off x="6949440" y="1828800"/>
+            <a:ext cx="4297680" cy="4206240"/>
+          </a:xfrm>
+          <a:prstGeom prst="rect">
+            <a:avLst/>
+          </a:prstGeom>
+          <a:noFill/>
+        </p:spPr>
+        <p:txBody>
+          <a:bodyPr wrap="square">
+            <a:spAutoFit/>
+          </a:bodyPr>
+          <a:lstStyle/>
+          <a:p>
+            <a:pPr>
+              <a:spcAft>
+                <a:spcPts val="1000"/>
+              </a:spcAft>
+              <a:defRPr sz="1050">
+                <a:solidFill>
+                  <a:srgbClr val="1E293B"/>
+                </a:solidFill>
+                <a:latin typeface="Arial"/>
+              </a:defRPr>
+            </a:pPr>
+            <a:r>
+              <a:t>&lt;b&gt;Maximum Drawdown (Peak-to-Trough):&lt;/b&gt;&lt;br/&gt;Equity funds experienced peak drawdowns of -14.2% to -28.5% during macro shocks, with recovery horizons averaging 7.4 months.</a:t>
+            </a:r>
+          </a:p>
+          <a:p>
+            <a:pPr>
+              <a:spcAft>
+                <a:spcPts val="1000"/>
+              </a:spcAft>
+              <a:defRPr sz="1050">
+                <a:solidFill>
+                  <a:srgbClr val="1E293B"/>
+                </a:solidFill>
+                <a:latin typeface="Arial"/>
+              </a:defRPr>
+            </a:pPr>
+            <a:r>
+              <a:t>&lt;b&gt;Historical VaR (95% Daily):&lt;/b&gt;&lt;br/&gt;Small-cap funds exhibited 95% 1-day VaR up to -2.69%, indicating potential 1-day tail losses exceeding 2.7% on volatile trading days.</a:t>
+            </a:r>
+          </a:p>
+          <a:p>
+            <a:pPr>
+              <a:spcAft>
+                <a:spcPts val="1000"/>
+              </a:spcAft>
+              <a:defRPr sz="1050">
+                <a:solidFill>
+                  <a:srgbClr val="1E293B"/>
+                </a:solidFill>
+                <a:latin typeface="Arial"/>
+              </a:defRPr>
+            </a:pPr>
+            <a:r>
+              <a:t>&lt;b&gt;Conditional VaR (CVaR / Expected Shortfall):&lt;/b&gt;&lt;br/&gt;Quantifies average tail loss in the worst 5% of outcomes (ranging from -3.4% to -4.1% for high-beta equity).</a:t>
+            </a:r>
+          </a:p>
+          <a:p>
+            <a:pPr>
+              <a:spcAft>
+                <a:spcPts val="1000"/>
+              </a:spcAft>
+              <a:defRPr sz="1050">
+                <a:solidFill>
+                  <a:srgbClr val="1E293B"/>
+                </a:solidFill>
+                <a:latin typeface="Arial"/>
+              </a:defRPr>
+            </a:pPr>
+            <a:r>
+              <a:t>&lt;b&gt;Herfindahl-Hirschman Index (Sector HHI):&lt;/b&gt;&lt;br/&gt;Identified portfolios with HHI &gt; 2,000 (e.g. Axis Bluechip HHI=2,064), highlighting elevated financial sector concentration.</a:t>
             </a:r>
           </a:p>
         </p:txBody>
@@ -6490,75 +8877,23 @@
       <p:grpSpPr/>
       <p:sp>
         <p:nvSpPr>
-          <p:cNvPr id="2" name="TextBox 1"/>
-          <p:cNvSpPr txBox="1"/>
-          <p:nvPr/>
-        </p:nvSpPr>
-        <p:spPr>
-          <a:xfrm>
-            <a:off x="731520" y="457200"/>
-            <a:ext cx="10698480" cy="1097280"/>
-          </a:xfrm>
-          <a:prstGeom prst="rect">
-            <a:avLst/>
-          </a:prstGeom>
-          <a:noFill/>
-        </p:spPr>
-        <p:txBody>
-          <a:bodyPr wrap="square" lIns="0" tIns="0" rIns="0" bIns="0">
-            <a:spAutoFit/>
-          </a:bodyPr>
-          <a:lstStyle/>
-          <a:p>
-            <a:pPr>
-              <a:defRPr sz="2800" b="1">
-                <a:solidFill>
-                  <a:srgbClr val="102C57"/>
-                </a:solidFill>
-              </a:defRPr>
-            </a:pPr>
-            <a:r>
-              <a:t>Advanced Analytics &amp; Institutional Risk</a:t>
-            </a:r>
-          </a:p>
-          <a:p>
-            <a:pPr>
-              <a:spcBef>
-                <a:spcPts val="400"/>
-              </a:spcBef>
-              <a:defRPr sz="1400">
-                <a:solidFill>
-                  <a:srgbClr val="6C757D"/>
-                </a:solidFill>
-              </a:defRPr>
-            </a:pPr>
-            <a:r>
-              <a:t>Advanced statistical risk modeling: Rolling Sharpe, VaR/CVaR, and Concentration</a:t>
-            </a:r>
-          </a:p>
-        </p:txBody>
-      </p:sp>
-      <p:sp>
-        <p:nvSpPr>
-          <p:cNvPr id="3" name="Rectangle 2"/>
+          <p:cNvPr id="2" name="Rectangle 1"/>
           <p:cNvSpPr/>
           <p:nvPr/>
         </p:nvSpPr>
         <p:spPr>
           <a:xfrm>
-            <a:off x="731520" y="1645920"/>
-            <a:ext cx="5120640" cy="4572000"/>
+            <a:off x="0" y="0"/>
+            <a:ext cx="12191695" cy="1005840"/>
           </a:xfrm>
           <a:prstGeom prst="rect">
             <a:avLst/>
           </a:prstGeom>
           <a:solidFill>
-            <a:srgbClr val="F5F7FA"/>
+            <a:srgbClr val="0F2537"/>
           </a:solidFill>
-          <a:ln w="19050">
-            <a:solidFill>
-              <a:srgbClr val="3565A9"/>
-            </a:solidFill>
+          <a:ln>
+            <a:noFill/>
           </a:ln>
         </p:spPr>
         <p:style>
@@ -6576,103 +8911,32 @@
           </a:fontRef>
         </p:style>
         <p:txBody>
-          <a:bodyPr rtlCol="0" anchor="ctr" wrap="square" lIns="274320" rIns="274320" tIns="228600" bIns="228600"/>
-          <a:lstStyle/>
-          <a:p>
-            <a:pPr algn="ctr">
-              <a:defRPr sz="1800" b="1">
-                <a:solidFill>
-                  <a:srgbClr val="102C57"/>
-                </a:solidFill>
-              </a:defRPr>
-            </a:pPr>
-            <a:r>
-              <a:t>Value-at-Risk (VaR &amp; CVaR)</a:t>
-            </a:r>
-          </a:p>
-          <a:p>
-            <a:pPr>
-              <a:spcBef>
-                <a:spcPts val="600"/>
-              </a:spcBef>
-              <a:defRPr sz="1300">
-                <a:solidFill>
-                  <a:srgbClr val="212529"/>
-                </a:solidFill>
-              </a:defRPr>
-            </a:pPr>
-            <a:r>
-              <a:t>• Parametric &amp; Cornish-Fisher VaR computed at 95% and 99% confidence intervals.</a:t>
-            </a:r>
-          </a:p>
-          <a:p>
-            <a:pPr>
-              <a:spcBef>
-                <a:spcPts val="600"/>
-              </a:spcBef>
-              <a:defRPr sz="1300">
-                <a:solidFill>
-                  <a:srgbClr val="212529"/>
-                </a:solidFill>
-              </a:defRPr>
-            </a:pPr>
-            <a:r>
-              <a:t>• Conditional VaR (CVaR / Expected Shortfall) quantifies tail-risk losses during market crashes.</a:t>
-            </a:r>
-          </a:p>
-          <a:p>
-            <a:pPr>
-              <a:spcBef>
-                <a:spcPts val="600"/>
-              </a:spcBef>
-              <a:defRPr sz="1300">
-                <a:solidFill>
-                  <a:srgbClr val="212529"/>
-                </a:solidFill>
-              </a:defRPr>
-            </a:pPr>
-            <a:r>
-              <a:t>• Debt/Liquid funds exhibited near-zero VaR (&lt;0.08% daily), confirming capital preservation.</a:t>
-            </a:r>
-          </a:p>
-          <a:p>
-            <a:pPr>
-              <a:spcBef>
-                <a:spcPts val="600"/>
-              </a:spcBef>
-              <a:defRPr sz="1300">
-                <a:solidFill>
-                  <a:srgbClr val="212529"/>
-                </a:solidFill>
-              </a:defRPr>
-            </a:pPr>
-            <a:r>
-              <a:t>• Small Cap funds demonstrated 99% daily VaR of ~2.4%.</a:t>
-            </a:r>
-          </a:p>
-        </p:txBody>
-      </p:sp>
-      <p:sp>
-        <p:nvSpPr>
-          <p:cNvPr id="4" name="Rectangle 3"/>
+          <a:bodyPr rtlCol="0" anchor="ctr"/>
+          <a:lstStyle/>
+          <a:p>
+            <a:pPr algn="ctr"/>
+          </a:p>
+        </p:txBody>
+      </p:sp>
+      <p:sp>
+        <p:nvSpPr>
+          <p:cNvPr id="3" name="Rectangle 2"/>
           <p:cNvSpPr/>
           <p:nvPr/>
         </p:nvSpPr>
         <p:spPr>
           <a:xfrm>
-            <a:off x="6217920" y="1645920"/>
-            <a:ext cx="5120640" cy="4572000"/>
+            <a:off x="0" y="1005840"/>
+            <a:ext cx="12191695" cy="54864"/>
           </a:xfrm>
           <a:prstGeom prst="rect">
             <a:avLst/>
           </a:prstGeom>
           <a:solidFill>
-            <a:srgbClr val="F5F7FA"/>
+            <a:srgbClr val="0284C7"/>
           </a:solidFill>
-          <a:ln w="19050">
-            <a:solidFill>
-              <a:srgbClr val="3565A9"/>
-            </a:solidFill>
+          <a:ln>
+            <a:noFill/>
           </a:ln>
         </p:spPr>
         <p:style>
@@ -6690,82 +8954,376 @@
           </a:fontRef>
         </p:style>
         <p:txBody>
-          <a:bodyPr rtlCol="0" anchor="ctr" wrap="square" lIns="274320" rIns="274320" tIns="228600" bIns="228600"/>
-          <a:lstStyle/>
-          <a:p>
-            <a:pPr algn="ctr">
-              <a:defRPr sz="1800" b="1">
-                <a:solidFill>
-                  <a:srgbClr val="102C57"/>
-                </a:solidFill>
-              </a:defRPr>
-            </a:pPr>
-            <a:r>
-              <a:t>Portfolio Concentration &amp; Cohorts</a:t>
-            </a:r>
-          </a:p>
-          <a:p>
-            <a:pPr>
-              <a:spcBef>
-                <a:spcPts val="600"/>
-              </a:spcBef>
-              <a:defRPr sz="1300">
-                <a:solidFill>
-                  <a:srgbClr val="212529"/>
-                </a:solidFill>
-              </a:defRPr>
-            </a:pPr>
-            <a:r>
-              <a:t>• Herfindahl-Hirschman Index (HHI) computed for sector and stock portfolio weights.</a:t>
-            </a:r>
-          </a:p>
-          <a:p>
-            <a:pPr>
-              <a:spcBef>
-                <a:spcPts val="600"/>
-              </a:spcBef>
-              <a:defRPr sz="1300">
-                <a:solidFill>
-                  <a:srgbClr val="212529"/>
-                </a:solidFill>
-              </a:defRPr>
-            </a:pPr>
-            <a:r>
-              <a:t>• Banking &amp; Financial Services represented largest sector weight (~32%) across large caps.</a:t>
-            </a:r>
-          </a:p>
-          <a:p>
-            <a:pPr>
-              <a:spcBef>
-                <a:spcPts val="600"/>
-              </a:spcBef>
-              <a:defRPr sz="1300">
-                <a:solidFill>
-                  <a:srgbClr val="212529"/>
-                </a:solidFill>
-              </a:defRPr>
-            </a:pPr>
-            <a:r>
-              <a:t>• Rolling 90-Day Sharpe reveals risk-adjusted performance stability through market cycles.</a:t>
-            </a:r>
-          </a:p>
-          <a:p>
-            <a:pPr>
-              <a:spcBef>
-                <a:spcPts val="600"/>
-              </a:spcBef>
-              <a:defRPr sz="1300">
-                <a:solidFill>
-                  <a:srgbClr val="212529"/>
-                </a:solidFill>
-              </a:defRPr>
-            </a:pPr>
-            <a:r>
-              <a:t>• Investor Cohort Analysis shows strong SIP continuity (&gt;82% retention at 12 months).</a:t>
-            </a:r>
-          </a:p>
-        </p:txBody>
-      </p:sp>
+          <a:bodyPr rtlCol="0" anchor="ctr"/>
+          <a:lstStyle/>
+          <a:p>
+            <a:pPr algn="ctr"/>
+          </a:p>
+        </p:txBody>
+      </p:sp>
+      <p:sp>
+        <p:nvSpPr>
+          <p:cNvPr id="4" name="TextBox 3"/>
+          <p:cNvSpPr txBox="1"/>
+          <p:nvPr/>
+        </p:nvSpPr>
+        <p:spPr>
+          <a:xfrm>
+            <a:off x="731520" y="109728"/>
+            <a:ext cx="10515600" cy="274320"/>
+          </a:xfrm>
+          <a:prstGeom prst="rect">
+            <a:avLst/>
+          </a:prstGeom>
+          <a:noFill/>
+        </p:spPr>
+        <p:txBody>
+          <a:bodyPr wrap="square">
+            <a:spAutoFit/>
+          </a:bodyPr>
+          <a:lstStyle/>
+          <a:p>
+            <a:pPr>
+              <a:defRPr sz="900" b="1">
+                <a:solidFill>
+                  <a:srgbClr val="0284C7"/>
+                </a:solidFill>
+                <a:latin typeface="Arial"/>
+              </a:defRPr>
+            </a:pPr>
+            <a:r>
+              <a:t>BLUESTOCK FINTECH • MUTUAL FUND ANALYTICS CAPSTONE</a:t>
+            </a:r>
+          </a:p>
+        </p:txBody>
+      </p:sp>
+      <p:sp>
+        <p:nvSpPr>
+          <p:cNvPr id="5" name="TextBox 4"/>
+          <p:cNvSpPr txBox="1"/>
+          <p:nvPr/>
+        </p:nvSpPr>
+        <p:spPr>
+          <a:xfrm>
+            <a:off x="731520" y="347472"/>
+            <a:ext cx="10515600" cy="548640"/>
+          </a:xfrm>
+          <a:prstGeom prst="rect">
+            <a:avLst/>
+          </a:prstGeom>
+          <a:noFill/>
+        </p:spPr>
+        <p:txBody>
+          <a:bodyPr wrap="square">
+            <a:spAutoFit/>
+          </a:bodyPr>
+          <a:lstStyle/>
+          <a:p>
+            <a:pPr>
+              <a:defRPr sz="2000" b="1">
+                <a:solidFill>
+                  <a:srgbClr val="FFFFFF"/>
+                </a:solidFill>
+                <a:latin typeface="Arial"/>
+              </a:defRPr>
+            </a:pPr>
+            <a:r>
+              <a:t>8. Interactive Dashboard: Industry Macro &amp; Fund Screener</a:t>
+            </a:r>
+          </a:p>
+        </p:txBody>
+      </p:sp>
+      <p:sp>
+        <p:nvSpPr>
+          <p:cNvPr id="6" name="Rectangle 5"/>
+          <p:cNvSpPr/>
+          <p:nvPr/>
+        </p:nvSpPr>
+        <p:spPr>
+          <a:xfrm>
+            <a:off x="0" y="6492240"/>
+            <a:ext cx="12191695" cy="365760"/>
+          </a:xfrm>
+          <a:prstGeom prst="rect">
+            <a:avLst/>
+          </a:prstGeom>
+          <a:solidFill>
+            <a:srgbClr val="F8FAFC"/>
+          </a:solidFill>
+          <a:ln>
+            <a:solidFill>
+              <a:srgbClr val="E2E8F0"/>
+            </a:solidFill>
+          </a:ln>
+        </p:spPr>
+        <p:style>
+          <a:lnRef idx="1">
+            <a:schemeClr val="accent1"/>
+          </a:lnRef>
+          <a:fillRef idx="3">
+            <a:schemeClr val="accent1"/>
+          </a:fillRef>
+          <a:effectRef idx="2">
+            <a:schemeClr val="accent1"/>
+          </a:effectRef>
+          <a:fontRef idx="minor">
+            <a:schemeClr val="lt1"/>
+          </a:fontRef>
+        </p:style>
+        <p:txBody>
+          <a:bodyPr rtlCol="0" anchor="ctr"/>
+          <a:lstStyle/>
+          <a:p>
+            <a:pPr algn="ctr"/>
+          </a:p>
+        </p:txBody>
+      </p:sp>
+      <p:sp>
+        <p:nvSpPr>
+          <p:cNvPr id="7" name="TextBox 6"/>
+          <p:cNvSpPr txBox="1"/>
+          <p:nvPr/>
+        </p:nvSpPr>
+        <p:spPr>
+          <a:xfrm>
+            <a:off x="731520" y="6537960"/>
+            <a:ext cx="10515600" cy="274320"/>
+          </a:xfrm>
+          <a:prstGeom prst="rect">
+            <a:avLst/>
+          </a:prstGeom>
+          <a:noFill/>
+        </p:spPr>
+        <p:txBody>
+          <a:bodyPr wrap="none">
+            <a:spAutoFit/>
+          </a:bodyPr>
+          <a:lstStyle/>
+          <a:p>
+            <a:pPr>
+              <a:defRPr sz="850">
+                <a:solidFill>
+                  <a:srgbClr val="64748B"/>
+                </a:solidFill>
+                <a:latin typeface="Arial"/>
+              </a:defRPr>
+            </a:pPr>
+            <a:r>
+              <a:t>Confidential • Bluestock Fintech Analytics • Group: 62FMBF • Author: Rajeev Reddy</a:t>
+            </a:r>
+          </a:p>
+        </p:txBody>
+      </p:sp>
+      <p:sp>
+        <p:nvSpPr>
+          <p:cNvPr id="8" name="Rounded Rectangle 7"/>
+          <p:cNvSpPr/>
+          <p:nvPr/>
+        </p:nvSpPr>
+        <p:spPr>
+          <a:xfrm>
+            <a:off x="731520" y="1280160"/>
+            <a:ext cx="5212080" cy="4937760"/>
+          </a:xfrm>
+          <a:prstGeom prst="roundRect">
+            <a:avLst/>
+          </a:prstGeom>
+          <a:solidFill>
+            <a:srgbClr val="FFFFFF"/>
+          </a:solidFill>
+          <a:ln w="12700">
+            <a:solidFill>
+              <a:srgbClr val="E2E8F0"/>
+            </a:solidFill>
+          </a:ln>
+        </p:spPr>
+        <p:style>
+          <a:lnRef idx="1">
+            <a:schemeClr val="accent1"/>
+          </a:lnRef>
+          <a:fillRef idx="3">
+            <a:schemeClr val="accent1"/>
+          </a:fillRef>
+          <a:effectRef idx="2">
+            <a:schemeClr val="accent1"/>
+          </a:effectRef>
+          <a:fontRef idx="minor">
+            <a:schemeClr val="lt1"/>
+          </a:fontRef>
+        </p:style>
+        <p:txBody>
+          <a:bodyPr rtlCol="0" anchor="ctr"/>
+          <a:lstStyle/>
+          <a:p>
+            <a:pPr algn="ctr"/>
+          </a:p>
+        </p:txBody>
+      </p:sp>
+      <p:sp>
+        <p:nvSpPr>
+          <p:cNvPr id="9" name="TextBox 8"/>
+          <p:cNvSpPr txBox="1"/>
+          <p:nvPr/>
+        </p:nvSpPr>
+        <p:spPr>
+          <a:xfrm>
+            <a:off x="914400" y="1417319"/>
+            <a:ext cx="4846320" cy="411480"/>
+          </a:xfrm>
+          <a:prstGeom prst="rect">
+            <a:avLst/>
+          </a:prstGeom>
+          <a:noFill/>
+        </p:spPr>
+        <p:txBody>
+          <a:bodyPr wrap="square">
+            <a:spAutoFit/>
+          </a:bodyPr>
+          <a:lstStyle/>
+          <a:p>
+            <a:pPr>
+              <a:defRPr sz="1300" b="1">
+                <a:solidFill>
+                  <a:srgbClr val="1A365D"/>
+                </a:solidFill>
+                <a:latin typeface="Arial"/>
+              </a:defRPr>
+            </a:pPr>
+            <a:r>
+              <a:t>Screen 1: Industry Macro Trends</a:t>
+            </a:r>
+          </a:p>
+        </p:txBody>
+      </p:sp>
+      <p:pic>
+        <p:nvPicPr>
+          <p:cNvPr id="10" name="Picture 9" descr="dashboard_page_1.png"/>
+          <p:cNvPicPr>
+            <a:picLocks noChangeAspect="1"/>
+          </p:cNvPicPr>
+          <p:nvPr/>
+        </p:nvPicPr>
+        <p:blipFill>
+          <a:blip r:embed="rId2"/>
+          <a:stretch>
+            <a:fillRect/>
+          </a:stretch>
+        </p:blipFill>
+        <p:spPr>
+          <a:xfrm>
+            <a:off x="868680" y="1828800"/>
+            <a:ext cx="4937760" cy="4206240"/>
+          </a:xfrm>
+          <a:prstGeom prst="rect">
+            <a:avLst/>
+          </a:prstGeom>
+        </p:spPr>
+      </p:pic>
+      <p:sp>
+        <p:nvSpPr>
+          <p:cNvPr id="11" name="Rounded Rectangle 10"/>
+          <p:cNvSpPr/>
+          <p:nvPr/>
+        </p:nvSpPr>
+        <p:spPr>
+          <a:xfrm>
+            <a:off x="6217920" y="1280160"/>
+            <a:ext cx="5212080" cy="4937760"/>
+          </a:xfrm>
+          <a:prstGeom prst="roundRect">
+            <a:avLst/>
+          </a:prstGeom>
+          <a:solidFill>
+            <a:srgbClr val="FFFFFF"/>
+          </a:solidFill>
+          <a:ln w="12700">
+            <a:solidFill>
+              <a:srgbClr val="E2E8F0"/>
+            </a:solidFill>
+          </a:ln>
+        </p:spPr>
+        <p:style>
+          <a:lnRef idx="1">
+            <a:schemeClr val="accent1"/>
+          </a:lnRef>
+          <a:fillRef idx="3">
+            <a:schemeClr val="accent1"/>
+          </a:fillRef>
+          <a:effectRef idx="2">
+            <a:schemeClr val="accent1"/>
+          </a:effectRef>
+          <a:fontRef idx="minor">
+            <a:schemeClr val="lt1"/>
+          </a:fontRef>
+        </p:style>
+        <p:txBody>
+          <a:bodyPr rtlCol="0" anchor="ctr"/>
+          <a:lstStyle/>
+          <a:p>
+            <a:pPr algn="ctr"/>
+          </a:p>
+        </p:txBody>
+      </p:sp>
+      <p:sp>
+        <p:nvSpPr>
+          <p:cNvPr id="12" name="TextBox 11"/>
+          <p:cNvSpPr txBox="1"/>
+          <p:nvPr/>
+        </p:nvSpPr>
+        <p:spPr>
+          <a:xfrm>
+            <a:off x="6400800" y="1417319"/>
+            <a:ext cx="4846320" cy="411480"/>
+          </a:xfrm>
+          <a:prstGeom prst="rect">
+            <a:avLst/>
+          </a:prstGeom>
+          <a:noFill/>
+        </p:spPr>
+        <p:txBody>
+          <a:bodyPr wrap="square">
+            <a:spAutoFit/>
+          </a:bodyPr>
+          <a:lstStyle/>
+          <a:p>
+            <a:pPr>
+              <a:defRPr sz="1300" b="1">
+                <a:solidFill>
+                  <a:srgbClr val="1A365D"/>
+                </a:solidFill>
+                <a:latin typeface="Arial"/>
+              </a:defRPr>
+            </a:pPr>
+            <a:r>
+              <a:t>Screen 2: Fund Performance &amp; Scorecard</a:t>
+            </a:r>
+          </a:p>
+        </p:txBody>
+      </p:sp>
+      <p:pic>
+        <p:nvPicPr>
+          <p:cNvPr id="13" name="Picture 12" descr="dashboard_page_2.png"/>
+          <p:cNvPicPr>
+            <a:picLocks noChangeAspect="1"/>
+          </p:cNvPicPr>
+          <p:nvPr/>
+        </p:nvPicPr>
+        <p:blipFill>
+          <a:blip r:embed="rId3"/>
+          <a:stretch>
+            <a:fillRect/>
+          </a:stretch>
+        </p:blipFill>
+        <p:spPr>
+          <a:xfrm>
+            <a:off x="6355080" y="1828800"/>
+            <a:ext cx="4937760" cy="4206240"/>
+          </a:xfrm>
+          <a:prstGeom prst="rect">
+            <a:avLst/>
+          </a:prstGeom>
+        </p:spPr>
+      </p:pic>
     </p:spTree>
   </p:cSld>
   <p:clrMapOvr>
